--- a/apresentacao/slides.pptx
+++ b/apresentacao/slides.pptx
@@ -4,27 +4,30 @@
   <p:sldMasterIdLst>
     <p:sldMasterId id="2147483648" r:id="rId1"/>
   </p:sldMasterIdLst>
+  <p:notesMasterIdLst>
+    <p:notesMasterId r:id="rId20"/>
+  </p:notesMasterIdLst>
   <p:sldIdLst>
-    <p:sldId id="256" r:id="rId7"/>
-    <p:sldId id="257" r:id="rId8"/>
-    <p:sldId id="258" r:id="rId9"/>
-    <p:sldId id="259" r:id="rId10"/>
-    <p:sldId id="260" r:id="rId11"/>
-    <p:sldId id="261" r:id="rId12"/>
-    <p:sldId id="262" r:id="rId13"/>
-    <p:sldId id="263" r:id="rId14"/>
-    <p:sldId id="264" r:id="rId15"/>
-    <p:sldId id="265" r:id="rId16"/>
-    <p:sldId id="266" r:id="rId17"/>
-    <p:sldId id="267" r:id="rId18"/>
-    <p:sldId id="268" r:id="rId19"/>
-    <p:sldId id="269" r:id="rId20"/>
-    <p:sldId id="270" r:id="rId21"/>
-    <p:sldId id="271" r:id="rId22"/>
-    <p:sldId id="272" r:id="rId23"/>
-    <p:sldId id="273" r:id="rId24"/>
+    <p:sldId id="256" r:id="rId2"/>
+    <p:sldId id="257" r:id="rId3"/>
+    <p:sldId id="258" r:id="rId4"/>
+    <p:sldId id="259" r:id="rId5"/>
+    <p:sldId id="260" r:id="rId6"/>
+    <p:sldId id="261" r:id="rId7"/>
+    <p:sldId id="262" r:id="rId8"/>
+    <p:sldId id="263" r:id="rId9"/>
+    <p:sldId id="264" r:id="rId10"/>
+    <p:sldId id="265" r:id="rId11"/>
+    <p:sldId id="266" r:id="rId12"/>
+    <p:sldId id="267" r:id="rId13"/>
+    <p:sldId id="268" r:id="rId14"/>
+    <p:sldId id="269" r:id="rId15"/>
+    <p:sldId id="270" r:id="rId16"/>
+    <p:sldId id="271" r:id="rId17"/>
+    <p:sldId id="272" r:id="rId18"/>
+    <p:sldId id="273" r:id="rId19"/>
   </p:sldIdLst>
-  <p:sldSz cx="12191695" cy="6858000" type="screen4x3"/>
+  <p:sldSz cx="12192000" cy="6858000"/>
   <p:notesSz cx="6858000" cy="9144000"/>
   <p:defaultTextStyle>
     <a:defPPr>
@@ -121,7 +124,3733 @@
       </a:defRPr>
     </a:lvl9pPr>
   </p:defaultTextStyle>
+  <p:extLst>
+    <p:ext uri="{EFAFB233-063F-42B5-8137-9DF3F51BA10A}">
+      <p15:sldGuideLst xmlns:p15="http://schemas.microsoft.com/office/powerpoint/2012/main">
+        <p15:guide id="1" orient="horz" pos="2160">
+          <p15:clr>
+            <a:srgbClr val="A4A3A4"/>
+          </p15:clr>
+        </p15:guide>
+        <p15:guide id="2" pos="2880">
+          <p15:clr>
+            <a:srgbClr val="A4A3A4"/>
+          </p15:clr>
+        </p15:guide>
+      </p15:sldGuideLst>
+    </p:ext>
+  </p:extLst>
 </p:presentation>
+</file>
+
+<file path=ppt/notesMasters/notesMaster1.xml><?xml version="1.0" encoding="utf-8"?>
+<p:notesMaster xmlns:a="http://schemas.openxmlformats.org/drawingml/2006/main" xmlns:r="http://schemas.openxmlformats.org/officeDocument/2006/relationships" xmlns:p="http://schemas.openxmlformats.org/presentationml/2006/main">
+  <p:cSld>
+    <p:bg>
+      <p:bgRef idx="1001">
+        <a:schemeClr val="bg1"/>
+      </p:bgRef>
+    </p:bg>
+    <p:spTree>
+      <p:nvGrpSpPr>
+        <p:cNvPr id="1" name=""/>
+        <p:cNvGrpSpPr/>
+        <p:nvPr/>
+      </p:nvGrpSpPr>
+      <p:grpSpPr>
+        <a:xfrm>
+          <a:off x="0" y="0"/>
+          <a:ext cx="0" cy="0"/>
+          <a:chOff x="0" y="0"/>
+          <a:chExt cx="0" cy="0"/>
+        </a:xfrm>
+      </p:grpSpPr>
+      <p:sp>
+        <p:nvSpPr>
+          <p:cNvPr id="2" name="Espaço Reservado para Cabeçalho 1"/>
+          <p:cNvSpPr>
+            <a:spLocks noGrp="1"/>
+          </p:cNvSpPr>
+          <p:nvPr>
+            <p:ph type="hdr" sz="quarter"/>
+          </p:nvPr>
+        </p:nvSpPr>
+        <p:spPr>
+          <a:xfrm>
+            <a:off x="0" y="0"/>
+            <a:ext cx="2971800" cy="458788"/>
+          </a:xfrm>
+          <a:prstGeom prst="rect">
+            <a:avLst/>
+          </a:prstGeom>
+        </p:spPr>
+        <p:txBody>
+          <a:bodyPr vert="horz" lIns="91440" tIns="45720" rIns="91440" bIns="45720" rtlCol="0"/>
+          <a:lstStyle>
+            <a:lvl1pPr algn="l">
+              <a:defRPr sz="1200"/>
+            </a:lvl1pPr>
+          </a:lstStyle>
+          <a:p>
+            <a:endParaRPr lang="pt-BR"/>
+          </a:p>
+        </p:txBody>
+      </p:sp>
+      <p:sp>
+        <p:nvSpPr>
+          <p:cNvPr id="3" name="Espaço Reservado para Data 2"/>
+          <p:cNvSpPr>
+            <a:spLocks noGrp="1"/>
+          </p:cNvSpPr>
+          <p:nvPr>
+            <p:ph type="dt" idx="1"/>
+          </p:nvPr>
+        </p:nvSpPr>
+        <p:spPr>
+          <a:xfrm>
+            <a:off x="3884613" y="0"/>
+            <a:ext cx="2971800" cy="458788"/>
+          </a:xfrm>
+          <a:prstGeom prst="rect">
+            <a:avLst/>
+          </a:prstGeom>
+        </p:spPr>
+        <p:txBody>
+          <a:bodyPr vert="horz" lIns="91440" tIns="45720" rIns="91440" bIns="45720" rtlCol="0"/>
+          <a:lstStyle>
+            <a:lvl1pPr algn="r">
+              <a:defRPr sz="1200"/>
+            </a:lvl1pPr>
+          </a:lstStyle>
+          <a:p>
+            <a:fld id="{0884B748-1D13-4A1F-8063-4BC2BA8CF7B1}" type="datetimeFigureOut">
+              <a:rPr lang="pt-BR" smtClean="0"/>
+              <a:t>07/07/2026</a:t>
+            </a:fld>
+            <a:endParaRPr lang="pt-BR"/>
+          </a:p>
+        </p:txBody>
+      </p:sp>
+      <p:sp>
+        <p:nvSpPr>
+          <p:cNvPr id="4" name="Espaço Reservado para Imagem de Slide 3"/>
+          <p:cNvSpPr>
+            <a:spLocks noGrp="1" noRot="1" noChangeAspect="1"/>
+          </p:cNvSpPr>
+          <p:nvPr>
+            <p:ph type="sldImg" idx="2"/>
+          </p:nvPr>
+        </p:nvSpPr>
+        <p:spPr>
+          <a:xfrm>
+            <a:off x="685800" y="1143000"/>
+            <a:ext cx="5486400" cy="3086100"/>
+          </a:xfrm>
+          <a:prstGeom prst="rect">
+            <a:avLst/>
+          </a:prstGeom>
+          <a:noFill/>
+          <a:ln w="12700">
+            <a:solidFill>
+              <a:prstClr val="black"/>
+            </a:solidFill>
+          </a:ln>
+        </p:spPr>
+        <p:txBody>
+          <a:bodyPr vert="horz" lIns="91440" tIns="45720" rIns="91440" bIns="45720" rtlCol="0" anchor="ctr"/>
+          <a:lstStyle/>
+          <a:p>
+            <a:endParaRPr lang="pt-BR"/>
+          </a:p>
+        </p:txBody>
+      </p:sp>
+      <p:sp>
+        <p:nvSpPr>
+          <p:cNvPr id="5" name="Espaço Reservado para Anotações 4"/>
+          <p:cNvSpPr>
+            <a:spLocks noGrp="1"/>
+          </p:cNvSpPr>
+          <p:nvPr>
+            <p:ph type="body" sz="quarter" idx="3"/>
+          </p:nvPr>
+        </p:nvSpPr>
+        <p:spPr>
+          <a:xfrm>
+            <a:off x="685800" y="4400550"/>
+            <a:ext cx="5486400" cy="3600450"/>
+          </a:xfrm>
+          <a:prstGeom prst="rect">
+            <a:avLst/>
+          </a:prstGeom>
+        </p:spPr>
+        <p:txBody>
+          <a:bodyPr vert="horz" lIns="91440" tIns="45720" rIns="91440" bIns="45720" rtlCol="0"/>
+          <a:lstStyle/>
+          <a:p>
+            <a:pPr lvl="0"/>
+            <a:r>
+              <a:rPr lang="pt-BR"/>
+              <a:t>Clique para editar os estilos de texto Mestres</a:t>
+            </a:r>
+          </a:p>
+          <a:p>
+            <a:pPr lvl="1"/>
+            <a:r>
+              <a:rPr lang="pt-BR"/>
+              <a:t>Segundo nível</a:t>
+            </a:r>
+          </a:p>
+          <a:p>
+            <a:pPr lvl="2"/>
+            <a:r>
+              <a:rPr lang="pt-BR"/>
+              <a:t>Terceiro nível</a:t>
+            </a:r>
+          </a:p>
+          <a:p>
+            <a:pPr lvl="3"/>
+            <a:r>
+              <a:rPr lang="pt-BR"/>
+              <a:t>Quarto nível</a:t>
+            </a:r>
+          </a:p>
+          <a:p>
+            <a:pPr lvl="4"/>
+            <a:r>
+              <a:rPr lang="pt-BR"/>
+              <a:t>Quinto nível</a:t>
+            </a:r>
+          </a:p>
+        </p:txBody>
+      </p:sp>
+      <p:sp>
+        <p:nvSpPr>
+          <p:cNvPr id="6" name="Espaço Reservado para Rodapé 5"/>
+          <p:cNvSpPr>
+            <a:spLocks noGrp="1"/>
+          </p:cNvSpPr>
+          <p:nvPr>
+            <p:ph type="ftr" sz="quarter" idx="4"/>
+          </p:nvPr>
+        </p:nvSpPr>
+        <p:spPr>
+          <a:xfrm>
+            <a:off x="0" y="8685213"/>
+            <a:ext cx="2971800" cy="458787"/>
+          </a:xfrm>
+          <a:prstGeom prst="rect">
+            <a:avLst/>
+          </a:prstGeom>
+        </p:spPr>
+        <p:txBody>
+          <a:bodyPr vert="horz" lIns="91440" tIns="45720" rIns="91440" bIns="45720" rtlCol="0" anchor="b"/>
+          <a:lstStyle>
+            <a:lvl1pPr algn="l">
+              <a:defRPr sz="1200"/>
+            </a:lvl1pPr>
+          </a:lstStyle>
+          <a:p>
+            <a:endParaRPr lang="pt-BR"/>
+          </a:p>
+        </p:txBody>
+      </p:sp>
+      <p:sp>
+        <p:nvSpPr>
+          <p:cNvPr id="7" name="Espaço Reservado para Número de Slide 6"/>
+          <p:cNvSpPr>
+            <a:spLocks noGrp="1"/>
+          </p:cNvSpPr>
+          <p:nvPr>
+            <p:ph type="sldNum" sz="quarter" idx="5"/>
+          </p:nvPr>
+        </p:nvSpPr>
+        <p:spPr>
+          <a:xfrm>
+            <a:off x="3884613" y="8685213"/>
+            <a:ext cx="2971800" cy="458787"/>
+          </a:xfrm>
+          <a:prstGeom prst="rect">
+            <a:avLst/>
+          </a:prstGeom>
+        </p:spPr>
+        <p:txBody>
+          <a:bodyPr vert="horz" lIns="91440" tIns="45720" rIns="91440" bIns="45720" rtlCol="0" anchor="b"/>
+          <a:lstStyle>
+            <a:lvl1pPr algn="r">
+              <a:defRPr sz="1200"/>
+            </a:lvl1pPr>
+          </a:lstStyle>
+          <a:p>
+            <a:fld id="{ECAD9E62-5FC1-47F7-98F4-A2E33E4F32FD}" type="slidenum">
+              <a:rPr lang="pt-BR" smtClean="0"/>
+              <a:t>‹nº›</a:t>
+            </a:fld>
+            <a:endParaRPr lang="pt-BR"/>
+          </a:p>
+        </p:txBody>
+      </p:sp>
+    </p:spTree>
+    <p:extLst>
+      <p:ext uri="{BB962C8B-B14F-4D97-AF65-F5344CB8AC3E}">
+        <p14:creationId xmlns:p14="http://schemas.microsoft.com/office/powerpoint/2010/main" val="108252133"/>
+      </p:ext>
+    </p:extLst>
+  </p:cSld>
+  <p:clrMap bg1="lt1" tx1="dk1" bg2="lt2" tx2="dk2" accent1="accent1" accent2="accent2" accent3="accent3" accent4="accent4" accent5="accent5" accent6="accent6" hlink="hlink" folHlink="folHlink"/>
+  <p:notesStyle>
+    <a:lvl1pPr marL="0" algn="l" defTabSz="914400" rtl="0" eaLnBrk="1" latinLnBrk="0" hangingPunct="1">
+      <a:defRPr sz="1200" kern="1200">
+        <a:solidFill>
+          <a:schemeClr val="tx1"/>
+        </a:solidFill>
+        <a:latin typeface="+mn-lt"/>
+        <a:ea typeface="+mn-ea"/>
+        <a:cs typeface="+mn-cs"/>
+      </a:defRPr>
+    </a:lvl1pPr>
+    <a:lvl2pPr marL="457200" algn="l" defTabSz="914400" rtl="0" eaLnBrk="1" latinLnBrk="0" hangingPunct="1">
+      <a:defRPr sz="1200" kern="1200">
+        <a:solidFill>
+          <a:schemeClr val="tx1"/>
+        </a:solidFill>
+        <a:latin typeface="+mn-lt"/>
+        <a:ea typeface="+mn-ea"/>
+        <a:cs typeface="+mn-cs"/>
+      </a:defRPr>
+    </a:lvl2pPr>
+    <a:lvl3pPr marL="914400" algn="l" defTabSz="914400" rtl="0" eaLnBrk="1" latinLnBrk="0" hangingPunct="1">
+      <a:defRPr sz="1200" kern="1200">
+        <a:solidFill>
+          <a:schemeClr val="tx1"/>
+        </a:solidFill>
+        <a:latin typeface="+mn-lt"/>
+        <a:ea typeface="+mn-ea"/>
+        <a:cs typeface="+mn-cs"/>
+      </a:defRPr>
+    </a:lvl3pPr>
+    <a:lvl4pPr marL="1371600" algn="l" defTabSz="914400" rtl="0" eaLnBrk="1" latinLnBrk="0" hangingPunct="1">
+      <a:defRPr sz="1200" kern="1200">
+        <a:solidFill>
+          <a:schemeClr val="tx1"/>
+        </a:solidFill>
+        <a:latin typeface="+mn-lt"/>
+        <a:ea typeface="+mn-ea"/>
+        <a:cs typeface="+mn-cs"/>
+      </a:defRPr>
+    </a:lvl4pPr>
+    <a:lvl5pPr marL="1828800" algn="l" defTabSz="914400" rtl="0" eaLnBrk="1" latinLnBrk="0" hangingPunct="1">
+      <a:defRPr sz="1200" kern="1200">
+        <a:solidFill>
+          <a:schemeClr val="tx1"/>
+        </a:solidFill>
+        <a:latin typeface="+mn-lt"/>
+        <a:ea typeface="+mn-ea"/>
+        <a:cs typeface="+mn-cs"/>
+      </a:defRPr>
+    </a:lvl5pPr>
+    <a:lvl6pPr marL="2286000" algn="l" defTabSz="914400" rtl="0" eaLnBrk="1" latinLnBrk="0" hangingPunct="1">
+      <a:defRPr sz="1200" kern="1200">
+        <a:solidFill>
+          <a:schemeClr val="tx1"/>
+        </a:solidFill>
+        <a:latin typeface="+mn-lt"/>
+        <a:ea typeface="+mn-ea"/>
+        <a:cs typeface="+mn-cs"/>
+      </a:defRPr>
+    </a:lvl6pPr>
+    <a:lvl7pPr marL="2743200" algn="l" defTabSz="914400" rtl="0" eaLnBrk="1" latinLnBrk="0" hangingPunct="1">
+      <a:defRPr sz="1200" kern="1200">
+        <a:solidFill>
+          <a:schemeClr val="tx1"/>
+        </a:solidFill>
+        <a:latin typeface="+mn-lt"/>
+        <a:ea typeface="+mn-ea"/>
+        <a:cs typeface="+mn-cs"/>
+      </a:defRPr>
+    </a:lvl7pPr>
+    <a:lvl8pPr marL="3200400" algn="l" defTabSz="914400" rtl="0" eaLnBrk="1" latinLnBrk="0" hangingPunct="1">
+      <a:defRPr sz="1200" kern="1200">
+        <a:solidFill>
+          <a:schemeClr val="tx1"/>
+        </a:solidFill>
+        <a:latin typeface="+mn-lt"/>
+        <a:ea typeface="+mn-ea"/>
+        <a:cs typeface="+mn-cs"/>
+      </a:defRPr>
+    </a:lvl8pPr>
+    <a:lvl9pPr marL="3657600" algn="l" defTabSz="914400" rtl="0" eaLnBrk="1" latinLnBrk="0" hangingPunct="1">
+      <a:defRPr sz="1200" kern="1200">
+        <a:solidFill>
+          <a:schemeClr val="tx1"/>
+        </a:solidFill>
+        <a:latin typeface="+mn-lt"/>
+        <a:ea typeface="+mn-ea"/>
+        <a:cs typeface="+mn-cs"/>
+      </a:defRPr>
+    </a:lvl9pPr>
+  </p:notesStyle>
+</p:notesMaster>
+</file>
+
+<file path=ppt/notesSlides/notesSlide1.xml><?xml version="1.0" encoding="utf-8"?>
+<p:notes xmlns:a="http://schemas.openxmlformats.org/drawingml/2006/main" xmlns:r="http://schemas.openxmlformats.org/officeDocument/2006/relationships" xmlns:p="http://schemas.openxmlformats.org/presentationml/2006/main">
+  <p:cSld>
+    <p:spTree>
+      <p:nvGrpSpPr>
+        <p:cNvPr id="1" name=""/>
+        <p:cNvGrpSpPr/>
+        <p:nvPr/>
+      </p:nvGrpSpPr>
+      <p:grpSpPr>
+        <a:xfrm>
+          <a:off x="0" y="0"/>
+          <a:ext cx="0" cy="0"/>
+          <a:chOff x="0" y="0"/>
+          <a:chExt cx="0" cy="0"/>
+        </a:xfrm>
+      </p:grpSpPr>
+      <p:sp>
+        <p:nvSpPr>
+          <p:cNvPr id="2" name="Espaço Reservado para Imagem de Slide 1"/>
+          <p:cNvSpPr>
+            <a:spLocks noGrp="1" noRot="1" noChangeAspect="1"/>
+          </p:cNvSpPr>
+          <p:nvPr>
+            <p:ph type="sldImg"/>
+          </p:nvPr>
+        </p:nvSpPr>
+        <p:spPr/>
+      </p:sp>
+      <p:sp>
+        <p:nvSpPr>
+          <p:cNvPr id="3" name="Espaço Reservado para Anotações 2"/>
+          <p:cNvSpPr>
+            <a:spLocks noGrp="1"/>
+          </p:cNvSpPr>
+          <p:nvPr>
+            <p:ph type="body" idx="1"/>
+          </p:nvPr>
+        </p:nvSpPr>
+        <p:spPr/>
+        <p:txBody>
+          <a:bodyPr/>
+          <a:lstStyle/>
+          <a:p>
+            <a:r>
+              <a:rPr lang="pt-BR" sz="1200" b="0" kern="1200" dirty="0">
+                <a:solidFill>
+                  <a:schemeClr val="tx1"/>
+                </a:solidFill>
+                <a:effectLst/>
+                <a:latin typeface="+mn-lt"/>
+                <a:ea typeface="+mn-ea"/>
+                <a:cs typeface="+mn-cs"/>
+              </a:rPr>
+              <a:t>Bom dia. Meu nome é Felipe Pereira e vou apresentar meu trabalho de conclusão de curso: um sistema de recomendação de produtos para distribuição B2B usando regras de associação. O estudo de caso é a Quasar Barber, uma distribuidora de produtos de barbearia que eu mesmo administro, em Codó, no Maranhão."</a:t>
+            </a:r>
+          </a:p>
+          <a:p>
+            <a:br>
+              <a:rPr lang="pt-BR" sz="1200" b="0" kern="1200" dirty="0">
+                <a:solidFill>
+                  <a:schemeClr val="tx1"/>
+                </a:solidFill>
+                <a:effectLst/>
+                <a:latin typeface="+mn-lt"/>
+                <a:ea typeface="+mn-ea"/>
+                <a:cs typeface="+mn-cs"/>
+              </a:rPr>
+            </a:br>
+            <a:r>
+              <a:rPr lang="pt-BR" sz="1200" b="0" kern="1200" dirty="0">
+                <a:solidFill>
+                  <a:schemeClr val="tx1"/>
+                </a:solidFill>
+                <a:effectLst/>
+                <a:latin typeface="+mn-lt"/>
+                <a:ea typeface="+mn-ea"/>
+                <a:cs typeface="+mn-cs"/>
+              </a:rPr>
+              <a:t>Deixa: respire, não comece correndo. Olhe para a banca antes de avançar.</a:t>
+            </a:r>
+          </a:p>
+          <a:p>
+            <a:br>
+              <a:rPr lang="pt-BR" sz="1200" b="0" kern="1200" dirty="0">
+                <a:solidFill>
+                  <a:schemeClr val="tx1"/>
+                </a:solidFill>
+                <a:effectLst/>
+                <a:latin typeface="+mn-lt"/>
+                <a:ea typeface="+mn-ea"/>
+                <a:cs typeface="+mn-cs"/>
+              </a:rPr>
+            </a:br>
+            <a:endParaRPr lang="pt-BR" sz="1200" b="0" kern="1200" dirty="0">
+              <a:solidFill>
+                <a:schemeClr val="tx1"/>
+              </a:solidFill>
+              <a:effectLst/>
+              <a:latin typeface="+mn-lt"/>
+              <a:ea typeface="+mn-ea"/>
+              <a:cs typeface="+mn-cs"/>
+            </a:endParaRPr>
+          </a:p>
+          <a:p>
+            <a:endParaRPr lang="pt-BR" dirty="0"/>
+          </a:p>
+        </p:txBody>
+      </p:sp>
+      <p:sp>
+        <p:nvSpPr>
+          <p:cNvPr id="4" name="Espaço Reservado para Número de Slide 3"/>
+          <p:cNvSpPr>
+            <a:spLocks noGrp="1"/>
+          </p:cNvSpPr>
+          <p:nvPr>
+            <p:ph type="sldNum" sz="quarter" idx="5"/>
+          </p:nvPr>
+        </p:nvSpPr>
+        <p:spPr/>
+        <p:txBody>
+          <a:bodyPr/>
+          <a:lstStyle/>
+          <a:p>
+            <a:fld id="{ECAD9E62-5FC1-47F7-98F4-A2E33E4F32FD}" type="slidenum">
+              <a:rPr lang="pt-BR" smtClean="0"/>
+              <a:t>1</a:t>
+            </a:fld>
+            <a:endParaRPr lang="pt-BR"/>
+          </a:p>
+        </p:txBody>
+      </p:sp>
+    </p:spTree>
+    <p:extLst>
+      <p:ext uri="{BB962C8B-B14F-4D97-AF65-F5344CB8AC3E}">
+        <p14:creationId xmlns:p14="http://schemas.microsoft.com/office/powerpoint/2010/main" val="1480864006"/>
+      </p:ext>
+    </p:extLst>
+  </p:cSld>
+  <p:clrMapOvr>
+    <a:masterClrMapping/>
+  </p:clrMapOvr>
+</p:notes>
+</file>
+
+<file path=ppt/notesSlides/notesSlide10.xml><?xml version="1.0" encoding="utf-8"?>
+<p:notes xmlns:a="http://schemas.openxmlformats.org/drawingml/2006/main" xmlns:r="http://schemas.openxmlformats.org/officeDocument/2006/relationships" xmlns:p="http://schemas.openxmlformats.org/presentationml/2006/main">
+  <p:cSld>
+    <p:spTree>
+      <p:nvGrpSpPr>
+        <p:cNvPr id="1" name=""/>
+        <p:cNvGrpSpPr/>
+        <p:nvPr/>
+      </p:nvGrpSpPr>
+      <p:grpSpPr>
+        <a:xfrm>
+          <a:off x="0" y="0"/>
+          <a:ext cx="0" cy="0"/>
+          <a:chOff x="0" y="0"/>
+          <a:chExt cx="0" cy="0"/>
+        </a:xfrm>
+      </p:grpSpPr>
+      <p:sp>
+        <p:nvSpPr>
+          <p:cNvPr id="2" name="Espaço Reservado para Imagem de Slide 1"/>
+          <p:cNvSpPr>
+            <a:spLocks noGrp="1" noRot="1" noChangeAspect="1"/>
+          </p:cNvSpPr>
+          <p:nvPr>
+            <p:ph type="sldImg"/>
+          </p:nvPr>
+        </p:nvSpPr>
+        <p:spPr/>
+      </p:sp>
+      <p:sp>
+        <p:nvSpPr>
+          <p:cNvPr id="3" name="Espaço Reservado para Anotações 2"/>
+          <p:cNvSpPr>
+            <a:spLocks noGrp="1"/>
+          </p:cNvSpPr>
+          <p:nvPr>
+            <p:ph type="body" idx="1"/>
+          </p:nvPr>
+        </p:nvSpPr>
+        <p:spPr/>
+        <p:txBody>
+          <a:bodyPr/>
+          <a:lstStyle/>
+          <a:p>
+            <a:r>
+              <a:rPr lang="pt-BR" sz="1200" b="0" kern="1200" dirty="0">
+                <a:solidFill>
+                  <a:schemeClr val="tx1"/>
+                </a:solidFill>
+                <a:effectLst/>
+                <a:latin typeface="+mn-lt"/>
+                <a:ea typeface="+mn-ea"/>
+                <a:cs typeface="+mn-cs"/>
+              </a:rPr>
+              <a:t>"Esta é a arquitetura, em camadas. Na frente, a interface em </a:t>
+            </a:r>
+            <a:r>
+              <a:rPr lang="pt-BR" sz="1200" b="0" kern="1200" dirty="0" err="1">
+                <a:solidFill>
+                  <a:schemeClr val="tx1"/>
+                </a:solidFill>
+                <a:effectLst/>
+                <a:latin typeface="+mn-lt"/>
+                <a:ea typeface="+mn-ea"/>
+                <a:cs typeface="+mn-cs"/>
+              </a:rPr>
+              <a:t>React</a:t>
+            </a:r>
+            <a:r>
+              <a:rPr lang="pt-BR" sz="1200" b="0" kern="1200" dirty="0">
+                <a:solidFill>
+                  <a:schemeClr val="tx1"/>
+                </a:solidFill>
+                <a:effectLst/>
+                <a:latin typeface="+mn-lt"/>
+                <a:ea typeface="+mn-ea"/>
+                <a:cs typeface="+mn-cs"/>
+              </a:rPr>
+              <a:t>, onde o usuário busca um produto e vê as recomendações. Essa interface conversa com uma API REST em Node com Express. A API tem a camada de serviço, que é onde roda o algoritmo de regras e a geração do Top-N, com um cache opcional em Redis para acelerar consultas repetidas. E no fim, o banco no Supabase, que é PostgreSQL, guardando clientes, produtos, vendas e itens."</a:t>
+            </a:r>
+          </a:p>
+          <a:p>
+            <a:br>
+              <a:rPr lang="pt-BR" sz="1200" b="0" kern="1200" dirty="0">
+                <a:solidFill>
+                  <a:schemeClr val="tx1"/>
+                </a:solidFill>
+                <a:effectLst/>
+                <a:latin typeface="+mn-lt"/>
+                <a:ea typeface="+mn-ea"/>
+                <a:cs typeface="+mn-cs"/>
+              </a:rPr>
+            </a:br>
+            <a:r>
+              <a:rPr lang="pt-BR" sz="1200" b="0" kern="1200" dirty="0">
+                <a:solidFill>
+                  <a:schemeClr val="tx1"/>
+                </a:solidFill>
+                <a:effectLst/>
+                <a:latin typeface="+mn-lt"/>
+                <a:ea typeface="+mn-ea"/>
+                <a:cs typeface="+mn-cs"/>
+              </a:rPr>
+              <a:t>"O ponto que eu destaco é que tudo isso usa ferramenta gratuita ou de baixo custo. Roda numa máquina modesta."</a:t>
+            </a:r>
+          </a:p>
+          <a:p>
+            <a:br>
+              <a:rPr lang="pt-BR" sz="1200" b="0" kern="1200" dirty="0">
+                <a:solidFill>
+                  <a:schemeClr val="tx1"/>
+                </a:solidFill>
+                <a:effectLst/>
+                <a:latin typeface="+mn-lt"/>
+                <a:ea typeface="+mn-ea"/>
+                <a:cs typeface="+mn-cs"/>
+              </a:rPr>
+            </a:br>
+            <a:r>
+              <a:rPr lang="pt-BR" sz="1200" b="0" kern="1200" dirty="0">
+                <a:solidFill>
+                  <a:schemeClr val="tx1"/>
+                </a:solidFill>
+                <a:effectLst/>
+                <a:latin typeface="+mn-lt"/>
+                <a:ea typeface="+mn-ea"/>
+                <a:cs typeface="+mn-cs"/>
+              </a:rPr>
+              <a:t>Deixa: percorra o diagrama com a mão, de cima para baixo ou da frente para o banco. Não decore nome de biblioteca, conte o fluxo.</a:t>
+            </a:r>
+          </a:p>
+          <a:p>
+            <a:br>
+              <a:rPr lang="pt-BR" sz="1200" b="0" kern="1200" dirty="0">
+                <a:solidFill>
+                  <a:schemeClr val="tx1"/>
+                </a:solidFill>
+                <a:effectLst/>
+                <a:latin typeface="+mn-lt"/>
+                <a:ea typeface="+mn-ea"/>
+                <a:cs typeface="+mn-cs"/>
+              </a:rPr>
+            </a:br>
+            <a:endParaRPr lang="pt-BR" sz="1200" b="0" kern="1200" dirty="0">
+              <a:solidFill>
+                <a:schemeClr val="tx1"/>
+              </a:solidFill>
+              <a:effectLst/>
+              <a:latin typeface="+mn-lt"/>
+              <a:ea typeface="+mn-ea"/>
+              <a:cs typeface="+mn-cs"/>
+            </a:endParaRPr>
+          </a:p>
+          <a:p>
+            <a:endParaRPr lang="pt-BR" dirty="0"/>
+          </a:p>
+        </p:txBody>
+      </p:sp>
+      <p:sp>
+        <p:nvSpPr>
+          <p:cNvPr id="4" name="Espaço Reservado para Número de Slide 3"/>
+          <p:cNvSpPr>
+            <a:spLocks noGrp="1"/>
+          </p:cNvSpPr>
+          <p:nvPr>
+            <p:ph type="sldNum" sz="quarter" idx="5"/>
+          </p:nvPr>
+        </p:nvSpPr>
+        <p:spPr/>
+        <p:txBody>
+          <a:bodyPr/>
+          <a:lstStyle/>
+          <a:p>
+            <a:fld id="{ECAD9E62-5FC1-47F7-98F4-A2E33E4F32FD}" type="slidenum">
+              <a:rPr lang="pt-BR" smtClean="0"/>
+              <a:t>10</a:t>
+            </a:fld>
+            <a:endParaRPr lang="pt-BR"/>
+          </a:p>
+        </p:txBody>
+      </p:sp>
+    </p:spTree>
+    <p:extLst>
+      <p:ext uri="{BB962C8B-B14F-4D97-AF65-F5344CB8AC3E}">
+        <p14:creationId xmlns:p14="http://schemas.microsoft.com/office/powerpoint/2010/main" val="2072745750"/>
+      </p:ext>
+    </p:extLst>
+  </p:cSld>
+  <p:clrMapOvr>
+    <a:masterClrMapping/>
+  </p:clrMapOvr>
+</p:notes>
+</file>
+
+<file path=ppt/notesSlides/notesSlide11.xml><?xml version="1.0" encoding="utf-8"?>
+<p:notes xmlns:a="http://schemas.openxmlformats.org/drawingml/2006/main" xmlns:r="http://schemas.openxmlformats.org/officeDocument/2006/relationships" xmlns:p="http://schemas.openxmlformats.org/presentationml/2006/main">
+  <p:cSld>
+    <p:spTree>
+      <p:nvGrpSpPr>
+        <p:cNvPr id="1" name=""/>
+        <p:cNvGrpSpPr/>
+        <p:nvPr/>
+      </p:nvGrpSpPr>
+      <p:grpSpPr>
+        <a:xfrm>
+          <a:off x="0" y="0"/>
+          <a:ext cx="0" cy="0"/>
+          <a:chOff x="0" y="0"/>
+          <a:chExt cx="0" cy="0"/>
+        </a:xfrm>
+      </p:grpSpPr>
+      <p:sp>
+        <p:nvSpPr>
+          <p:cNvPr id="2" name="Espaço Reservado para Imagem de Slide 1"/>
+          <p:cNvSpPr>
+            <a:spLocks noGrp="1" noRot="1" noChangeAspect="1"/>
+          </p:cNvSpPr>
+          <p:nvPr>
+            <p:ph type="sldImg"/>
+          </p:nvPr>
+        </p:nvSpPr>
+        <p:spPr/>
+      </p:sp>
+      <p:sp>
+        <p:nvSpPr>
+          <p:cNvPr id="3" name="Espaço Reservado para Anotações 2"/>
+          <p:cNvSpPr>
+            <a:spLocks noGrp="1"/>
+          </p:cNvSpPr>
+          <p:nvPr>
+            <p:ph type="body" idx="1"/>
+          </p:nvPr>
+        </p:nvSpPr>
+        <p:spPr/>
+        <p:txBody>
+          <a:bodyPr/>
+          <a:lstStyle/>
+          <a:p>
+            <a:r>
+              <a:rPr lang="pt-BR" sz="1200" b="0" kern="1200" dirty="0">
+                <a:solidFill>
+                  <a:schemeClr val="tx1"/>
+                </a:solidFill>
+                <a:effectLst/>
+                <a:latin typeface="+mn-lt"/>
+                <a:ea typeface="+mn-ea"/>
+                <a:cs typeface="+mn-cs"/>
+              </a:rPr>
+              <a:t>"Antes dos resultados, preciso explicar como eu validei, porque essa foi uma decisão importante do trabalho."</a:t>
+            </a:r>
+          </a:p>
+          <a:p>
+            <a:br>
+              <a:rPr lang="pt-BR" sz="1200" b="0" kern="1200" dirty="0">
+                <a:solidFill>
+                  <a:schemeClr val="tx1"/>
+                </a:solidFill>
+                <a:effectLst/>
+                <a:latin typeface="+mn-lt"/>
+                <a:ea typeface="+mn-ea"/>
+                <a:cs typeface="+mn-cs"/>
+              </a:rPr>
+            </a:br>
+            <a:r>
+              <a:rPr lang="pt-BR" sz="1200" b="0" kern="1200" dirty="0">
+                <a:solidFill>
+                  <a:schemeClr val="tx1"/>
+                </a:solidFill>
+                <a:effectLst/>
+                <a:latin typeface="+mn-lt"/>
+                <a:ea typeface="+mn-ea"/>
+                <a:cs typeface="+mn-cs"/>
+              </a:rPr>
+              <a:t>"A primeira ideia seria separar 80% para treino e 20% para teste. Eu testei e descartei. Com 30 transações, esse teste sobra com só 3 cestas avaliáveis. Tirar conclusão de 3 casos é instável, não dá."</a:t>
+            </a:r>
+          </a:p>
+          <a:p>
+            <a:br>
+              <a:rPr lang="pt-BR" sz="1200" b="0" kern="1200" dirty="0">
+                <a:solidFill>
+                  <a:schemeClr val="tx1"/>
+                </a:solidFill>
+                <a:effectLst/>
+                <a:latin typeface="+mn-lt"/>
+                <a:ea typeface="+mn-ea"/>
+                <a:cs typeface="+mn-cs"/>
+              </a:rPr>
+            </a:br>
+            <a:r>
+              <a:rPr lang="pt-BR" sz="1200" b="0" kern="1200" dirty="0">
+                <a:solidFill>
+                  <a:schemeClr val="tx1"/>
+                </a:solidFill>
+                <a:effectLst/>
+                <a:latin typeface="+mn-lt"/>
+                <a:ea typeface="+mn-ea"/>
+                <a:cs typeface="+mn-cs"/>
+              </a:rPr>
+              <a:t>"Então adotei a validação cruzada </a:t>
+            </a:r>
+            <a:r>
+              <a:rPr lang="pt-BR" sz="1200" b="0" kern="1200" dirty="0" err="1">
+                <a:solidFill>
+                  <a:schemeClr val="tx1"/>
+                </a:solidFill>
+                <a:effectLst/>
+                <a:latin typeface="+mn-lt"/>
+                <a:ea typeface="+mn-ea"/>
+                <a:cs typeface="+mn-cs"/>
+              </a:rPr>
+              <a:t>Leave</a:t>
+            </a:r>
+            <a:r>
+              <a:rPr lang="pt-BR" sz="1200" b="0" kern="1200" dirty="0">
+                <a:solidFill>
+                  <a:schemeClr val="tx1"/>
+                </a:solidFill>
+                <a:effectLst/>
+                <a:latin typeface="+mn-lt"/>
+                <a:ea typeface="+mn-ea"/>
+                <a:cs typeface="+mn-cs"/>
+              </a:rPr>
+              <a:t>-</a:t>
+            </a:r>
+            <a:r>
+              <a:rPr lang="pt-BR" sz="1200" b="0" kern="1200" dirty="0" err="1">
+                <a:solidFill>
+                  <a:schemeClr val="tx1"/>
+                </a:solidFill>
+                <a:effectLst/>
+                <a:latin typeface="+mn-lt"/>
+                <a:ea typeface="+mn-ea"/>
+                <a:cs typeface="+mn-cs"/>
+              </a:rPr>
+              <a:t>One</a:t>
+            </a:r>
+            <a:r>
+              <a:rPr lang="pt-BR" sz="1200" b="0" kern="1200" dirty="0">
+                <a:solidFill>
+                  <a:schemeClr val="tx1"/>
+                </a:solidFill>
+                <a:effectLst/>
+                <a:latin typeface="+mn-lt"/>
+                <a:ea typeface="+mn-ea"/>
+                <a:cs typeface="+mn-cs"/>
+              </a:rPr>
+              <a:t>-Out, a LOOCV. A ideia é girar por todas as transações: a cada rodada eu treino com todas menos uma e testo naquela que sobrou. Assim eu aproveito todos os dados. O esquema é esconder um item: eu tiro um produto da cesta e vejo se o sistema consegue trazer ele de volta nas três recomendações."</a:t>
+            </a:r>
+          </a:p>
+          <a:p>
+            <a:br>
+              <a:rPr lang="pt-BR" sz="1200" b="0" kern="1200" dirty="0">
+                <a:solidFill>
+                  <a:schemeClr val="tx1"/>
+                </a:solidFill>
+                <a:effectLst/>
+                <a:latin typeface="+mn-lt"/>
+                <a:ea typeface="+mn-ea"/>
+                <a:cs typeface="+mn-cs"/>
+              </a:rPr>
+            </a:br>
+            <a:r>
+              <a:rPr lang="pt-BR" sz="1200" b="0" kern="1200" dirty="0">
+                <a:solidFill>
+                  <a:schemeClr val="tx1"/>
+                </a:solidFill>
+                <a:effectLst/>
+                <a:latin typeface="+mn-lt"/>
+                <a:ea typeface="+mn-ea"/>
+                <a:cs typeface="+mn-cs"/>
+              </a:rPr>
+              <a:t>"E tem um detalhe que muda a leitura dos números. Como eu escondo só um produto e o sistema sugere até três, a precisão máxima possível já é um terço, mais ou menos 0,33. Por isso, neste trabalho, o Recall e o F1 são os indicadores que mais dizem alguma coisa."</a:t>
+            </a:r>
+          </a:p>
+          <a:p>
+            <a:br>
+              <a:rPr lang="pt-BR" sz="1200" b="0" kern="1200" dirty="0">
+                <a:solidFill>
+                  <a:schemeClr val="tx1"/>
+                </a:solidFill>
+                <a:effectLst/>
+                <a:latin typeface="+mn-lt"/>
+                <a:ea typeface="+mn-ea"/>
+                <a:cs typeface="+mn-cs"/>
+              </a:rPr>
+            </a:br>
+            <a:r>
+              <a:rPr lang="pt-BR" sz="1200" b="0" kern="1200" dirty="0">
+                <a:solidFill>
+                  <a:schemeClr val="tx1"/>
+                </a:solidFill>
+                <a:effectLst/>
+                <a:latin typeface="+mn-lt"/>
+                <a:ea typeface="+mn-ea"/>
+                <a:cs typeface="+mn-cs"/>
+              </a:rPr>
+              <a:t>Deixa: este é o slide mais técnico. Vá devagar. Se a banca for cobrar metodologia, é aqui que você mostra rigor. O teto de 0,33 antecipa a defesa da precisão baixa no próximo slide.</a:t>
+            </a:r>
+          </a:p>
+          <a:p>
+            <a:endParaRPr lang="pt-BR" dirty="0"/>
+          </a:p>
+        </p:txBody>
+      </p:sp>
+      <p:sp>
+        <p:nvSpPr>
+          <p:cNvPr id="4" name="Espaço Reservado para Número de Slide 3"/>
+          <p:cNvSpPr>
+            <a:spLocks noGrp="1"/>
+          </p:cNvSpPr>
+          <p:nvPr>
+            <p:ph type="sldNum" sz="quarter" idx="5"/>
+          </p:nvPr>
+        </p:nvSpPr>
+        <p:spPr/>
+        <p:txBody>
+          <a:bodyPr/>
+          <a:lstStyle/>
+          <a:p>
+            <a:fld id="{ECAD9E62-5FC1-47F7-98F4-A2E33E4F32FD}" type="slidenum">
+              <a:rPr lang="pt-BR" smtClean="0"/>
+              <a:t>11</a:t>
+            </a:fld>
+            <a:endParaRPr lang="pt-BR"/>
+          </a:p>
+        </p:txBody>
+      </p:sp>
+    </p:spTree>
+    <p:extLst>
+      <p:ext uri="{BB962C8B-B14F-4D97-AF65-F5344CB8AC3E}">
+        <p14:creationId xmlns:p14="http://schemas.microsoft.com/office/powerpoint/2010/main" val="3758917044"/>
+      </p:ext>
+    </p:extLst>
+  </p:cSld>
+  <p:clrMapOvr>
+    <a:masterClrMapping/>
+  </p:clrMapOvr>
+</p:notes>
+</file>
+
+<file path=ppt/notesSlides/notesSlide12.xml><?xml version="1.0" encoding="utf-8"?>
+<p:notes xmlns:a="http://schemas.openxmlformats.org/drawingml/2006/main" xmlns:r="http://schemas.openxmlformats.org/officeDocument/2006/relationships" xmlns:p="http://schemas.openxmlformats.org/presentationml/2006/main">
+  <p:cSld>
+    <p:spTree>
+      <p:nvGrpSpPr>
+        <p:cNvPr id="1" name=""/>
+        <p:cNvGrpSpPr/>
+        <p:nvPr/>
+      </p:nvGrpSpPr>
+      <p:grpSpPr>
+        <a:xfrm>
+          <a:off x="0" y="0"/>
+          <a:ext cx="0" cy="0"/>
+          <a:chOff x="0" y="0"/>
+          <a:chExt cx="0" cy="0"/>
+        </a:xfrm>
+      </p:grpSpPr>
+      <p:sp>
+        <p:nvSpPr>
+          <p:cNvPr id="2" name="Espaço Reservado para Imagem de Slide 1"/>
+          <p:cNvSpPr>
+            <a:spLocks noGrp="1" noRot="1" noChangeAspect="1"/>
+          </p:cNvSpPr>
+          <p:nvPr>
+            <p:ph type="sldImg"/>
+          </p:nvPr>
+        </p:nvSpPr>
+        <p:spPr/>
+      </p:sp>
+      <p:sp>
+        <p:nvSpPr>
+          <p:cNvPr id="3" name="Espaço Reservado para Anotações 2"/>
+          <p:cNvSpPr>
+            <a:spLocks noGrp="1"/>
+          </p:cNvSpPr>
+          <p:nvPr>
+            <p:ph type="body" idx="1"/>
+          </p:nvPr>
+        </p:nvSpPr>
+        <p:spPr/>
+        <p:txBody>
+          <a:bodyPr/>
+          <a:lstStyle/>
+          <a:p>
+            <a:r>
+              <a:rPr lang="pt-BR" sz="1200" b="0" kern="1200" dirty="0">
+                <a:solidFill>
+                  <a:schemeClr val="tx1"/>
+                </a:solidFill>
+                <a:effectLst/>
+                <a:latin typeface="+mn-lt"/>
+                <a:ea typeface="+mn-ea"/>
+                <a:cs typeface="+mn-cs"/>
+              </a:rPr>
+              <a:t>"Agora os resultados. O algoritmo gerou 44 regras. A confiança média ficou em 76,51% e o lift médio em 12,41, ou seja, bem acima de 1."</a:t>
+            </a:r>
+          </a:p>
+          <a:p>
+            <a:br>
+              <a:rPr lang="pt-BR" sz="1200" b="0" kern="1200" dirty="0">
+                <a:solidFill>
+                  <a:schemeClr val="tx1"/>
+                </a:solidFill>
+                <a:effectLst/>
+                <a:latin typeface="+mn-lt"/>
+                <a:ea typeface="+mn-ea"/>
+                <a:cs typeface="+mn-cs"/>
+              </a:rPr>
+            </a:br>
+            <a:r>
+              <a:rPr lang="pt-BR" sz="1200" b="0" kern="1200" dirty="0">
+                <a:solidFill>
+                  <a:schemeClr val="tx1"/>
+                </a:solidFill>
+                <a:effectLst/>
+                <a:latin typeface="+mn-lt"/>
+                <a:ea typeface="+mn-ea"/>
+                <a:cs typeface="+mn-cs"/>
+              </a:rPr>
+              <a:t>"Na tabela estão as regras de maior lift. Por exemplo, quem compra o </a:t>
+            </a:r>
+            <a:r>
+              <a:rPr lang="pt-BR" sz="1200" b="0" kern="1200" dirty="0" err="1">
+                <a:solidFill>
+                  <a:schemeClr val="tx1"/>
+                </a:solidFill>
+                <a:effectLst/>
+                <a:latin typeface="+mn-lt"/>
+                <a:ea typeface="+mn-ea"/>
+                <a:cs typeface="+mn-cs"/>
+              </a:rPr>
+              <a:t>After</a:t>
+            </a:r>
+            <a:r>
+              <a:rPr lang="pt-BR" sz="1200" b="0" kern="1200" dirty="0">
+                <a:solidFill>
+                  <a:schemeClr val="tx1"/>
+                </a:solidFill>
+                <a:effectLst/>
+                <a:latin typeface="+mn-lt"/>
+                <a:ea typeface="+mn-ea"/>
+                <a:cs typeface="+mn-cs"/>
+              </a:rPr>
+              <a:t> </a:t>
+            </a:r>
+            <a:r>
+              <a:rPr lang="pt-BR" sz="1200" b="0" kern="1200" dirty="0" err="1">
+                <a:solidFill>
+                  <a:schemeClr val="tx1"/>
+                </a:solidFill>
+                <a:effectLst/>
+                <a:latin typeface="+mn-lt"/>
+                <a:ea typeface="+mn-ea"/>
+                <a:cs typeface="+mn-cs"/>
+              </a:rPr>
+              <a:t>Shave</a:t>
+            </a:r>
+            <a:r>
+              <a:rPr lang="pt-BR" sz="1200" b="0" kern="1200" dirty="0">
+                <a:solidFill>
+                  <a:schemeClr val="tx1"/>
+                </a:solidFill>
+                <a:effectLst/>
+                <a:latin typeface="+mn-lt"/>
+                <a:ea typeface="+mn-ea"/>
+                <a:cs typeface="+mn-cs"/>
+              </a:rPr>
+              <a:t> da QOD levou junto o Café Verde Shampoo da mesma marca, com confiança de 100%. O mesmo padrão aparece na linha Fox for </a:t>
+            </a:r>
+            <a:r>
+              <a:rPr lang="pt-BR" sz="1200" b="0" kern="1200" dirty="0" err="1">
+                <a:solidFill>
+                  <a:schemeClr val="tx1"/>
+                </a:solidFill>
+                <a:effectLst/>
+                <a:latin typeface="+mn-lt"/>
+                <a:ea typeface="+mn-ea"/>
+                <a:cs typeface="+mn-cs"/>
+              </a:rPr>
+              <a:t>Men</a:t>
+            </a:r>
+            <a:r>
+              <a:rPr lang="pt-BR" sz="1200" b="0" kern="1200" dirty="0">
+                <a:solidFill>
+                  <a:schemeClr val="tx1"/>
+                </a:solidFill>
+                <a:effectLst/>
+                <a:latin typeface="+mn-lt"/>
+                <a:ea typeface="+mn-ea"/>
+                <a:cs typeface="+mn-cs"/>
+              </a:rPr>
+              <a:t>, com shampoo e óleo de barba saindo juntos."</a:t>
+            </a:r>
+          </a:p>
+          <a:p>
+            <a:br>
+              <a:rPr lang="pt-BR" sz="1200" b="0" kern="1200" dirty="0">
+                <a:solidFill>
+                  <a:schemeClr val="tx1"/>
+                </a:solidFill>
+                <a:effectLst/>
+                <a:latin typeface="+mn-lt"/>
+                <a:ea typeface="+mn-ea"/>
+                <a:cs typeface="+mn-cs"/>
+              </a:rPr>
+            </a:br>
+            <a:r>
+              <a:rPr lang="pt-BR" sz="1200" b="0" kern="1200" dirty="0">
+                <a:solidFill>
+                  <a:schemeClr val="tx1"/>
+                </a:solidFill>
+                <a:effectLst/>
+                <a:latin typeface="+mn-lt"/>
+                <a:ea typeface="+mn-ea"/>
+                <a:cs typeface="+mn-cs"/>
+              </a:rPr>
+              <a:t>"E aqui eu faço uma ressalva honesta, que está embaixo da tabela: o lift mais alto costuma cair justamente nos pares mais raros, os de suporte baixo. Por isso eu nunca leio o lift sozinho, leio sempre junto com o conhecimento do negócio. À direita está o painel real do sistema, funcionando sobre esses dados."</a:t>
+            </a:r>
+          </a:p>
+          <a:p>
+            <a:br>
+              <a:rPr lang="pt-BR" sz="1200" b="0" kern="1200" dirty="0">
+                <a:solidFill>
+                  <a:schemeClr val="tx1"/>
+                </a:solidFill>
+                <a:effectLst/>
+                <a:latin typeface="+mn-lt"/>
+                <a:ea typeface="+mn-ea"/>
+                <a:cs typeface="+mn-cs"/>
+              </a:rPr>
+            </a:br>
+            <a:r>
+              <a:rPr lang="pt-BR" sz="1200" b="0" kern="1200" dirty="0">
+                <a:solidFill>
+                  <a:schemeClr val="tx1"/>
+                </a:solidFill>
+                <a:effectLst/>
+                <a:latin typeface="+mn-lt"/>
+                <a:ea typeface="+mn-ea"/>
+                <a:cs typeface="+mn-cs"/>
+              </a:rPr>
+              <a:t>Deixa: mostre a tabela e depois aponte o print do dashboard à direita, prova de que o sistema existe e roda.</a:t>
+            </a:r>
+          </a:p>
+          <a:p>
+            <a:endParaRPr lang="pt-BR" dirty="0"/>
+          </a:p>
+        </p:txBody>
+      </p:sp>
+      <p:sp>
+        <p:nvSpPr>
+          <p:cNvPr id="4" name="Espaço Reservado para Número de Slide 3"/>
+          <p:cNvSpPr>
+            <a:spLocks noGrp="1"/>
+          </p:cNvSpPr>
+          <p:nvPr>
+            <p:ph type="sldNum" sz="quarter" idx="5"/>
+          </p:nvPr>
+        </p:nvSpPr>
+        <p:spPr/>
+        <p:txBody>
+          <a:bodyPr/>
+          <a:lstStyle/>
+          <a:p>
+            <a:fld id="{ECAD9E62-5FC1-47F7-98F4-A2E33E4F32FD}" type="slidenum">
+              <a:rPr lang="pt-BR" smtClean="0"/>
+              <a:t>12</a:t>
+            </a:fld>
+            <a:endParaRPr lang="pt-BR"/>
+          </a:p>
+        </p:txBody>
+      </p:sp>
+    </p:spTree>
+    <p:extLst>
+      <p:ext uri="{BB962C8B-B14F-4D97-AF65-F5344CB8AC3E}">
+        <p14:creationId xmlns:p14="http://schemas.microsoft.com/office/powerpoint/2010/main" val="2001953928"/>
+      </p:ext>
+    </p:extLst>
+  </p:cSld>
+  <p:clrMapOvr>
+    <a:masterClrMapping/>
+  </p:clrMapOvr>
+</p:notes>
+</file>
+
+<file path=ppt/notesSlides/notesSlide13.xml><?xml version="1.0" encoding="utf-8"?>
+<p:notes xmlns:a="http://schemas.openxmlformats.org/drawingml/2006/main" xmlns:r="http://schemas.openxmlformats.org/officeDocument/2006/relationships" xmlns:p="http://schemas.openxmlformats.org/presentationml/2006/main">
+  <p:cSld>
+    <p:spTree>
+      <p:nvGrpSpPr>
+        <p:cNvPr id="1" name=""/>
+        <p:cNvGrpSpPr/>
+        <p:nvPr/>
+      </p:nvGrpSpPr>
+      <p:grpSpPr>
+        <a:xfrm>
+          <a:off x="0" y="0"/>
+          <a:ext cx="0" cy="0"/>
+          <a:chOff x="0" y="0"/>
+          <a:chExt cx="0" cy="0"/>
+        </a:xfrm>
+      </p:grpSpPr>
+      <p:sp>
+        <p:nvSpPr>
+          <p:cNvPr id="2" name="Espaço Reservado para Imagem de Slide 1"/>
+          <p:cNvSpPr>
+            <a:spLocks noGrp="1" noRot="1" noChangeAspect="1"/>
+          </p:cNvSpPr>
+          <p:nvPr>
+            <p:ph type="sldImg"/>
+          </p:nvPr>
+        </p:nvSpPr>
+        <p:spPr/>
+      </p:sp>
+      <p:sp>
+        <p:nvSpPr>
+          <p:cNvPr id="3" name="Espaço Reservado para Anotações 2"/>
+          <p:cNvSpPr>
+            <a:spLocks noGrp="1"/>
+          </p:cNvSpPr>
+          <p:nvPr>
+            <p:ph type="body" idx="1"/>
+          </p:nvPr>
+        </p:nvSpPr>
+        <p:spPr/>
+        <p:txBody>
+          <a:bodyPr/>
+          <a:lstStyle/>
+          <a:p>
+            <a:r>
+              <a:rPr lang="pt-BR" sz="1200" b="0" kern="1200" dirty="0">
+                <a:solidFill>
+                  <a:schemeClr val="tx1"/>
+                </a:solidFill>
+                <a:effectLst/>
+                <a:latin typeface="+mn-lt"/>
+                <a:ea typeface="+mn-ea"/>
+                <a:cs typeface="+mn-cs"/>
+              </a:rPr>
+              <a:t>"Estes são os números da validação. Precisão de 26,39%, Recall de 44,44% e F1 de 31,94%."</a:t>
+            </a:r>
+          </a:p>
+          <a:p>
+            <a:br>
+              <a:rPr lang="pt-BR" sz="1200" b="0" kern="1200" dirty="0">
+                <a:solidFill>
+                  <a:schemeClr val="tx1"/>
+                </a:solidFill>
+                <a:effectLst/>
+                <a:latin typeface="+mn-lt"/>
+                <a:ea typeface="+mn-ea"/>
+                <a:cs typeface="+mn-cs"/>
+              </a:rPr>
+            </a:br>
+            <a:r>
+              <a:rPr lang="pt-BR" sz="1200" b="0" kern="1200" dirty="0">
+                <a:solidFill>
+                  <a:schemeClr val="tx1"/>
+                </a:solidFill>
+                <a:effectLst/>
+                <a:latin typeface="+mn-lt"/>
+                <a:ea typeface="+mn-ea"/>
+                <a:cs typeface="+mn-cs"/>
+              </a:rPr>
+              <a:t>"A precisão parece baixa, mas lembrem do teto: o máximo possível era 0,33, e eu cheguei perto disso. Então não é erro de 73%, é consequência do desenho do teste. O número que eu peço para vocês olharem é o Recall. 44,44% quer dizer que, em 16 de 36 </a:t>
+            </a:r>
+            <a:r>
+              <a:rPr lang="pt-BR" sz="1200" b="0" kern="1200" dirty="0" err="1">
+                <a:solidFill>
+                  <a:schemeClr val="tx1"/>
+                </a:solidFill>
+                <a:effectLst/>
+                <a:latin typeface="+mn-lt"/>
+                <a:ea typeface="+mn-ea"/>
+                <a:cs typeface="+mn-cs"/>
+              </a:rPr>
+              <a:t>sub-testes</a:t>
+            </a:r>
+            <a:r>
+              <a:rPr lang="pt-BR" sz="1200" b="0" kern="1200" dirty="0">
+                <a:solidFill>
+                  <a:schemeClr val="tx1"/>
+                </a:solidFill>
+                <a:effectLst/>
+                <a:latin typeface="+mn-lt"/>
+                <a:ea typeface="+mn-ea"/>
+                <a:cs typeface="+mn-cs"/>
+              </a:rPr>
+              <a:t>, o sistema recolocou na cesta exatamente o produto que eu tinha escondido. Quase metade das vezes ele completou a compra certa, sem ter nenhuma nota de produto, só pela coocorrência."</a:t>
+            </a:r>
+          </a:p>
+          <a:p>
+            <a:br>
+              <a:rPr lang="pt-BR" sz="1200" b="0" kern="1200" dirty="0">
+                <a:solidFill>
+                  <a:schemeClr val="tx1"/>
+                </a:solidFill>
+                <a:effectLst/>
+                <a:latin typeface="+mn-lt"/>
+                <a:ea typeface="+mn-ea"/>
+                <a:cs typeface="+mn-cs"/>
+              </a:rPr>
+            </a:br>
+            <a:r>
+              <a:rPr lang="pt-BR" sz="1200" b="0" kern="1200" dirty="0">
+                <a:solidFill>
+                  <a:schemeClr val="tx1"/>
+                </a:solidFill>
+                <a:effectLst/>
+                <a:latin typeface="+mn-lt"/>
+                <a:ea typeface="+mn-ea"/>
+                <a:cs typeface="+mn-cs"/>
+              </a:rPr>
+              <a:t>"E para comparar: aquele teste 80/20 que eu descartei dava 22,22% em cima de 3 casos. A LOOCV é mais robusta porque percorre tudo e acumula 36 </a:t>
+            </a:r>
+            <a:r>
+              <a:rPr lang="pt-BR" sz="1200" b="0" kern="1200" dirty="0" err="1">
+                <a:solidFill>
+                  <a:schemeClr val="tx1"/>
+                </a:solidFill>
+                <a:effectLst/>
+                <a:latin typeface="+mn-lt"/>
+                <a:ea typeface="+mn-ea"/>
+                <a:cs typeface="+mn-cs"/>
+              </a:rPr>
+              <a:t>sub-testes</a:t>
+            </a:r>
+            <a:r>
+              <a:rPr lang="pt-BR" sz="1200" b="0" kern="1200" dirty="0">
+                <a:solidFill>
+                  <a:schemeClr val="tx1"/>
+                </a:solidFill>
+                <a:effectLst/>
+                <a:latin typeface="+mn-lt"/>
+                <a:ea typeface="+mn-ea"/>
+                <a:cs typeface="+mn-cs"/>
+              </a:rPr>
+              <a:t>."</a:t>
+            </a:r>
+          </a:p>
+          <a:p>
+            <a:br>
+              <a:rPr lang="pt-BR" sz="1200" b="0" kern="1200" dirty="0">
+                <a:solidFill>
+                  <a:schemeClr val="tx1"/>
+                </a:solidFill>
+                <a:effectLst/>
+                <a:latin typeface="+mn-lt"/>
+                <a:ea typeface="+mn-ea"/>
+                <a:cs typeface="+mn-cs"/>
+              </a:rPr>
+            </a:br>
+            <a:endParaRPr lang="pt-BR" sz="1200" b="0" kern="1200" dirty="0">
+              <a:solidFill>
+                <a:schemeClr val="tx1"/>
+              </a:solidFill>
+              <a:effectLst/>
+              <a:latin typeface="+mn-lt"/>
+              <a:ea typeface="+mn-ea"/>
+              <a:cs typeface="+mn-cs"/>
+            </a:endParaRPr>
+          </a:p>
+          <a:p>
+            <a:pPr marL="0" marR="0" lvl="0" indent="0" algn="l" defTabSz="914400" rtl="0" eaLnBrk="1" fontAlgn="auto" latinLnBrk="0" hangingPunct="1">
+              <a:lnSpc>
+                <a:spcPct val="100000"/>
+              </a:lnSpc>
+              <a:spcBef>
+                <a:spcPts val="0"/>
+              </a:spcBef>
+              <a:spcAft>
+                <a:spcPts val="0"/>
+              </a:spcAft>
+              <a:buClrTx/>
+              <a:buSzTx/>
+              <a:buFontTx/>
+              <a:buNone/>
+              <a:tabLst/>
+              <a:defRPr/>
+            </a:pPr>
+            <a:br>
+              <a:rPr lang="pt-BR" sz="1200" b="0" kern="1200" dirty="0">
+                <a:solidFill>
+                  <a:schemeClr val="tx1"/>
+                </a:solidFill>
+                <a:effectLst/>
+                <a:latin typeface="+mn-lt"/>
+                <a:ea typeface="+mn-ea"/>
+                <a:cs typeface="+mn-cs"/>
+              </a:rPr>
+            </a:br>
+            <a:r>
+              <a:rPr lang="pt-BR" sz="1200" b="0" kern="1200" dirty="0">
+                <a:solidFill>
+                  <a:schemeClr val="tx1"/>
+                </a:solidFill>
+                <a:effectLst/>
+                <a:latin typeface="+mn-lt"/>
+                <a:ea typeface="+mn-ea"/>
+                <a:cs typeface="+mn-cs"/>
+              </a:rPr>
+              <a:t>Deixa: aponte cada métrica nos </a:t>
+            </a:r>
+            <a:r>
+              <a:rPr lang="pt-BR" sz="1200" b="0" kern="1200" dirty="0" err="1">
+                <a:solidFill>
+                  <a:schemeClr val="tx1"/>
+                </a:solidFill>
+                <a:effectLst/>
+                <a:latin typeface="+mn-lt"/>
+                <a:ea typeface="+mn-ea"/>
+                <a:cs typeface="+mn-cs"/>
+              </a:rPr>
+              <a:t>cards</a:t>
+            </a:r>
+            <a:r>
+              <a:rPr lang="pt-BR" sz="1200" b="0" kern="1200" dirty="0">
+                <a:solidFill>
+                  <a:schemeClr val="tx1"/>
+                </a:solidFill>
+                <a:effectLst/>
+                <a:latin typeface="+mn-lt"/>
+                <a:ea typeface="+mn-ea"/>
+                <a:cs typeface="+mn-cs"/>
+              </a:rPr>
+              <a:t>. Defenda a precisão com calma, não como desculpa. O Recall é a sua vitória, fale com firmeza.</a:t>
+            </a:r>
+          </a:p>
+          <a:p>
+            <a:endParaRPr lang="pt-BR" dirty="0"/>
+          </a:p>
+        </p:txBody>
+      </p:sp>
+      <p:sp>
+        <p:nvSpPr>
+          <p:cNvPr id="4" name="Espaço Reservado para Número de Slide 3"/>
+          <p:cNvSpPr>
+            <a:spLocks noGrp="1"/>
+          </p:cNvSpPr>
+          <p:nvPr>
+            <p:ph type="sldNum" sz="quarter" idx="5"/>
+          </p:nvPr>
+        </p:nvSpPr>
+        <p:spPr/>
+        <p:txBody>
+          <a:bodyPr/>
+          <a:lstStyle/>
+          <a:p>
+            <a:fld id="{ECAD9E62-5FC1-47F7-98F4-A2E33E4F32FD}" type="slidenum">
+              <a:rPr lang="pt-BR" smtClean="0"/>
+              <a:t>13</a:t>
+            </a:fld>
+            <a:endParaRPr lang="pt-BR"/>
+          </a:p>
+        </p:txBody>
+      </p:sp>
+    </p:spTree>
+    <p:extLst>
+      <p:ext uri="{BB962C8B-B14F-4D97-AF65-F5344CB8AC3E}">
+        <p14:creationId xmlns:p14="http://schemas.microsoft.com/office/powerpoint/2010/main" val="2304785698"/>
+      </p:ext>
+    </p:extLst>
+  </p:cSld>
+  <p:clrMapOvr>
+    <a:masterClrMapping/>
+  </p:clrMapOvr>
+</p:notes>
+</file>
+
+<file path=ppt/notesSlides/notesSlide14.xml><?xml version="1.0" encoding="utf-8"?>
+<p:notes xmlns:a="http://schemas.openxmlformats.org/drawingml/2006/main" xmlns:r="http://schemas.openxmlformats.org/officeDocument/2006/relationships" xmlns:p="http://schemas.openxmlformats.org/presentationml/2006/main">
+  <p:cSld>
+    <p:spTree>
+      <p:nvGrpSpPr>
+        <p:cNvPr id="1" name=""/>
+        <p:cNvGrpSpPr/>
+        <p:nvPr/>
+      </p:nvGrpSpPr>
+      <p:grpSpPr>
+        <a:xfrm>
+          <a:off x="0" y="0"/>
+          <a:ext cx="0" cy="0"/>
+          <a:chOff x="0" y="0"/>
+          <a:chExt cx="0" cy="0"/>
+        </a:xfrm>
+      </p:grpSpPr>
+      <p:sp>
+        <p:nvSpPr>
+          <p:cNvPr id="2" name="Espaço Reservado para Imagem de Slide 1"/>
+          <p:cNvSpPr>
+            <a:spLocks noGrp="1" noRot="1" noChangeAspect="1"/>
+          </p:cNvSpPr>
+          <p:nvPr>
+            <p:ph type="sldImg"/>
+          </p:nvPr>
+        </p:nvSpPr>
+        <p:spPr/>
+      </p:sp>
+      <p:sp>
+        <p:nvSpPr>
+          <p:cNvPr id="3" name="Espaço Reservado para Anotações 2"/>
+          <p:cNvSpPr>
+            <a:spLocks noGrp="1"/>
+          </p:cNvSpPr>
+          <p:nvPr>
+            <p:ph type="body" idx="1"/>
+          </p:nvPr>
+        </p:nvSpPr>
+        <p:spPr/>
+        <p:txBody>
+          <a:bodyPr/>
+          <a:lstStyle/>
+          <a:p>
+            <a:r>
+              <a:rPr lang="pt-BR" sz="1200" b="0" kern="1200" dirty="0">
+                <a:solidFill>
+                  <a:schemeClr val="tx1"/>
+                </a:solidFill>
+                <a:effectLst/>
+                <a:latin typeface="+mn-lt"/>
+                <a:ea typeface="+mn-ea"/>
+                <a:cs typeface="+mn-cs"/>
+              </a:rPr>
+              <a:t>"Número não basta, a regra tem que fazer sentido para quem conhece o negócio, que nesse caso sou eu. E faz. As regras de maior lift batem com a prática: a rotina de barba, shampoo com óleo, bálsamo e pós-barba saindo juntos. A coerência de marca, com as linhas QOD e Fox for </a:t>
+            </a:r>
+            <a:r>
+              <a:rPr lang="pt-BR" sz="1200" b="0" kern="1200" dirty="0" err="1">
+                <a:solidFill>
+                  <a:schemeClr val="tx1"/>
+                </a:solidFill>
+                <a:effectLst/>
+                <a:latin typeface="+mn-lt"/>
+                <a:ea typeface="+mn-ea"/>
+                <a:cs typeface="+mn-cs"/>
+              </a:rPr>
+              <a:t>Men</a:t>
+            </a:r>
+            <a:r>
+              <a:rPr lang="pt-BR" sz="1200" b="0" kern="1200" dirty="0">
+                <a:solidFill>
+                  <a:schemeClr val="tx1"/>
+                </a:solidFill>
+                <a:effectLst/>
+                <a:latin typeface="+mn-lt"/>
+                <a:ea typeface="+mn-ea"/>
+                <a:cs typeface="+mn-cs"/>
+              </a:rPr>
+              <a:t>. E os acessórios de função parecida comprados na mesma cesta."</a:t>
+            </a:r>
+          </a:p>
+          <a:p>
+            <a:br>
+              <a:rPr lang="pt-BR" sz="1200" b="0" kern="1200" dirty="0">
+                <a:solidFill>
+                  <a:schemeClr val="tx1"/>
+                </a:solidFill>
+                <a:effectLst/>
+                <a:latin typeface="+mn-lt"/>
+                <a:ea typeface="+mn-ea"/>
+                <a:cs typeface="+mn-cs"/>
+              </a:rPr>
+            </a:br>
+            <a:r>
+              <a:rPr lang="pt-BR" sz="1200" b="0" kern="1200" dirty="0">
+                <a:solidFill>
+                  <a:schemeClr val="tx1"/>
+                </a:solidFill>
+                <a:effectLst/>
+                <a:latin typeface="+mn-lt"/>
+                <a:ea typeface="+mn-ea"/>
+                <a:cs typeface="+mn-cs"/>
+              </a:rPr>
+              <a:t>"Juntando tudo, eu não rejeito a H1. O lift médio de 12,41 está muito acima de 1, o que afasta o acaso. E os pares de maior lift não são os produtos mais vendidos, então eles carregam informação além da simples frequência. Isso é exatamente o que contraria a H0, a ideia de que bastaria recomendar os campeões de venda."</a:t>
+            </a:r>
+          </a:p>
+          <a:p>
+            <a:br>
+              <a:rPr lang="pt-BR" sz="1200" b="0" kern="1200" dirty="0">
+                <a:solidFill>
+                  <a:schemeClr val="tx1"/>
+                </a:solidFill>
+                <a:effectLst/>
+                <a:latin typeface="+mn-lt"/>
+                <a:ea typeface="+mn-ea"/>
+                <a:cs typeface="+mn-cs"/>
+              </a:rPr>
+            </a:br>
+            <a:r>
+              <a:rPr lang="pt-BR" sz="1200" b="0" kern="1200" dirty="0">
+                <a:solidFill>
+                  <a:schemeClr val="tx1"/>
+                </a:solidFill>
+                <a:effectLst/>
+                <a:latin typeface="+mn-lt"/>
+                <a:ea typeface="+mn-ea"/>
+                <a:cs typeface="+mn-cs"/>
+              </a:rPr>
+              <a:t>Deixa: este slide amarra resultado com hipótese. Leia a caixa azul com ênfase no "H1 não rejeitada".</a:t>
+            </a:r>
+          </a:p>
+          <a:p>
+            <a:endParaRPr lang="pt-BR" dirty="0"/>
+          </a:p>
+        </p:txBody>
+      </p:sp>
+      <p:sp>
+        <p:nvSpPr>
+          <p:cNvPr id="4" name="Espaço Reservado para Número de Slide 3"/>
+          <p:cNvSpPr>
+            <a:spLocks noGrp="1"/>
+          </p:cNvSpPr>
+          <p:nvPr>
+            <p:ph type="sldNum" sz="quarter" idx="5"/>
+          </p:nvPr>
+        </p:nvSpPr>
+        <p:spPr/>
+        <p:txBody>
+          <a:bodyPr/>
+          <a:lstStyle/>
+          <a:p>
+            <a:fld id="{ECAD9E62-5FC1-47F7-98F4-A2E33E4F32FD}" type="slidenum">
+              <a:rPr lang="pt-BR" smtClean="0"/>
+              <a:t>14</a:t>
+            </a:fld>
+            <a:endParaRPr lang="pt-BR"/>
+          </a:p>
+        </p:txBody>
+      </p:sp>
+    </p:spTree>
+    <p:extLst>
+      <p:ext uri="{BB962C8B-B14F-4D97-AF65-F5344CB8AC3E}">
+        <p14:creationId xmlns:p14="http://schemas.microsoft.com/office/powerpoint/2010/main" val="2170049378"/>
+      </p:ext>
+    </p:extLst>
+  </p:cSld>
+  <p:clrMapOvr>
+    <a:masterClrMapping/>
+  </p:clrMapOvr>
+</p:notes>
+</file>
+
+<file path=ppt/notesSlides/notesSlide15.xml><?xml version="1.0" encoding="utf-8"?>
+<p:notes xmlns:a="http://schemas.openxmlformats.org/drawingml/2006/main" xmlns:r="http://schemas.openxmlformats.org/officeDocument/2006/relationships" xmlns:p="http://schemas.openxmlformats.org/presentationml/2006/main">
+  <p:cSld>
+    <p:spTree>
+      <p:nvGrpSpPr>
+        <p:cNvPr id="1" name=""/>
+        <p:cNvGrpSpPr/>
+        <p:nvPr/>
+      </p:nvGrpSpPr>
+      <p:grpSpPr>
+        <a:xfrm>
+          <a:off x="0" y="0"/>
+          <a:ext cx="0" cy="0"/>
+          <a:chOff x="0" y="0"/>
+          <a:chExt cx="0" cy="0"/>
+        </a:xfrm>
+      </p:grpSpPr>
+      <p:sp>
+        <p:nvSpPr>
+          <p:cNvPr id="2" name="Espaço Reservado para Imagem de Slide 1"/>
+          <p:cNvSpPr>
+            <a:spLocks noGrp="1" noRot="1" noChangeAspect="1"/>
+          </p:cNvSpPr>
+          <p:nvPr>
+            <p:ph type="sldImg"/>
+          </p:nvPr>
+        </p:nvSpPr>
+        <p:spPr/>
+      </p:sp>
+      <p:sp>
+        <p:nvSpPr>
+          <p:cNvPr id="3" name="Espaço Reservado para Anotações 2"/>
+          <p:cNvSpPr>
+            <a:spLocks noGrp="1"/>
+          </p:cNvSpPr>
+          <p:nvPr>
+            <p:ph type="body" idx="1"/>
+          </p:nvPr>
+        </p:nvSpPr>
+        <p:spPr/>
+        <p:txBody>
+          <a:bodyPr/>
+          <a:lstStyle/>
+          <a:p>
+            <a:r>
+              <a:rPr lang="pt-BR" sz="1200" b="0" kern="1200" dirty="0">
+                <a:solidFill>
+                  <a:schemeClr val="tx1"/>
+                </a:solidFill>
+                <a:effectLst/>
+                <a:latin typeface="+mn-lt"/>
+                <a:ea typeface="+mn-ea"/>
+                <a:cs typeface="+mn-cs"/>
+              </a:rPr>
+              <a:t>"Respondendo a pergunta lá do começo: sim, dá para gerar recomendação relevante em B2B de baixo volume só com regras de associação, com uma ressalva de escala que eu faço questão de manter."</a:t>
+            </a:r>
+          </a:p>
+          <a:p>
+            <a:br>
+              <a:rPr lang="pt-BR" sz="1200" b="0" kern="1200" dirty="0">
+                <a:solidFill>
+                  <a:schemeClr val="tx1"/>
+                </a:solidFill>
+                <a:effectLst/>
+                <a:latin typeface="+mn-lt"/>
+                <a:ea typeface="+mn-ea"/>
+                <a:cs typeface="+mn-cs"/>
+              </a:rPr>
+            </a:br>
+            <a:r>
+              <a:rPr lang="pt-BR" sz="1200" b="0" kern="1200" dirty="0">
+                <a:solidFill>
+                  <a:schemeClr val="tx1"/>
+                </a:solidFill>
+                <a:effectLst/>
+                <a:latin typeface="+mn-lt"/>
+                <a:ea typeface="+mn-ea"/>
+                <a:cs typeface="+mn-cs"/>
+              </a:rPr>
+              <a:t>"As contribuições foram três. Um artefato completo e reproduzível, barato, rodando sobre dado real. Uma contribuição de método, a LOOCV com a leitura honesta do teto da precisão. E o entendimento de que essas recomendações são apoio à decisão do vendedor, não uma ordem automática."</a:t>
+            </a:r>
+          </a:p>
+          <a:p>
+            <a:br>
+              <a:rPr lang="pt-BR" sz="1200" b="0" kern="1200" dirty="0">
+                <a:solidFill>
+                  <a:schemeClr val="tx1"/>
+                </a:solidFill>
+                <a:effectLst/>
+                <a:latin typeface="+mn-lt"/>
+                <a:ea typeface="+mn-ea"/>
+                <a:cs typeface="+mn-cs"/>
+              </a:rPr>
+            </a:br>
+            <a:r>
+              <a:rPr lang="pt-BR" sz="1200" b="0" kern="1200" dirty="0">
+                <a:solidFill>
+                  <a:schemeClr val="tx1"/>
+                </a:solidFill>
+                <a:effectLst/>
+                <a:latin typeface="+mn-lt"/>
+                <a:ea typeface="+mn-ea"/>
+                <a:cs typeface="+mn-cs"/>
+              </a:rPr>
+              <a:t>Deixa: tom de fechamento. Mais devagar, mais firme. Você está consolidando.</a:t>
+            </a:r>
+          </a:p>
+          <a:p>
+            <a:endParaRPr lang="pt-BR" dirty="0"/>
+          </a:p>
+        </p:txBody>
+      </p:sp>
+      <p:sp>
+        <p:nvSpPr>
+          <p:cNvPr id="4" name="Espaço Reservado para Número de Slide 3"/>
+          <p:cNvSpPr>
+            <a:spLocks noGrp="1"/>
+          </p:cNvSpPr>
+          <p:nvPr>
+            <p:ph type="sldNum" sz="quarter" idx="5"/>
+          </p:nvPr>
+        </p:nvSpPr>
+        <p:spPr/>
+        <p:txBody>
+          <a:bodyPr/>
+          <a:lstStyle/>
+          <a:p>
+            <a:fld id="{ECAD9E62-5FC1-47F7-98F4-A2E33E4F32FD}" type="slidenum">
+              <a:rPr lang="pt-BR" smtClean="0"/>
+              <a:t>15</a:t>
+            </a:fld>
+            <a:endParaRPr lang="pt-BR"/>
+          </a:p>
+        </p:txBody>
+      </p:sp>
+    </p:spTree>
+    <p:extLst>
+      <p:ext uri="{BB962C8B-B14F-4D97-AF65-F5344CB8AC3E}">
+        <p14:creationId xmlns:p14="http://schemas.microsoft.com/office/powerpoint/2010/main" val="1549756206"/>
+      </p:ext>
+    </p:extLst>
+  </p:cSld>
+  <p:clrMapOvr>
+    <a:masterClrMapping/>
+  </p:clrMapOvr>
+</p:notes>
+</file>
+
+<file path=ppt/notesSlides/notesSlide16.xml><?xml version="1.0" encoding="utf-8"?>
+<p:notes xmlns:a="http://schemas.openxmlformats.org/drawingml/2006/main" xmlns:r="http://schemas.openxmlformats.org/officeDocument/2006/relationships" xmlns:p="http://schemas.openxmlformats.org/presentationml/2006/main">
+  <p:cSld>
+    <p:spTree>
+      <p:nvGrpSpPr>
+        <p:cNvPr id="1" name=""/>
+        <p:cNvGrpSpPr/>
+        <p:nvPr/>
+      </p:nvGrpSpPr>
+      <p:grpSpPr>
+        <a:xfrm>
+          <a:off x="0" y="0"/>
+          <a:ext cx="0" cy="0"/>
+          <a:chOff x="0" y="0"/>
+          <a:chExt cx="0" cy="0"/>
+        </a:xfrm>
+      </p:grpSpPr>
+      <p:sp>
+        <p:nvSpPr>
+          <p:cNvPr id="2" name="Espaço Reservado para Imagem de Slide 1"/>
+          <p:cNvSpPr>
+            <a:spLocks noGrp="1" noRot="1" noChangeAspect="1"/>
+          </p:cNvSpPr>
+          <p:nvPr>
+            <p:ph type="sldImg"/>
+          </p:nvPr>
+        </p:nvSpPr>
+        <p:spPr/>
+      </p:sp>
+      <p:sp>
+        <p:nvSpPr>
+          <p:cNvPr id="3" name="Espaço Reservado para Anotações 2"/>
+          <p:cNvSpPr>
+            <a:spLocks noGrp="1"/>
+          </p:cNvSpPr>
+          <p:nvPr>
+            <p:ph type="body" idx="1"/>
+          </p:nvPr>
+        </p:nvSpPr>
+        <p:spPr/>
+        <p:txBody>
+          <a:bodyPr/>
+          <a:lstStyle/>
+          <a:p>
+            <a:r>
+              <a:rPr lang="pt-BR" sz="1200" b="0" kern="1200" dirty="0">
+                <a:solidFill>
+                  <a:schemeClr val="tx1"/>
+                </a:solidFill>
+                <a:effectLst/>
+                <a:latin typeface="+mn-lt"/>
+                <a:ea typeface="+mn-ea"/>
+                <a:cs typeface="+mn-cs"/>
+              </a:rPr>
+              <a:t>"O próprio recorte aponta a continuação. Primeiro, mais dados: com histórico maior, as métricas ficam mais estáveis. Segundo, implementar o Apriori ou o FP-</a:t>
+            </a:r>
+            <a:r>
+              <a:rPr lang="pt-BR" sz="1200" b="0" kern="1200" dirty="0" err="1">
+                <a:solidFill>
+                  <a:schemeClr val="tx1"/>
+                </a:solidFill>
+                <a:effectLst/>
+                <a:latin typeface="+mn-lt"/>
+                <a:ea typeface="+mn-ea"/>
+                <a:cs typeface="+mn-cs"/>
+              </a:rPr>
+              <a:t>Growth</a:t>
+            </a:r>
+            <a:r>
+              <a:rPr lang="pt-BR" sz="1200" b="0" kern="1200" dirty="0">
+                <a:solidFill>
+                  <a:schemeClr val="tx1"/>
+                </a:solidFill>
+                <a:effectLst/>
+                <a:latin typeface="+mn-lt"/>
+                <a:ea typeface="+mn-ea"/>
+                <a:cs typeface="+mn-cs"/>
+              </a:rPr>
+              <a:t> completos, para capturar regras com três ou mais produtos juntos. Terceiro, colocar em produção, com a recomendação chegando na hora do pedido. E quarto, fechar o ciclo com um teste A/B, medindo o efeito real no ticket médio."</a:t>
+            </a:r>
+          </a:p>
+          <a:p>
+            <a:br>
+              <a:rPr lang="pt-BR" sz="1200" b="0" kern="1200" dirty="0">
+                <a:solidFill>
+                  <a:schemeClr val="tx1"/>
+                </a:solidFill>
+                <a:effectLst/>
+                <a:latin typeface="+mn-lt"/>
+                <a:ea typeface="+mn-ea"/>
+                <a:cs typeface="+mn-cs"/>
+              </a:rPr>
+            </a:br>
+            <a:r>
+              <a:rPr lang="pt-BR" sz="1200" b="0" kern="1200" dirty="0">
+                <a:solidFill>
+                  <a:schemeClr val="tx1"/>
+                </a:solidFill>
+                <a:effectLst/>
+                <a:latin typeface="+mn-lt"/>
+                <a:ea typeface="+mn-ea"/>
+                <a:cs typeface="+mn-cs"/>
+              </a:rPr>
+              <a:t>Deixa: rápido e otimista, mas sem floreio. Mostra que você sabe o tamanho real do que fez e o que vem depois.</a:t>
+            </a:r>
+          </a:p>
+          <a:p>
+            <a:br>
+              <a:rPr lang="pt-BR" sz="1200" b="0" kern="1200" dirty="0">
+                <a:solidFill>
+                  <a:schemeClr val="tx1"/>
+                </a:solidFill>
+                <a:effectLst/>
+                <a:latin typeface="+mn-lt"/>
+                <a:ea typeface="+mn-ea"/>
+                <a:cs typeface="+mn-cs"/>
+              </a:rPr>
+            </a:br>
+            <a:endParaRPr lang="pt-BR" sz="1200" b="0" kern="1200" dirty="0">
+              <a:solidFill>
+                <a:schemeClr val="tx1"/>
+              </a:solidFill>
+              <a:effectLst/>
+              <a:latin typeface="+mn-lt"/>
+              <a:ea typeface="+mn-ea"/>
+              <a:cs typeface="+mn-cs"/>
+            </a:endParaRPr>
+          </a:p>
+          <a:p>
+            <a:endParaRPr lang="pt-BR" dirty="0"/>
+          </a:p>
+        </p:txBody>
+      </p:sp>
+      <p:sp>
+        <p:nvSpPr>
+          <p:cNvPr id="4" name="Espaço Reservado para Número de Slide 3"/>
+          <p:cNvSpPr>
+            <a:spLocks noGrp="1"/>
+          </p:cNvSpPr>
+          <p:nvPr>
+            <p:ph type="sldNum" sz="quarter" idx="5"/>
+          </p:nvPr>
+        </p:nvSpPr>
+        <p:spPr/>
+        <p:txBody>
+          <a:bodyPr/>
+          <a:lstStyle/>
+          <a:p>
+            <a:fld id="{ECAD9E62-5FC1-47F7-98F4-A2E33E4F32FD}" type="slidenum">
+              <a:rPr lang="pt-BR" smtClean="0"/>
+              <a:t>16</a:t>
+            </a:fld>
+            <a:endParaRPr lang="pt-BR"/>
+          </a:p>
+        </p:txBody>
+      </p:sp>
+    </p:spTree>
+    <p:extLst>
+      <p:ext uri="{BB962C8B-B14F-4D97-AF65-F5344CB8AC3E}">
+        <p14:creationId xmlns:p14="http://schemas.microsoft.com/office/powerpoint/2010/main" val="1222931422"/>
+      </p:ext>
+    </p:extLst>
+  </p:cSld>
+  <p:clrMapOvr>
+    <a:masterClrMapping/>
+  </p:clrMapOvr>
+</p:notes>
+</file>
+
+<file path=ppt/notesSlides/notesSlide17.xml><?xml version="1.0" encoding="utf-8"?>
+<p:notes xmlns:a="http://schemas.openxmlformats.org/drawingml/2006/main" xmlns:r="http://schemas.openxmlformats.org/officeDocument/2006/relationships" xmlns:p="http://schemas.openxmlformats.org/presentationml/2006/main">
+  <p:cSld>
+    <p:spTree>
+      <p:nvGrpSpPr>
+        <p:cNvPr id="1" name=""/>
+        <p:cNvGrpSpPr/>
+        <p:nvPr/>
+      </p:nvGrpSpPr>
+      <p:grpSpPr>
+        <a:xfrm>
+          <a:off x="0" y="0"/>
+          <a:ext cx="0" cy="0"/>
+          <a:chOff x="0" y="0"/>
+          <a:chExt cx="0" cy="0"/>
+        </a:xfrm>
+      </p:grpSpPr>
+      <p:sp>
+        <p:nvSpPr>
+          <p:cNvPr id="2" name="Espaço Reservado para Imagem de Slide 1"/>
+          <p:cNvSpPr>
+            <a:spLocks noGrp="1" noRot="1" noChangeAspect="1"/>
+          </p:cNvSpPr>
+          <p:nvPr>
+            <p:ph type="sldImg"/>
+          </p:nvPr>
+        </p:nvSpPr>
+        <p:spPr/>
+      </p:sp>
+      <p:sp>
+        <p:nvSpPr>
+          <p:cNvPr id="3" name="Espaço Reservado para Anotações 2"/>
+          <p:cNvSpPr>
+            <a:spLocks noGrp="1"/>
+          </p:cNvSpPr>
+          <p:nvPr>
+            <p:ph type="body" idx="1"/>
+          </p:nvPr>
+        </p:nvSpPr>
+        <p:spPr/>
+        <p:txBody>
+          <a:bodyPr/>
+          <a:lstStyle/>
+          <a:p>
+            <a:r>
+              <a:rPr lang="pt-BR" sz="1200" b="0" kern="1200" dirty="0">
+                <a:solidFill>
+                  <a:schemeClr val="tx1"/>
+                </a:solidFill>
+                <a:effectLst/>
+                <a:latin typeface="+mn-lt"/>
+                <a:ea typeface="+mn-ea"/>
+                <a:cs typeface="+mn-cs"/>
+              </a:rPr>
+              <a:t>"Essas são as referências centrais do trabalho. Os artigos do </a:t>
+            </a:r>
+            <a:r>
+              <a:rPr lang="pt-BR" sz="1200" b="0" kern="1200" dirty="0" err="1">
+                <a:solidFill>
+                  <a:schemeClr val="tx1"/>
+                </a:solidFill>
+                <a:effectLst/>
+                <a:latin typeface="+mn-lt"/>
+                <a:ea typeface="+mn-ea"/>
+                <a:cs typeface="+mn-cs"/>
+              </a:rPr>
+              <a:t>Agrawal</a:t>
+            </a:r>
+            <a:r>
+              <a:rPr lang="pt-BR" sz="1200" b="0" kern="1200" dirty="0">
+                <a:solidFill>
+                  <a:schemeClr val="tx1"/>
+                </a:solidFill>
+                <a:effectLst/>
+                <a:latin typeface="+mn-lt"/>
+                <a:ea typeface="+mn-ea"/>
+                <a:cs typeface="+mn-cs"/>
+              </a:rPr>
+              <a:t>, que fundam as regras de associação e o Apriori, o Han com o FP-</a:t>
+            </a:r>
+            <a:r>
+              <a:rPr lang="pt-BR" sz="1200" b="0" kern="1200" dirty="0" err="1">
+                <a:solidFill>
+                  <a:schemeClr val="tx1"/>
+                </a:solidFill>
+                <a:effectLst/>
+                <a:latin typeface="+mn-lt"/>
+                <a:ea typeface="+mn-ea"/>
+                <a:cs typeface="+mn-cs"/>
+              </a:rPr>
+              <a:t>Growth</a:t>
+            </a:r>
+            <a:r>
+              <a:rPr lang="pt-BR" sz="1200" b="0" kern="1200" dirty="0">
+                <a:solidFill>
+                  <a:schemeClr val="tx1"/>
+                </a:solidFill>
+                <a:effectLst/>
+                <a:latin typeface="+mn-lt"/>
+                <a:ea typeface="+mn-ea"/>
+                <a:cs typeface="+mn-cs"/>
+              </a:rPr>
+              <a:t>, o </a:t>
+            </a:r>
+            <a:r>
+              <a:rPr lang="pt-BR" sz="1200" b="0" kern="1200" dirty="0" err="1">
+                <a:solidFill>
+                  <a:schemeClr val="tx1"/>
+                </a:solidFill>
+                <a:effectLst/>
+                <a:latin typeface="+mn-lt"/>
+                <a:ea typeface="+mn-ea"/>
+                <a:cs typeface="+mn-cs"/>
+              </a:rPr>
+              <a:t>Adomavicius</a:t>
+            </a:r>
+            <a:r>
+              <a:rPr lang="pt-BR" sz="1200" b="0" kern="1200" dirty="0">
+                <a:solidFill>
+                  <a:schemeClr val="tx1"/>
+                </a:solidFill>
+                <a:effectLst/>
+                <a:latin typeface="+mn-lt"/>
+                <a:ea typeface="+mn-ea"/>
+                <a:cs typeface="+mn-cs"/>
+              </a:rPr>
+              <a:t> na taxonomia de recomendação, e o </a:t>
+            </a:r>
+            <a:r>
+              <a:rPr lang="pt-BR" sz="1200" b="0" kern="1200" dirty="0" err="1">
+                <a:solidFill>
+                  <a:schemeClr val="tx1"/>
+                </a:solidFill>
+                <a:effectLst/>
+                <a:latin typeface="+mn-lt"/>
+                <a:ea typeface="+mn-ea"/>
+                <a:cs typeface="+mn-cs"/>
+              </a:rPr>
+              <a:t>Powers</a:t>
+            </a:r>
+            <a:r>
+              <a:rPr lang="pt-BR" sz="1200" b="0" kern="1200" dirty="0">
+                <a:solidFill>
+                  <a:schemeClr val="tx1"/>
+                </a:solidFill>
+                <a:effectLst/>
+                <a:latin typeface="+mn-lt"/>
+                <a:ea typeface="+mn-ea"/>
+                <a:cs typeface="+mn-cs"/>
+              </a:rPr>
+              <a:t> na parte de métricas. A lista completa, com as 23 referências, está no capítulo de Referências da monografia."</a:t>
+            </a:r>
+          </a:p>
+          <a:p>
+            <a:br>
+              <a:rPr lang="pt-BR" sz="1200" b="0" kern="1200" dirty="0">
+                <a:solidFill>
+                  <a:schemeClr val="tx1"/>
+                </a:solidFill>
+                <a:effectLst/>
+                <a:latin typeface="+mn-lt"/>
+                <a:ea typeface="+mn-ea"/>
+                <a:cs typeface="+mn-cs"/>
+              </a:rPr>
+            </a:br>
+            <a:r>
+              <a:rPr lang="pt-BR" sz="1200" b="0" kern="1200" dirty="0">
+                <a:solidFill>
+                  <a:schemeClr val="tx1"/>
+                </a:solidFill>
+                <a:effectLst/>
+                <a:latin typeface="+mn-lt"/>
+                <a:ea typeface="+mn-ea"/>
+                <a:cs typeface="+mn-cs"/>
+              </a:rPr>
+              <a:t>Deixa: não leia referência por referência. Cite duas ou três e siga. Slide de apoio.</a:t>
+            </a:r>
+          </a:p>
+          <a:p>
+            <a:endParaRPr lang="pt-BR" dirty="0"/>
+          </a:p>
+        </p:txBody>
+      </p:sp>
+      <p:sp>
+        <p:nvSpPr>
+          <p:cNvPr id="4" name="Espaço Reservado para Número de Slide 3"/>
+          <p:cNvSpPr>
+            <a:spLocks noGrp="1"/>
+          </p:cNvSpPr>
+          <p:nvPr>
+            <p:ph type="sldNum" sz="quarter" idx="5"/>
+          </p:nvPr>
+        </p:nvSpPr>
+        <p:spPr/>
+        <p:txBody>
+          <a:bodyPr/>
+          <a:lstStyle/>
+          <a:p>
+            <a:fld id="{ECAD9E62-5FC1-47F7-98F4-A2E33E4F32FD}" type="slidenum">
+              <a:rPr lang="pt-BR" smtClean="0"/>
+              <a:t>17</a:t>
+            </a:fld>
+            <a:endParaRPr lang="pt-BR"/>
+          </a:p>
+        </p:txBody>
+      </p:sp>
+    </p:spTree>
+    <p:extLst>
+      <p:ext uri="{BB962C8B-B14F-4D97-AF65-F5344CB8AC3E}">
+        <p14:creationId xmlns:p14="http://schemas.microsoft.com/office/powerpoint/2010/main" val="1461502184"/>
+      </p:ext>
+    </p:extLst>
+  </p:cSld>
+  <p:clrMapOvr>
+    <a:masterClrMapping/>
+  </p:clrMapOvr>
+</p:notes>
+</file>
+
+<file path=ppt/notesSlides/notesSlide18.xml><?xml version="1.0" encoding="utf-8"?>
+<p:notes xmlns:a="http://schemas.openxmlformats.org/drawingml/2006/main" xmlns:r="http://schemas.openxmlformats.org/officeDocument/2006/relationships" xmlns:p="http://schemas.openxmlformats.org/presentationml/2006/main">
+  <p:cSld>
+    <p:spTree>
+      <p:nvGrpSpPr>
+        <p:cNvPr id="1" name=""/>
+        <p:cNvGrpSpPr/>
+        <p:nvPr/>
+      </p:nvGrpSpPr>
+      <p:grpSpPr>
+        <a:xfrm>
+          <a:off x="0" y="0"/>
+          <a:ext cx="0" cy="0"/>
+          <a:chOff x="0" y="0"/>
+          <a:chExt cx="0" cy="0"/>
+        </a:xfrm>
+      </p:grpSpPr>
+      <p:sp>
+        <p:nvSpPr>
+          <p:cNvPr id="2" name="Espaço Reservado para Imagem de Slide 1"/>
+          <p:cNvSpPr>
+            <a:spLocks noGrp="1" noRot="1" noChangeAspect="1"/>
+          </p:cNvSpPr>
+          <p:nvPr>
+            <p:ph type="sldImg"/>
+          </p:nvPr>
+        </p:nvSpPr>
+        <p:spPr/>
+      </p:sp>
+      <p:sp>
+        <p:nvSpPr>
+          <p:cNvPr id="3" name="Espaço Reservado para Anotações 2"/>
+          <p:cNvSpPr>
+            <a:spLocks noGrp="1"/>
+          </p:cNvSpPr>
+          <p:nvPr>
+            <p:ph type="body" idx="1"/>
+          </p:nvPr>
+        </p:nvSpPr>
+        <p:spPr/>
+        <p:txBody>
+          <a:bodyPr/>
+          <a:lstStyle/>
+          <a:p>
+            <a:r>
+              <a:rPr lang="pt-BR" sz="1200" b="0" kern="1200" dirty="0">
+                <a:solidFill>
+                  <a:schemeClr val="tx1"/>
+                </a:solidFill>
+                <a:effectLst/>
+                <a:latin typeface="+mn-lt"/>
+                <a:ea typeface="+mn-ea"/>
+                <a:cs typeface="+mn-cs"/>
+              </a:rPr>
+              <a:t>Era isso. Obrigado pela atenção. Fico à disposição da banca para as perguntas."</a:t>
+            </a:r>
+          </a:p>
+          <a:p>
+            <a:br>
+              <a:rPr lang="pt-BR" sz="1200" b="0" kern="1200" dirty="0">
+                <a:solidFill>
+                  <a:schemeClr val="tx1"/>
+                </a:solidFill>
+                <a:effectLst/>
+                <a:latin typeface="+mn-lt"/>
+                <a:ea typeface="+mn-ea"/>
+                <a:cs typeface="+mn-cs"/>
+              </a:rPr>
+            </a:br>
+            <a:r>
+              <a:rPr lang="pt-BR" sz="1200" b="0" kern="1200" dirty="0">
+                <a:solidFill>
+                  <a:schemeClr val="tx1"/>
+                </a:solidFill>
+                <a:effectLst/>
+                <a:latin typeface="+mn-lt"/>
+                <a:ea typeface="+mn-ea"/>
+                <a:cs typeface="+mn-cs"/>
+              </a:rPr>
+              <a:t>Deixa: pare, respire, sorria. Não saia correndo do slide. Espere a banca.</a:t>
+            </a:r>
+          </a:p>
+          <a:p>
+            <a:br>
+              <a:rPr lang="pt-BR" sz="1200" b="0" kern="1200" dirty="0">
+                <a:solidFill>
+                  <a:schemeClr val="tx1"/>
+                </a:solidFill>
+                <a:effectLst/>
+                <a:latin typeface="+mn-lt"/>
+                <a:ea typeface="+mn-ea"/>
+                <a:cs typeface="+mn-cs"/>
+              </a:rPr>
+            </a:br>
+            <a:endParaRPr lang="pt-BR" sz="1200" b="0" kern="1200" dirty="0">
+              <a:solidFill>
+                <a:schemeClr val="tx1"/>
+              </a:solidFill>
+              <a:effectLst/>
+              <a:latin typeface="+mn-lt"/>
+              <a:ea typeface="+mn-ea"/>
+              <a:cs typeface="+mn-cs"/>
+            </a:endParaRPr>
+          </a:p>
+          <a:p>
+            <a:endParaRPr lang="pt-BR" dirty="0"/>
+          </a:p>
+        </p:txBody>
+      </p:sp>
+      <p:sp>
+        <p:nvSpPr>
+          <p:cNvPr id="4" name="Espaço Reservado para Número de Slide 3"/>
+          <p:cNvSpPr>
+            <a:spLocks noGrp="1"/>
+          </p:cNvSpPr>
+          <p:nvPr>
+            <p:ph type="sldNum" sz="quarter" idx="5"/>
+          </p:nvPr>
+        </p:nvSpPr>
+        <p:spPr/>
+        <p:txBody>
+          <a:bodyPr/>
+          <a:lstStyle/>
+          <a:p>
+            <a:fld id="{ECAD9E62-5FC1-47F7-98F4-A2E33E4F32FD}" type="slidenum">
+              <a:rPr lang="pt-BR" smtClean="0"/>
+              <a:t>18</a:t>
+            </a:fld>
+            <a:endParaRPr lang="pt-BR"/>
+          </a:p>
+        </p:txBody>
+      </p:sp>
+    </p:spTree>
+    <p:extLst>
+      <p:ext uri="{BB962C8B-B14F-4D97-AF65-F5344CB8AC3E}">
+        <p14:creationId xmlns:p14="http://schemas.microsoft.com/office/powerpoint/2010/main" val="429623991"/>
+      </p:ext>
+    </p:extLst>
+  </p:cSld>
+  <p:clrMapOvr>
+    <a:masterClrMapping/>
+  </p:clrMapOvr>
+</p:notes>
+</file>
+
+<file path=ppt/notesSlides/notesSlide2.xml><?xml version="1.0" encoding="utf-8"?>
+<p:notes xmlns:a="http://schemas.openxmlformats.org/drawingml/2006/main" xmlns:r="http://schemas.openxmlformats.org/officeDocument/2006/relationships" xmlns:p="http://schemas.openxmlformats.org/presentationml/2006/main">
+  <p:cSld>
+    <p:spTree>
+      <p:nvGrpSpPr>
+        <p:cNvPr id="1" name=""/>
+        <p:cNvGrpSpPr/>
+        <p:nvPr/>
+      </p:nvGrpSpPr>
+      <p:grpSpPr>
+        <a:xfrm>
+          <a:off x="0" y="0"/>
+          <a:ext cx="0" cy="0"/>
+          <a:chOff x="0" y="0"/>
+          <a:chExt cx="0" cy="0"/>
+        </a:xfrm>
+      </p:grpSpPr>
+      <p:sp>
+        <p:nvSpPr>
+          <p:cNvPr id="2" name="Espaço Reservado para Imagem de Slide 1"/>
+          <p:cNvSpPr>
+            <a:spLocks noGrp="1" noRot="1" noChangeAspect="1"/>
+          </p:cNvSpPr>
+          <p:nvPr>
+            <p:ph type="sldImg"/>
+          </p:nvPr>
+        </p:nvSpPr>
+        <p:spPr/>
+      </p:sp>
+      <p:sp>
+        <p:nvSpPr>
+          <p:cNvPr id="3" name="Espaço Reservado para Anotações 2"/>
+          <p:cNvSpPr>
+            <a:spLocks noGrp="1"/>
+          </p:cNvSpPr>
+          <p:nvPr>
+            <p:ph type="body" idx="1"/>
+          </p:nvPr>
+        </p:nvSpPr>
+        <p:spPr/>
+        <p:txBody>
+          <a:bodyPr/>
+          <a:lstStyle/>
+          <a:p>
+            <a:r>
+              <a:rPr lang="pt-BR" sz="1200" b="0" kern="1200" dirty="0">
+                <a:solidFill>
+                  <a:schemeClr val="tx1"/>
+                </a:solidFill>
+                <a:effectLst/>
+                <a:latin typeface="+mn-lt"/>
+                <a:ea typeface="+mn-ea"/>
+                <a:cs typeface="+mn-cs"/>
+              </a:rPr>
+              <a:t>"Para começar, este é o caminho que vou seguir. Primeiro o contexto e o problema. Depois a pergunta de pesquisa, a hipótese e os objetivos. Passo rápido pela fundamentação, falo da metodologia e dos dados reais, mostro a arquitetura do sistema, explico como validei, apresento os resultados e fecho com a conclusão e o que dá para fazer adiante."</a:t>
+            </a:r>
+          </a:p>
+          <a:p>
+            <a:br>
+              <a:rPr lang="pt-BR" sz="1200" b="0" kern="1200" dirty="0">
+                <a:solidFill>
+                  <a:schemeClr val="tx1"/>
+                </a:solidFill>
+                <a:effectLst/>
+                <a:latin typeface="+mn-lt"/>
+                <a:ea typeface="+mn-ea"/>
+                <a:cs typeface="+mn-cs"/>
+              </a:rPr>
+            </a:br>
+            <a:r>
+              <a:rPr lang="pt-BR" sz="1200" b="0" kern="1200" dirty="0">
+                <a:solidFill>
+                  <a:schemeClr val="tx1"/>
+                </a:solidFill>
+                <a:effectLst/>
+                <a:latin typeface="+mn-lt"/>
+                <a:ea typeface="+mn-ea"/>
+                <a:cs typeface="+mn-cs"/>
+              </a:rPr>
+              <a:t>Deixa: não detalhe cada item, é só o mapa. Avance.</a:t>
+            </a:r>
+          </a:p>
+          <a:p>
+            <a:endParaRPr lang="pt-BR" dirty="0"/>
+          </a:p>
+        </p:txBody>
+      </p:sp>
+      <p:sp>
+        <p:nvSpPr>
+          <p:cNvPr id="4" name="Espaço Reservado para Número de Slide 3"/>
+          <p:cNvSpPr>
+            <a:spLocks noGrp="1"/>
+          </p:cNvSpPr>
+          <p:nvPr>
+            <p:ph type="sldNum" sz="quarter" idx="5"/>
+          </p:nvPr>
+        </p:nvSpPr>
+        <p:spPr/>
+        <p:txBody>
+          <a:bodyPr/>
+          <a:lstStyle/>
+          <a:p>
+            <a:fld id="{ECAD9E62-5FC1-47F7-98F4-A2E33E4F32FD}" type="slidenum">
+              <a:rPr lang="pt-BR" smtClean="0"/>
+              <a:t>2</a:t>
+            </a:fld>
+            <a:endParaRPr lang="pt-BR"/>
+          </a:p>
+        </p:txBody>
+      </p:sp>
+    </p:spTree>
+    <p:extLst>
+      <p:ext uri="{BB962C8B-B14F-4D97-AF65-F5344CB8AC3E}">
+        <p14:creationId xmlns:p14="http://schemas.microsoft.com/office/powerpoint/2010/main" val="4263546800"/>
+      </p:ext>
+    </p:extLst>
+  </p:cSld>
+  <p:clrMapOvr>
+    <a:masterClrMapping/>
+  </p:clrMapOvr>
+</p:notes>
+</file>
+
+<file path=ppt/notesSlides/notesSlide3.xml><?xml version="1.0" encoding="utf-8"?>
+<p:notes xmlns:a="http://schemas.openxmlformats.org/drawingml/2006/main" xmlns:r="http://schemas.openxmlformats.org/officeDocument/2006/relationships" xmlns:p="http://schemas.openxmlformats.org/presentationml/2006/main">
+  <p:cSld>
+    <p:spTree>
+      <p:nvGrpSpPr>
+        <p:cNvPr id="1" name=""/>
+        <p:cNvGrpSpPr/>
+        <p:nvPr/>
+      </p:nvGrpSpPr>
+      <p:grpSpPr>
+        <a:xfrm>
+          <a:off x="0" y="0"/>
+          <a:ext cx="0" cy="0"/>
+          <a:chOff x="0" y="0"/>
+          <a:chExt cx="0" cy="0"/>
+        </a:xfrm>
+      </p:grpSpPr>
+      <p:sp>
+        <p:nvSpPr>
+          <p:cNvPr id="2" name="Espaço Reservado para Imagem de Slide 1"/>
+          <p:cNvSpPr>
+            <a:spLocks noGrp="1" noRot="1" noChangeAspect="1"/>
+          </p:cNvSpPr>
+          <p:nvPr>
+            <p:ph type="sldImg"/>
+          </p:nvPr>
+        </p:nvSpPr>
+        <p:spPr/>
+      </p:sp>
+      <p:sp>
+        <p:nvSpPr>
+          <p:cNvPr id="3" name="Espaço Reservado para Anotações 2"/>
+          <p:cNvSpPr>
+            <a:spLocks noGrp="1"/>
+          </p:cNvSpPr>
+          <p:nvPr>
+            <p:ph type="body" idx="1"/>
+          </p:nvPr>
+        </p:nvSpPr>
+        <p:spPr/>
+        <p:txBody>
+          <a:bodyPr/>
+          <a:lstStyle/>
+          <a:p>
+            <a:r>
+              <a:rPr lang="pt-BR" sz="1200" b="0" kern="1200" dirty="0">
+                <a:solidFill>
+                  <a:schemeClr val="tx1"/>
+                </a:solidFill>
+                <a:effectLst/>
+                <a:latin typeface="+mn-lt"/>
+                <a:ea typeface="+mn-ea"/>
+                <a:cs typeface="+mn-cs"/>
+              </a:rPr>
+              <a:t>A Quasar Barber é uma distribuidora pequena. Catálogo grande, mas poucos clientes. E aí mora o problema: a decisão de oferecer um produto junto com outro, a venda casada, é tomada no feeling do vendedor. Quem lembra, sugere. Quem não lembra, deixa de vender."</a:t>
+            </a:r>
+          </a:p>
+          <a:p>
+            <a:br>
+              <a:rPr lang="pt-BR" sz="1200" b="0" kern="1200" dirty="0">
+                <a:solidFill>
+                  <a:schemeClr val="tx1"/>
+                </a:solidFill>
+                <a:effectLst/>
+                <a:latin typeface="+mn-lt"/>
+                <a:ea typeface="+mn-ea"/>
+                <a:cs typeface="+mn-cs"/>
+              </a:rPr>
+            </a:br>
+            <a:r>
+              <a:rPr lang="pt-BR" sz="1200" b="0" kern="1200" dirty="0">
+                <a:solidFill>
+                  <a:schemeClr val="tx1"/>
+                </a:solidFill>
+                <a:effectLst/>
+                <a:latin typeface="+mn-lt"/>
+                <a:ea typeface="+mn-ea"/>
+                <a:cs typeface="+mn-cs"/>
+              </a:rPr>
+              <a:t>"Esse cenário B2B é bem diferente do varejo que a gente conhece, tipo Amazon ou Netflix. Lá tem milhões de clientes e nota de produto. Aqui não. São poucos clientes, volume baixo e nenhuma avaliação. A matriz de cliente por produto fica vazia na maior parte. Isso derruba a filtragem colaborativa, que é a técnica mais comum de recomendação, porque ela precisa de muita gente avaliando muito item."</a:t>
+            </a:r>
+          </a:p>
+          <a:p>
+            <a:br>
+              <a:rPr lang="pt-BR" sz="1200" b="0" kern="1200" dirty="0">
+                <a:solidFill>
+                  <a:schemeClr val="tx1"/>
+                </a:solidFill>
+                <a:effectLst/>
+                <a:latin typeface="+mn-lt"/>
+                <a:ea typeface="+mn-ea"/>
+                <a:cs typeface="+mn-cs"/>
+              </a:rPr>
+            </a:br>
+            <a:r>
+              <a:rPr lang="pt-BR" sz="1200" b="0" kern="1200" dirty="0">
+                <a:solidFill>
+                  <a:schemeClr val="tx1"/>
+                </a:solidFill>
+                <a:effectLst/>
+                <a:latin typeface="+mn-lt"/>
+                <a:ea typeface="+mn-ea"/>
+                <a:cs typeface="+mn-cs"/>
+              </a:rPr>
+              <a:t>"A oportunidade é olhar para o que eu já tenho: o histórico de vendas. Dá para minerar esse histórico e descobrir quais produtos costumam sair juntos."</a:t>
+            </a:r>
+          </a:p>
+          <a:p>
+            <a:br>
+              <a:rPr lang="pt-BR" sz="1200" b="0" kern="1200" dirty="0">
+                <a:solidFill>
+                  <a:schemeClr val="tx1"/>
+                </a:solidFill>
+                <a:effectLst/>
+                <a:latin typeface="+mn-lt"/>
+                <a:ea typeface="+mn-ea"/>
+                <a:cs typeface="+mn-cs"/>
+              </a:rPr>
+            </a:br>
+            <a:r>
+              <a:rPr lang="pt-BR" sz="1200" b="0" kern="1200" dirty="0">
+                <a:solidFill>
+                  <a:schemeClr val="tx1"/>
+                </a:solidFill>
+                <a:effectLst/>
+                <a:latin typeface="+mn-lt"/>
+                <a:ea typeface="+mn-ea"/>
+                <a:cs typeface="+mn-cs"/>
+              </a:rPr>
+              <a:t>Deixa: este slide vende o problema. Fale com convicção, é a sua empresa.</a:t>
+            </a:r>
+          </a:p>
+          <a:p>
+            <a:endParaRPr lang="pt-BR" dirty="0"/>
+          </a:p>
+        </p:txBody>
+      </p:sp>
+      <p:sp>
+        <p:nvSpPr>
+          <p:cNvPr id="4" name="Espaço Reservado para Número de Slide 3"/>
+          <p:cNvSpPr>
+            <a:spLocks noGrp="1"/>
+          </p:cNvSpPr>
+          <p:nvPr>
+            <p:ph type="sldNum" sz="quarter" idx="5"/>
+          </p:nvPr>
+        </p:nvSpPr>
+        <p:spPr/>
+        <p:txBody>
+          <a:bodyPr/>
+          <a:lstStyle/>
+          <a:p>
+            <a:fld id="{ECAD9E62-5FC1-47F7-98F4-A2E33E4F32FD}" type="slidenum">
+              <a:rPr lang="pt-BR" smtClean="0"/>
+              <a:t>3</a:t>
+            </a:fld>
+            <a:endParaRPr lang="pt-BR"/>
+          </a:p>
+        </p:txBody>
+      </p:sp>
+    </p:spTree>
+    <p:extLst>
+      <p:ext uri="{BB962C8B-B14F-4D97-AF65-F5344CB8AC3E}">
+        <p14:creationId xmlns:p14="http://schemas.microsoft.com/office/powerpoint/2010/main" val="2375109623"/>
+      </p:ext>
+    </p:extLst>
+  </p:cSld>
+  <p:clrMapOvr>
+    <a:masterClrMapping/>
+  </p:clrMapOvr>
+</p:notes>
+</file>
+
+<file path=ppt/notesSlides/notesSlide4.xml><?xml version="1.0" encoding="utf-8"?>
+<p:notes xmlns:a="http://schemas.openxmlformats.org/drawingml/2006/main" xmlns:r="http://schemas.openxmlformats.org/officeDocument/2006/relationships" xmlns:p="http://schemas.openxmlformats.org/presentationml/2006/main">
+  <p:cSld>
+    <p:spTree>
+      <p:nvGrpSpPr>
+        <p:cNvPr id="1" name=""/>
+        <p:cNvGrpSpPr/>
+        <p:nvPr/>
+      </p:nvGrpSpPr>
+      <p:grpSpPr>
+        <a:xfrm>
+          <a:off x="0" y="0"/>
+          <a:ext cx="0" cy="0"/>
+          <a:chOff x="0" y="0"/>
+          <a:chExt cx="0" cy="0"/>
+        </a:xfrm>
+      </p:grpSpPr>
+      <p:sp>
+        <p:nvSpPr>
+          <p:cNvPr id="2" name="Espaço Reservado para Imagem de Slide 1"/>
+          <p:cNvSpPr>
+            <a:spLocks noGrp="1" noRot="1" noChangeAspect="1"/>
+          </p:cNvSpPr>
+          <p:nvPr>
+            <p:ph type="sldImg"/>
+          </p:nvPr>
+        </p:nvSpPr>
+        <p:spPr/>
+      </p:sp>
+      <p:sp>
+        <p:nvSpPr>
+          <p:cNvPr id="3" name="Espaço Reservado para Anotações 2"/>
+          <p:cNvSpPr>
+            <a:spLocks noGrp="1"/>
+          </p:cNvSpPr>
+          <p:nvPr>
+            <p:ph type="body" idx="1"/>
+          </p:nvPr>
+        </p:nvSpPr>
+        <p:spPr/>
+        <p:txBody>
+          <a:bodyPr/>
+          <a:lstStyle/>
+          <a:p>
+            <a:r>
+              <a:rPr lang="pt-BR" sz="1200" b="0" kern="1200" dirty="0">
+                <a:solidFill>
+                  <a:schemeClr val="tx1"/>
+                </a:solidFill>
+                <a:effectLst/>
+                <a:latin typeface="+mn-lt"/>
+                <a:ea typeface="+mn-ea"/>
+                <a:cs typeface="+mn-cs"/>
+              </a:rPr>
+              <a:t>A pergunta que guia tudo está nessa caixa: é possível gerar recomendações úteis e estatisticamente relevantes para uma distribuidora pequena usando só regras de associação, mesmo com poucas transações?"</a:t>
+            </a:r>
+          </a:p>
+          <a:p>
+            <a:br>
+              <a:rPr lang="pt-BR" sz="1200" b="0" kern="1200" dirty="0">
+                <a:solidFill>
+                  <a:schemeClr val="tx1"/>
+                </a:solidFill>
+                <a:effectLst/>
+                <a:latin typeface="+mn-lt"/>
+                <a:ea typeface="+mn-ea"/>
+                <a:cs typeface="+mn-cs"/>
+              </a:rPr>
+            </a:br>
+            <a:r>
+              <a:rPr lang="pt-BR" sz="1200" b="0" kern="1200" dirty="0">
+                <a:solidFill>
+                  <a:schemeClr val="tx1"/>
+                </a:solidFill>
+                <a:effectLst/>
+                <a:latin typeface="+mn-lt"/>
+                <a:ea typeface="+mn-ea"/>
+                <a:cs typeface="+mn-cs"/>
+              </a:rPr>
+              <a:t>"A minha hipótese, a H1, é que sim. Regras com confiança a partir de 0,30 e suporte a partir de 0,02, ordenadas por lift, produzem sugestões de venda casada que fazem sentido para o negócio. A hipótese nula, a H0, é o contrário: que as regras seriam indistinguíveis do acaso e não passariam de um simples ranking dos produtos mais vendidos."</a:t>
+            </a:r>
+          </a:p>
+          <a:p>
+            <a:br>
+              <a:rPr lang="pt-BR" sz="1200" b="0" kern="1200" dirty="0">
+                <a:solidFill>
+                  <a:schemeClr val="tx1"/>
+                </a:solidFill>
+                <a:effectLst/>
+                <a:latin typeface="+mn-lt"/>
+                <a:ea typeface="+mn-ea"/>
+                <a:cs typeface="+mn-cs"/>
+              </a:rPr>
+            </a:br>
+            <a:r>
+              <a:rPr lang="pt-BR" sz="1200" b="0" kern="1200" dirty="0">
+                <a:solidFill>
+                  <a:schemeClr val="tx1"/>
+                </a:solidFill>
+                <a:effectLst/>
+                <a:latin typeface="+mn-lt"/>
+                <a:ea typeface="+mn-ea"/>
+                <a:cs typeface="+mn-cs"/>
+              </a:rPr>
+              <a:t>Deixa: leia a pergunta com calma, é o coração do trabalho. Guarde os termos confiança, suporte e lift, eles voltam no próximo bloco.</a:t>
+            </a:r>
+          </a:p>
+          <a:p>
+            <a:br>
+              <a:rPr lang="pt-BR" sz="1200" b="0" kern="1200" dirty="0">
+                <a:solidFill>
+                  <a:schemeClr val="tx1"/>
+                </a:solidFill>
+                <a:effectLst/>
+                <a:latin typeface="+mn-lt"/>
+                <a:ea typeface="+mn-ea"/>
+                <a:cs typeface="+mn-cs"/>
+              </a:rPr>
+            </a:br>
+            <a:endParaRPr lang="pt-BR" sz="1200" b="0" kern="1200" dirty="0">
+              <a:solidFill>
+                <a:schemeClr val="tx1"/>
+              </a:solidFill>
+              <a:effectLst/>
+              <a:latin typeface="+mn-lt"/>
+              <a:ea typeface="+mn-ea"/>
+              <a:cs typeface="+mn-cs"/>
+            </a:endParaRPr>
+          </a:p>
+          <a:p>
+            <a:endParaRPr lang="pt-BR" dirty="0"/>
+          </a:p>
+        </p:txBody>
+      </p:sp>
+      <p:sp>
+        <p:nvSpPr>
+          <p:cNvPr id="4" name="Espaço Reservado para Número de Slide 3"/>
+          <p:cNvSpPr>
+            <a:spLocks noGrp="1"/>
+          </p:cNvSpPr>
+          <p:nvPr>
+            <p:ph type="sldNum" sz="quarter" idx="5"/>
+          </p:nvPr>
+        </p:nvSpPr>
+        <p:spPr/>
+        <p:txBody>
+          <a:bodyPr/>
+          <a:lstStyle/>
+          <a:p>
+            <a:fld id="{ECAD9E62-5FC1-47F7-98F4-A2E33E4F32FD}" type="slidenum">
+              <a:rPr lang="pt-BR" smtClean="0"/>
+              <a:t>4</a:t>
+            </a:fld>
+            <a:endParaRPr lang="pt-BR"/>
+          </a:p>
+        </p:txBody>
+      </p:sp>
+    </p:spTree>
+    <p:extLst>
+      <p:ext uri="{BB962C8B-B14F-4D97-AF65-F5344CB8AC3E}">
+        <p14:creationId xmlns:p14="http://schemas.microsoft.com/office/powerpoint/2010/main" val="746530"/>
+      </p:ext>
+    </p:extLst>
+  </p:cSld>
+  <p:clrMapOvr>
+    <a:masterClrMapping/>
+  </p:clrMapOvr>
+</p:notes>
+</file>
+
+<file path=ppt/notesSlides/notesSlide5.xml><?xml version="1.0" encoding="utf-8"?>
+<p:notes xmlns:a="http://schemas.openxmlformats.org/drawingml/2006/main" xmlns:r="http://schemas.openxmlformats.org/officeDocument/2006/relationships" xmlns:p="http://schemas.openxmlformats.org/presentationml/2006/main">
+  <p:cSld>
+    <p:spTree>
+      <p:nvGrpSpPr>
+        <p:cNvPr id="1" name=""/>
+        <p:cNvGrpSpPr/>
+        <p:nvPr/>
+      </p:nvGrpSpPr>
+      <p:grpSpPr>
+        <a:xfrm>
+          <a:off x="0" y="0"/>
+          <a:ext cx="0" cy="0"/>
+          <a:chOff x="0" y="0"/>
+          <a:chExt cx="0" cy="0"/>
+        </a:xfrm>
+      </p:grpSpPr>
+      <p:sp>
+        <p:nvSpPr>
+          <p:cNvPr id="2" name="Espaço Reservado para Imagem de Slide 1"/>
+          <p:cNvSpPr>
+            <a:spLocks noGrp="1" noRot="1" noChangeAspect="1"/>
+          </p:cNvSpPr>
+          <p:nvPr>
+            <p:ph type="sldImg"/>
+          </p:nvPr>
+        </p:nvSpPr>
+        <p:spPr/>
+      </p:sp>
+      <p:sp>
+        <p:nvSpPr>
+          <p:cNvPr id="3" name="Espaço Reservado para Anotações 2"/>
+          <p:cNvSpPr>
+            <a:spLocks noGrp="1"/>
+          </p:cNvSpPr>
+          <p:nvPr>
+            <p:ph type="body" idx="1"/>
+          </p:nvPr>
+        </p:nvSpPr>
+        <p:spPr/>
+        <p:txBody>
+          <a:bodyPr/>
+          <a:lstStyle/>
+          <a:p>
+            <a:r>
+              <a:rPr lang="pt-BR" sz="1200" b="0" kern="1200" dirty="0">
+                <a:solidFill>
+                  <a:schemeClr val="tx1"/>
+                </a:solidFill>
+                <a:effectLst/>
+                <a:latin typeface="+mn-lt"/>
+                <a:ea typeface="+mn-ea"/>
+                <a:cs typeface="+mn-cs"/>
+              </a:rPr>
+              <a:t>O objetivo geral foi desenvolver e validar um sistema de recomendação baseado em Market Basket Analysis, com relevância estatística que dá para medir."</a:t>
+            </a:r>
+          </a:p>
+          <a:p>
+            <a:br>
+              <a:rPr lang="pt-BR" sz="1200" b="0" kern="1200" dirty="0">
+                <a:solidFill>
+                  <a:schemeClr val="tx1"/>
+                </a:solidFill>
+                <a:effectLst/>
+                <a:latin typeface="+mn-lt"/>
+                <a:ea typeface="+mn-ea"/>
+                <a:cs typeface="+mn-cs"/>
+              </a:rPr>
+            </a:br>
+            <a:r>
+              <a:rPr lang="pt-BR" sz="1200" b="0" kern="1200" dirty="0">
+                <a:solidFill>
+                  <a:schemeClr val="tx1"/>
+                </a:solidFill>
+                <a:effectLst/>
+                <a:latin typeface="+mn-lt"/>
+                <a:ea typeface="+mn-ea"/>
+                <a:cs typeface="+mn-cs"/>
+              </a:rPr>
+              <a:t>"Para chegar lá, foram seis objetivos específicos que ficaram divididos assim: temos a parte teórica: revisar a literatura e modelar a base de dados, parte prática: implementar  as regras e construir a interface web, até chegar na análise: validar e analisar as regras do ponto de vista comercial."</a:t>
+            </a:r>
+          </a:p>
+          <a:p>
+            <a:br>
+              <a:rPr lang="pt-BR" sz="1200" b="0" kern="1200" dirty="0">
+                <a:solidFill>
+                  <a:schemeClr val="tx1"/>
+                </a:solidFill>
+                <a:effectLst/>
+                <a:latin typeface="+mn-lt"/>
+                <a:ea typeface="+mn-ea"/>
+                <a:cs typeface="+mn-cs"/>
+              </a:rPr>
+            </a:br>
+            <a:r>
+              <a:rPr lang="pt-BR" sz="1200" b="0" kern="1200" dirty="0">
+                <a:solidFill>
+                  <a:schemeClr val="tx1"/>
+                </a:solidFill>
+                <a:effectLst/>
+                <a:latin typeface="+mn-lt"/>
+                <a:ea typeface="+mn-ea"/>
+                <a:cs typeface="+mn-cs"/>
+              </a:rPr>
+              <a:t>Deixa: não leia os seis um por um devagar. Agrupe: "da teoria até a análise de negócio". Avance.</a:t>
+            </a:r>
+          </a:p>
+          <a:p>
+            <a:endParaRPr lang="pt-BR" dirty="0"/>
+          </a:p>
+        </p:txBody>
+      </p:sp>
+      <p:sp>
+        <p:nvSpPr>
+          <p:cNvPr id="4" name="Espaço Reservado para Número de Slide 3"/>
+          <p:cNvSpPr>
+            <a:spLocks noGrp="1"/>
+          </p:cNvSpPr>
+          <p:nvPr>
+            <p:ph type="sldNum" sz="quarter" idx="5"/>
+          </p:nvPr>
+        </p:nvSpPr>
+        <p:spPr/>
+        <p:txBody>
+          <a:bodyPr/>
+          <a:lstStyle/>
+          <a:p>
+            <a:fld id="{ECAD9E62-5FC1-47F7-98F4-A2E33E4F32FD}" type="slidenum">
+              <a:rPr lang="pt-BR" smtClean="0"/>
+              <a:t>5</a:t>
+            </a:fld>
+            <a:endParaRPr lang="pt-BR"/>
+          </a:p>
+        </p:txBody>
+      </p:sp>
+    </p:spTree>
+    <p:extLst>
+      <p:ext uri="{BB962C8B-B14F-4D97-AF65-F5344CB8AC3E}">
+        <p14:creationId xmlns:p14="http://schemas.microsoft.com/office/powerpoint/2010/main" val="4029123270"/>
+      </p:ext>
+    </p:extLst>
+  </p:cSld>
+  <p:clrMapOvr>
+    <a:masterClrMapping/>
+  </p:clrMapOvr>
+</p:notes>
+</file>
+
+<file path=ppt/notesSlides/notesSlide6.xml><?xml version="1.0" encoding="utf-8"?>
+<p:notes xmlns:a="http://schemas.openxmlformats.org/drawingml/2006/main" xmlns:r="http://schemas.openxmlformats.org/officeDocument/2006/relationships" xmlns:p="http://schemas.openxmlformats.org/presentationml/2006/main">
+  <p:cSld>
+    <p:spTree>
+      <p:nvGrpSpPr>
+        <p:cNvPr id="1" name=""/>
+        <p:cNvGrpSpPr/>
+        <p:nvPr/>
+      </p:nvGrpSpPr>
+      <p:grpSpPr>
+        <a:xfrm>
+          <a:off x="0" y="0"/>
+          <a:ext cx="0" cy="0"/>
+          <a:chOff x="0" y="0"/>
+          <a:chExt cx="0" cy="0"/>
+        </a:xfrm>
+      </p:grpSpPr>
+      <p:sp>
+        <p:nvSpPr>
+          <p:cNvPr id="2" name="Espaço Reservado para Imagem de Slide 1"/>
+          <p:cNvSpPr>
+            <a:spLocks noGrp="1" noRot="1" noChangeAspect="1"/>
+          </p:cNvSpPr>
+          <p:nvPr>
+            <p:ph type="sldImg"/>
+          </p:nvPr>
+        </p:nvSpPr>
+        <p:spPr/>
+      </p:sp>
+      <p:sp>
+        <p:nvSpPr>
+          <p:cNvPr id="3" name="Espaço Reservado para Anotações 2"/>
+          <p:cNvSpPr>
+            <a:spLocks noGrp="1"/>
+          </p:cNvSpPr>
+          <p:nvPr>
+            <p:ph type="body" idx="1"/>
+          </p:nvPr>
+        </p:nvSpPr>
+        <p:spPr/>
+        <p:txBody>
+          <a:bodyPr/>
+          <a:lstStyle/>
+          <a:p>
+            <a:r>
+              <a:rPr lang="pt-BR" sz="1200" b="0" kern="1200" dirty="0">
+                <a:solidFill>
+                  <a:schemeClr val="tx1"/>
+                </a:solidFill>
+                <a:effectLst/>
+                <a:latin typeface="+mn-lt"/>
+                <a:ea typeface="+mn-ea"/>
+                <a:cs typeface="+mn-cs"/>
+              </a:rPr>
+              <a:t>A justificativa tem três lados. No lado acadêmico, quase tudo que se estuda é B2C de grande volume. B2B esparso é uma lacuna, e é justo onde a filtragem colaborativa não funciona. No lado prático, é uma empresa real, com uma dor real, e o sistema ajuda a equipe a vender com base em dado, não em memória. E no lado técnico, é uma arquitetura completa, reproduzível e barata, que cabe numa empresa pequena sem nenhuma estrutura de Big Data."</a:t>
+            </a:r>
+          </a:p>
+          <a:p>
+            <a:br>
+              <a:rPr lang="pt-BR" sz="1200" b="0" kern="1200" dirty="0">
+                <a:solidFill>
+                  <a:schemeClr val="tx1"/>
+                </a:solidFill>
+                <a:effectLst/>
+                <a:latin typeface="+mn-lt"/>
+                <a:ea typeface="+mn-ea"/>
+                <a:cs typeface="+mn-cs"/>
+              </a:rPr>
+            </a:br>
+            <a:r>
+              <a:rPr lang="pt-BR" sz="1200" b="0" kern="1200" dirty="0">
+                <a:solidFill>
+                  <a:schemeClr val="tx1"/>
+                </a:solidFill>
+                <a:effectLst/>
+                <a:latin typeface="+mn-lt"/>
+                <a:ea typeface="+mn-ea"/>
+                <a:cs typeface="+mn-cs"/>
+              </a:rPr>
+              <a:t>Deixa: este é o argumento de relevância. A banca gosta de ver o "por que importa".</a:t>
+            </a:r>
+          </a:p>
+          <a:p>
+            <a:endParaRPr lang="pt-BR" dirty="0"/>
+          </a:p>
+        </p:txBody>
+      </p:sp>
+      <p:sp>
+        <p:nvSpPr>
+          <p:cNvPr id="4" name="Espaço Reservado para Número de Slide 3"/>
+          <p:cNvSpPr>
+            <a:spLocks noGrp="1"/>
+          </p:cNvSpPr>
+          <p:nvPr>
+            <p:ph type="sldNum" sz="quarter" idx="5"/>
+          </p:nvPr>
+        </p:nvSpPr>
+        <p:spPr/>
+        <p:txBody>
+          <a:bodyPr/>
+          <a:lstStyle/>
+          <a:p>
+            <a:fld id="{ECAD9E62-5FC1-47F7-98F4-A2E33E4F32FD}" type="slidenum">
+              <a:rPr lang="pt-BR" smtClean="0"/>
+              <a:t>6</a:t>
+            </a:fld>
+            <a:endParaRPr lang="pt-BR"/>
+          </a:p>
+        </p:txBody>
+      </p:sp>
+    </p:spTree>
+    <p:extLst>
+      <p:ext uri="{BB962C8B-B14F-4D97-AF65-F5344CB8AC3E}">
+        <p14:creationId xmlns:p14="http://schemas.microsoft.com/office/powerpoint/2010/main" val="2301776873"/>
+      </p:ext>
+    </p:extLst>
+  </p:cSld>
+  <p:clrMapOvr>
+    <a:masterClrMapping/>
+  </p:clrMapOvr>
+</p:notes>
+</file>
+
+<file path=ppt/notesSlides/notesSlide7.xml><?xml version="1.0" encoding="utf-8"?>
+<p:notes xmlns:a="http://schemas.openxmlformats.org/drawingml/2006/main" xmlns:r="http://schemas.openxmlformats.org/officeDocument/2006/relationships" xmlns:p="http://schemas.openxmlformats.org/presentationml/2006/main">
+  <p:cSld>
+    <p:spTree>
+      <p:nvGrpSpPr>
+        <p:cNvPr id="1" name=""/>
+        <p:cNvGrpSpPr/>
+        <p:nvPr/>
+      </p:nvGrpSpPr>
+      <p:grpSpPr>
+        <a:xfrm>
+          <a:off x="0" y="0"/>
+          <a:ext cx="0" cy="0"/>
+          <a:chOff x="0" y="0"/>
+          <a:chExt cx="0" cy="0"/>
+        </a:xfrm>
+      </p:grpSpPr>
+      <p:sp>
+        <p:nvSpPr>
+          <p:cNvPr id="2" name="Espaço Reservado para Imagem de Slide 1"/>
+          <p:cNvSpPr>
+            <a:spLocks noGrp="1" noRot="1" noChangeAspect="1"/>
+          </p:cNvSpPr>
+          <p:nvPr>
+            <p:ph type="sldImg"/>
+          </p:nvPr>
+        </p:nvSpPr>
+        <p:spPr/>
+      </p:sp>
+      <p:sp>
+        <p:nvSpPr>
+          <p:cNvPr id="3" name="Espaço Reservado para Anotações 2"/>
+          <p:cNvSpPr>
+            <a:spLocks noGrp="1"/>
+          </p:cNvSpPr>
+          <p:nvPr>
+            <p:ph type="body" idx="1"/>
+          </p:nvPr>
+        </p:nvSpPr>
+        <p:spPr/>
+        <p:txBody>
+          <a:bodyPr/>
+          <a:lstStyle/>
+          <a:p>
+            <a:r>
+              <a:rPr lang="pt-BR" sz="1200" b="0" kern="1200" dirty="0">
+                <a:solidFill>
+                  <a:schemeClr val="tx1"/>
+                </a:solidFill>
+                <a:effectLst/>
+                <a:latin typeface="+mn-lt"/>
+                <a:ea typeface="+mn-ea"/>
+                <a:cs typeface="+mn-cs"/>
+              </a:rPr>
+              <a:t>Entrando na teoria de forma bem direta. Cada pedido é uma cesta de compras. O que eu procuro é um padrão do tipo: quem compra A tende a comprar B. E eu meço isso com três números."</a:t>
+            </a:r>
+          </a:p>
+          <a:p>
+            <a:br>
+              <a:rPr lang="pt-BR" sz="1200" b="0" kern="1200" dirty="0">
+                <a:solidFill>
+                  <a:schemeClr val="tx1"/>
+                </a:solidFill>
+                <a:effectLst/>
+                <a:latin typeface="+mn-lt"/>
+                <a:ea typeface="+mn-ea"/>
+                <a:cs typeface="+mn-cs"/>
+              </a:rPr>
+            </a:br>
+            <a:r>
+              <a:rPr lang="pt-BR" sz="1200" b="0" kern="1200" dirty="0">
+                <a:solidFill>
+                  <a:schemeClr val="tx1"/>
+                </a:solidFill>
+                <a:effectLst/>
+                <a:latin typeface="+mn-lt"/>
+                <a:ea typeface="+mn-ea"/>
+                <a:cs typeface="+mn-cs"/>
+              </a:rPr>
+              <a:t>"O suporte </a:t>
+            </a:r>
+            <a:r>
+              <a:rPr lang="pt-BR" sz="1200" b="0" i="0" kern="1200" dirty="0">
+                <a:solidFill>
+                  <a:schemeClr val="tx1"/>
+                </a:solidFill>
+                <a:effectLst/>
+                <a:latin typeface="+mn-lt"/>
+                <a:ea typeface="+mn-ea"/>
+                <a:cs typeface="+mn-cs"/>
+              </a:rPr>
+              <a:t>nos diz quão frequente um par de produtos aparece no total de vendas. Ele serve como um primeiro filtro: não queremos criar regras baseadas em eventos isolados ou raros que aconteceram apenas uma vez. </a:t>
+            </a:r>
+            <a:r>
+              <a:rPr lang="pt-BR" sz="1200" b="0" kern="1200" dirty="0">
+                <a:solidFill>
+                  <a:schemeClr val="tx1"/>
+                </a:solidFill>
+                <a:effectLst/>
+                <a:latin typeface="+mn-lt"/>
+                <a:ea typeface="+mn-ea"/>
+                <a:cs typeface="+mn-cs"/>
+              </a:rPr>
+              <a:t>. Serve para descartar coisa muito rara. A confiança responde: dado que o cliente comprou A, qual a chance de ele levar B também. É a força da regra. E o lift compara o que aconteceu com o que aconteceria por acaso. Lift acima de 1 quer dizer que existe associação de verdade, não foi coincidência.“</a:t>
+            </a:r>
+          </a:p>
+          <a:p>
+            <a:endParaRPr lang="pt-BR" sz="1200" b="0" kern="1200" dirty="0">
+              <a:solidFill>
+                <a:schemeClr val="tx1"/>
+              </a:solidFill>
+              <a:effectLst/>
+              <a:latin typeface="+mn-lt"/>
+              <a:ea typeface="+mn-ea"/>
+              <a:cs typeface="+mn-cs"/>
+            </a:endParaRPr>
+          </a:p>
+          <a:p>
+            <a:r>
+              <a:rPr lang="pt-BR" sz="1200" b="0" i="0" kern="1200" dirty="0">
+                <a:solidFill>
+                  <a:schemeClr val="tx1"/>
+                </a:solidFill>
+                <a:effectLst/>
+                <a:latin typeface="+mn-lt"/>
+                <a:ea typeface="+mn-ea"/>
+                <a:cs typeface="+mn-cs"/>
+              </a:rPr>
+              <a:t>“Entender essas métricas foi crucial para o projeto, pois em um cenário de baixo volume como o da Quasar Barber, o Lift nos permitiu separar o 'ruído' estatístico das oportunidades reais de venda casada que a equipe de vendas pode explorar."</a:t>
+            </a:r>
+            <a:endParaRPr lang="pt-BR" sz="1200" b="0" kern="1200" dirty="0">
+              <a:solidFill>
+                <a:schemeClr val="tx1"/>
+              </a:solidFill>
+              <a:effectLst/>
+              <a:latin typeface="+mn-lt"/>
+              <a:ea typeface="+mn-ea"/>
+              <a:cs typeface="+mn-cs"/>
+            </a:endParaRPr>
+          </a:p>
+          <a:p>
+            <a:br>
+              <a:rPr lang="pt-BR" sz="1200" b="0" kern="1200" dirty="0">
+                <a:solidFill>
+                  <a:schemeClr val="tx1"/>
+                </a:solidFill>
+                <a:effectLst/>
+                <a:latin typeface="+mn-lt"/>
+                <a:ea typeface="+mn-ea"/>
+                <a:cs typeface="+mn-cs"/>
+              </a:rPr>
+            </a:br>
+            <a:r>
+              <a:rPr lang="pt-BR" sz="1200" b="0" kern="1200" dirty="0">
+                <a:solidFill>
+                  <a:schemeClr val="tx1"/>
+                </a:solidFill>
+                <a:effectLst/>
+                <a:latin typeface="+mn-lt"/>
+                <a:ea typeface="+mn-ea"/>
+                <a:cs typeface="+mn-cs"/>
+              </a:rPr>
+              <a:t>Deixa: aponte para cada </a:t>
+            </a:r>
+            <a:r>
+              <a:rPr lang="pt-BR" sz="1200" b="0" kern="1200" dirty="0" err="1">
+                <a:solidFill>
+                  <a:schemeClr val="tx1"/>
+                </a:solidFill>
+                <a:effectLst/>
+                <a:latin typeface="+mn-lt"/>
+                <a:ea typeface="+mn-ea"/>
+                <a:cs typeface="+mn-cs"/>
+              </a:rPr>
+              <a:t>card</a:t>
+            </a:r>
+            <a:r>
+              <a:rPr lang="pt-BR" sz="1200" b="0" kern="1200" dirty="0">
+                <a:solidFill>
+                  <a:schemeClr val="tx1"/>
+                </a:solidFill>
+                <a:effectLst/>
+                <a:latin typeface="+mn-lt"/>
+                <a:ea typeface="+mn-ea"/>
+                <a:cs typeface="+mn-cs"/>
+              </a:rPr>
+              <a:t> ao falar. Estes três conceitos são a base de tudo que vem depois.</a:t>
+            </a:r>
+          </a:p>
+          <a:p>
+            <a:br>
+              <a:rPr lang="pt-BR" sz="1200" b="0" kern="1200" dirty="0">
+                <a:solidFill>
+                  <a:schemeClr val="tx1"/>
+                </a:solidFill>
+                <a:effectLst/>
+                <a:latin typeface="+mn-lt"/>
+                <a:ea typeface="+mn-ea"/>
+                <a:cs typeface="+mn-cs"/>
+              </a:rPr>
+            </a:br>
+            <a:r>
+              <a:rPr lang="pt-BR" sz="1200" b="1" kern="1200" dirty="0">
+                <a:solidFill>
+                  <a:schemeClr val="tx1"/>
+                </a:solidFill>
+                <a:effectLst/>
+                <a:latin typeface="+mn-lt"/>
+                <a:ea typeface="+mn-ea"/>
+                <a:cs typeface="+mn-cs"/>
+              </a:rPr>
+              <a:t>---</a:t>
+            </a:r>
+            <a:endParaRPr lang="pt-BR" sz="1200" b="0" kern="1200" dirty="0">
+              <a:solidFill>
+                <a:schemeClr val="tx1"/>
+              </a:solidFill>
+              <a:effectLst/>
+              <a:latin typeface="+mn-lt"/>
+              <a:ea typeface="+mn-ea"/>
+              <a:cs typeface="+mn-cs"/>
+            </a:endParaRPr>
+          </a:p>
+          <a:p>
+            <a:endParaRPr lang="pt-BR" dirty="0"/>
+          </a:p>
+        </p:txBody>
+      </p:sp>
+      <p:sp>
+        <p:nvSpPr>
+          <p:cNvPr id="4" name="Espaço Reservado para Número de Slide 3"/>
+          <p:cNvSpPr>
+            <a:spLocks noGrp="1"/>
+          </p:cNvSpPr>
+          <p:nvPr>
+            <p:ph type="sldNum" sz="quarter" idx="5"/>
+          </p:nvPr>
+        </p:nvSpPr>
+        <p:spPr/>
+        <p:txBody>
+          <a:bodyPr/>
+          <a:lstStyle/>
+          <a:p>
+            <a:fld id="{ECAD9E62-5FC1-47F7-98F4-A2E33E4F32FD}" type="slidenum">
+              <a:rPr lang="pt-BR" smtClean="0"/>
+              <a:t>7</a:t>
+            </a:fld>
+            <a:endParaRPr lang="pt-BR"/>
+          </a:p>
+        </p:txBody>
+      </p:sp>
+    </p:spTree>
+    <p:extLst>
+      <p:ext uri="{BB962C8B-B14F-4D97-AF65-F5344CB8AC3E}">
+        <p14:creationId xmlns:p14="http://schemas.microsoft.com/office/powerpoint/2010/main" val="2620827183"/>
+      </p:ext>
+    </p:extLst>
+  </p:cSld>
+  <p:clrMapOvr>
+    <a:masterClrMapping/>
+  </p:clrMapOvr>
+</p:notes>
+</file>
+
+<file path=ppt/notesSlides/notesSlide8.xml><?xml version="1.0" encoding="utf-8"?>
+<p:notes xmlns:a="http://schemas.openxmlformats.org/drawingml/2006/main" xmlns:r="http://schemas.openxmlformats.org/officeDocument/2006/relationships" xmlns:p="http://schemas.openxmlformats.org/presentationml/2006/main">
+  <p:cSld>
+    <p:spTree>
+      <p:nvGrpSpPr>
+        <p:cNvPr id="1" name=""/>
+        <p:cNvGrpSpPr/>
+        <p:nvPr/>
+      </p:nvGrpSpPr>
+      <p:grpSpPr>
+        <a:xfrm>
+          <a:off x="0" y="0"/>
+          <a:ext cx="0" cy="0"/>
+          <a:chOff x="0" y="0"/>
+          <a:chExt cx="0" cy="0"/>
+        </a:xfrm>
+      </p:grpSpPr>
+      <p:sp>
+        <p:nvSpPr>
+          <p:cNvPr id="2" name="Espaço Reservado para Imagem de Slide 1"/>
+          <p:cNvSpPr>
+            <a:spLocks noGrp="1" noRot="1" noChangeAspect="1"/>
+          </p:cNvSpPr>
+          <p:nvPr>
+            <p:ph type="sldImg"/>
+          </p:nvPr>
+        </p:nvSpPr>
+        <p:spPr/>
+      </p:sp>
+      <p:sp>
+        <p:nvSpPr>
+          <p:cNvPr id="3" name="Espaço Reservado para Anotações 2"/>
+          <p:cNvSpPr>
+            <a:spLocks noGrp="1"/>
+          </p:cNvSpPr>
+          <p:nvPr>
+            <p:ph type="body" idx="1"/>
+          </p:nvPr>
+        </p:nvSpPr>
+        <p:spPr/>
+        <p:txBody>
+          <a:bodyPr/>
+          <a:lstStyle/>
+          <a:p>
+            <a:r>
+              <a:rPr lang="pt-BR" sz="1200" b="0" kern="1200" dirty="0">
+                <a:solidFill>
+                  <a:schemeClr val="tx1"/>
+                </a:solidFill>
+                <a:effectLst/>
+                <a:latin typeface="+mn-lt"/>
+                <a:ea typeface="+mn-ea"/>
+                <a:cs typeface="+mn-cs"/>
+              </a:rPr>
+              <a:t>"Por que essa técnica e não outra. A filtragem colaborativa precisa de uma matriz cheia de clientes e avaliações, e isso simplesmente não existe aqui. Os problemas de cold start e de </a:t>
+            </a:r>
+            <a:r>
+              <a:rPr lang="pt-BR" sz="1200" b="0" kern="1200" dirty="0" err="1">
+                <a:solidFill>
+                  <a:schemeClr val="tx1"/>
+                </a:solidFill>
+                <a:effectLst/>
+                <a:latin typeface="+mn-lt"/>
+                <a:ea typeface="+mn-ea"/>
+                <a:cs typeface="+mn-cs"/>
+              </a:rPr>
+              <a:t>esparsidade</a:t>
+            </a:r>
+            <a:r>
+              <a:rPr lang="pt-BR" sz="1200" b="0" kern="1200" dirty="0">
+                <a:solidFill>
+                  <a:schemeClr val="tx1"/>
+                </a:solidFill>
+                <a:effectLst/>
+                <a:latin typeface="+mn-lt"/>
+                <a:ea typeface="+mn-ea"/>
+                <a:cs typeface="+mn-cs"/>
+              </a:rPr>
+              <a:t>, que em outros cenários são exceção, no meu caso são a regra."</a:t>
+            </a:r>
+          </a:p>
+          <a:p>
+            <a:br>
+              <a:rPr lang="pt-BR" sz="1200" b="0" kern="1200" dirty="0">
+                <a:solidFill>
+                  <a:schemeClr val="tx1"/>
+                </a:solidFill>
+                <a:effectLst/>
+                <a:latin typeface="+mn-lt"/>
+                <a:ea typeface="+mn-ea"/>
+                <a:cs typeface="+mn-cs"/>
+              </a:rPr>
+            </a:br>
+            <a:r>
+              <a:rPr lang="pt-BR" sz="1200" b="0" kern="1200" dirty="0">
+                <a:solidFill>
+                  <a:schemeClr val="tx1"/>
+                </a:solidFill>
+                <a:effectLst/>
+                <a:latin typeface="+mn-lt"/>
+                <a:ea typeface="+mn-ea"/>
+                <a:cs typeface="+mn-cs"/>
+              </a:rPr>
+              <a:t>"As regras de associação trabalham direto na coocorrência dentro das transações. Não precisam de nota nem de muita gente. O resultado é interpretável, o vendedor entende. E o custo de processar é baixo no volume que eu tenho. Some a isso a lacuna acadêmica, já que quase todo estudo foca em grande volume, e a escolha se justifica."</a:t>
+            </a:r>
+          </a:p>
+          <a:p>
+            <a:br>
+              <a:rPr lang="pt-BR" sz="1200" b="0" kern="1200" dirty="0">
+                <a:solidFill>
+                  <a:schemeClr val="tx1"/>
+                </a:solidFill>
+                <a:effectLst/>
+                <a:latin typeface="+mn-lt"/>
+                <a:ea typeface="+mn-ea"/>
+                <a:cs typeface="+mn-cs"/>
+              </a:rPr>
+            </a:br>
+            <a:r>
+              <a:rPr lang="pt-BR" sz="1200" b="0" kern="1200" dirty="0">
+                <a:solidFill>
+                  <a:schemeClr val="tx1"/>
+                </a:solidFill>
+                <a:effectLst/>
+                <a:latin typeface="+mn-lt"/>
+                <a:ea typeface="+mn-ea"/>
+                <a:cs typeface="+mn-cs"/>
+              </a:rPr>
+              <a:t>Deixa: este slide conversa com o slide 3. É o fechamento do "por que essa abordagem".</a:t>
+            </a:r>
+          </a:p>
+          <a:p>
+            <a:endParaRPr lang="pt-BR" dirty="0"/>
+          </a:p>
+        </p:txBody>
+      </p:sp>
+      <p:sp>
+        <p:nvSpPr>
+          <p:cNvPr id="4" name="Espaço Reservado para Número de Slide 3"/>
+          <p:cNvSpPr>
+            <a:spLocks noGrp="1"/>
+          </p:cNvSpPr>
+          <p:nvPr>
+            <p:ph type="sldNum" sz="quarter" idx="5"/>
+          </p:nvPr>
+        </p:nvSpPr>
+        <p:spPr/>
+        <p:txBody>
+          <a:bodyPr/>
+          <a:lstStyle/>
+          <a:p>
+            <a:fld id="{ECAD9E62-5FC1-47F7-98F4-A2E33E4F32FD}" type="slidenum">
+              <a:rPr lang="pt-BR" smtClean="0"/>
+              <a:t>8</a:t>
+            </a:fld>
+            <a:endParaRPr lang="pt-BR"/>
+          </a:p>
+        </p:txBody>
+      </p:sp>
+    </p:spTree>
+    <p:extLst>
+      <p:ext uri="{BB962C8B-B14F-4D97-AF65-F5344CB8AC3E}">
+        <p14:creationId xmlns:p14="http://schemas.microsoft.com/office/powerpoint/2010/main" val="528052222"/>
+      </p:ext>
+    </p:extLst>
+  </p:cSld>
+  <p:clrMapOvr>
+    <a:masterClrMapping/>
+  </p:clrMapOvr>
+</p:notes>
+</file>
+
+<file path=ppt/notesSlides/notesSlide9.xml><?xml version="1.0" encoding="utf-8"?>
+<p:notes xmlns:a="http://schemas.openxmlformats.org/drawingml/2006/main" xmlns:r="http://schemas.openxmlformats.org/officeDocument/2006/relationships" xmlns:p="http://schemas.openxmlformats.org/presentationml/2006/main">
+  <p:cSld>
+    <p:spTree>
+      <p:nvGrpSpPr>
+        <p:cNvPr id="1" name=""/>
+        <p:cNvGrpSpPr/>
+        <p:nvPr/>
+      </p:nvGrpSpPr>
+      <p:grpSpPr>
+        <a:xfrm>
+          <a:off x="0" y="0"/>
+          <a:ext cx="0" cy="0"/>
+          <a:chOff x="0" y="0"/>
+          <a:chExt cx="0" cy="0"/>
+        </a:xfrm>
+      </p:grpSpPr>
+      <p:sp>
+        <p:nvSpPr>
+          <p:cNvPr id="2" name="Espaço Reservado para Imagem de Slide 1"/>
+          <p:cNvSpPr>
+            <a:spLocks noGrp="1" noRot="1" noChangeAspect="1"/>
+          </p:cNvSpPr>
+          <p:nvPr>
+            <p:ph type="sldImg"/>
+          </p:nvPr>
+        </p:nvSpPr>
+        <p:spPr/>
+      </p:sp>
+      <p:sp>
+        <p:nvSpPr>
+          <p:cNvPr id="3" name="Espaço Reservado para Anotações 2"/>
+          <p:cNvSpPr>
+            <a:spLocks noGrp="1"/>
+          </p:cNvSpPr>
+          <p:nvPr>
+            <p:ph type="body" idx="1"/>
+          </p:nvPr>
+        </p:nvSpPr>
+        <p:spPr/>
+        <p:txBody>
+          <a:bodyPr/>
+          <a:lstStyle/>
+          <a:p>
+            <a:r>
+              <a:rPr lang="pt-BR" sz="1200" b="0" kern="1200" dirty="0">
+                <a:solidFill>
+                  <a:schemeClr val="tx1"/>
+                </a:solidFill>
+                <a:effectLst/>
+                <a:latin typeface="+mn-lt"/>
+                <a:ea typeface="+mn-ea"/>
+                <a:cs typeface="+mn-cs"/>
+              </a:rPr>
+              <a:t>"Sobre o método: é uma pesquisa aplicada, quantitativa, um estudo de caso único. O método de condução foi o Design Science Research, que basicamente diz: você constrói um artefato e avalia esse artefato. Foi o que fiz."</a:t>
+            </a:r>
+          </a:p>
+          <a:p>
+            <a:br>
+              <a:rPr lang="pt-BR" sz="1200" b="0" kern="1200" dirty="0">
+                <a:solidFill>
+                  <a:schemeClr val="tx1"/>
+                </a:solidFill>
+                <a:effectLst/>
+                <a:latin typeface="+mn-lt"/>
+                <a:ea typeface="+mn-ea"/>
+                <a:cs typeface="+mn-cs"/>
+              </a:rPr>
+            </a:br>
+            <a:r>
+              <a:rPr lang="pt-BR" sz="1200" b="0" kern="1200" dirty="0">
+                <a:solidFill>
+                  <a:schemeClr val="tx1"/>
+                </a:solidFill>
+                <a:effectLst/>
+                <a:latin typeface="+mn-lt"/>
+                <a:ea typeface="+mn-ea"/>
+                <a:cs typeface="+mn-cs"/>
+              </a:rPr>
+              <a:t>"E são dados reais, não simulados. São as vendas da Quasar Barber entre 29 de abril e 18 de junho de 2026. Olhem os números: 30 transações, 26 clientes, 29 produtos, 52 itens vendidos. E o número que mais importa: só 14 cestas têm dois ou mais produtos. São essas 14 que geram regra. As outras 16 são compra de um item só."</a:t>
+            </a:r>
+          </a:p>
+          <a:p>
+            <a:br>
+              <a:rPr lang="pt-BR" sz="1200" b="0" kern="1200" dirty="0">
+                <a:solidFill>
+                  <a:schemeClr val="tx1"/>
+                </a:solidFill>
+                <a:effectLst/>
+                <a:latin typeface="+mn-lt"/>
+                <a:ea typeface="+mn-ea"/>
+                <a:cs typeface="+mn-cs"/>
+              </a:rPr>
+            </a:br>
+            <a:r>
+              <a:rPr lang="pt-BR" sz="1200" b="0" kern="1200" dirty="0">
+                <a:solidFill>
+                  <a:schemeClr val="tx1"/>
+                </a:solidFill>
+                <a:effectLst/>
+                <a:latin typeface="+mn-lt"/>
+                <a:ea typeface="+mn-ea"/>
+                <a:cs typeface="+mn-cs"/>
+              </a:rPr>
+              <a:t>"Eu quero ser honesto com a banca aqui: essa </a:t>
+            </a:r>
+            <a:r>
+              <a:rPr lang="pt-BR" sz="1200" b="0" kern="1200" dirty="0" err="1">
+                <a:solidFill>
+                  <a:schemeClr val="tx1"/>
+                </a:solidFill>
+                <a:effectLst/>
+                <a:latin typeface="+mn-lt"/>
+                <a:ea typeface="+mn-ea"/>
+                <a:cs typeface="+mn-cs"/>
+              </a:rPr>
+              <a:t>esparsidade</a:t>
+            </a:r>
+            <a:r>
+              <a:rPr lang="pt-BR" sz="1200" b="0" kern="1200" dirty="0">
+                <a:solidFill>
+                  <a:schemeClr val="tx1"/>
+                </a:solidFill>
+                <a:effectLst/>
+                <a:latin typeface="+mn-lt"/>
+                <a:ea typeface="+mn-ea"/>
+                <a:cs typeface="+mn-cs"/>
+              </a:rPr>
+              <a:t> não é um defeito do meu recorte, é a cara do B2B pequeno. O trabalho todo é sobre fazer recomendação funcionar nessa condição difícil."</a:t>
+            </a:r>
+          </a:p>
+          <a:p>
+            <a:br>
+              <a:rPr lang="pt-BR" sz="1200" b="0" kern="1200" dirty="0">
+                <a:solidFill>
+                  <a:schemeClr val="tx1"/>
+                </a:solidFill>
+                <a:effectLst/>
+                <a:latin typeface="+mn-lt"/>
+                <a:ea typeface="+mn-ea"/>
+                <a:cs typeface="+mn-cs"/>
+              </a:rPr>
+            </a:br>
+            <a:r>
+              <a:rPr lang="pt-BR" sz="1200" b="0" kern="1200" dirty="0">
+                <a:solidFill>
+                  <a:schemeClr val="tx1"/>
+                </a:solidFill>
+                <a:effectLst/>
+                <a:latin typeface="+mn-lt"/>
+                <a:ea typeface="+mn-ea"/>
+                <a:cs typeface="+mn-cs"/>
+              </a:rPr>
+              <a:t>Deixa: pause nos números, deixe a banca ler. O "14 </a:t>
+            </a:r>
+            <a:r>
+              <a:rPr lang="pt-BR" sz="1200" b="0" kern="1200" dirty="0" err="1">
+                <a:solidFill>
+                  <a:schemeClr val="tx1"/>
+                </a:solidFill>
+                <a:effectLst/>
+                <a:latin typeface="+mn-lt"/>
+                <a:ea typeface="+mn-ea"/>
+                <a:cs typeface="+mn-cs"/>
+              </a:rPr>
+              <a:t>multi-item</a:t>
+            </a:r>
+            <a:r>
+              <a:rPr lang="pt-BR" sz="1200" b="0" kern="1200" dirty="0">
+                <a:solidFill>
+                  <a:schemeClr val="tx1"/>
+                </a:solidFill>
+                <a:effectLst/>
+                <a:latin typeface="+mn-lt"/>
+                <a:ea typeface="+mn-ea"/>
+                <a:cs typeface="+mn-cs"/>
+              </a:rPr>
+              <a:t>" é o gancho para entender as limitações depois.</a:t>
+            </a:r>
+          </a:p>
+          <a:p>
+            <a:endParaRPr lang="pt-BR" dirty="0"/>
+          </a:p>
+        </p:txBody>
+      </p:sp>
+      <p:sp>
+        <p:nvSpPr>
+          <p:cNvPr id="4" name="Espaço Reservado para Número de Slide 3"/>
+          <p:cNvSpPr>
+            <a:spLocks noGrp="1"/>
+          </p:cNvSpPr>
+          <p:nvPr>
+            <p:ph type="sldNum" sz="quarter" idx="5"/>
+          </p:nvPr>
+        </p:nvSpPr>
+        <p:spPr/>
+        <p:txBody>
+          <a:bodyPr/>
+          <a:lstStyle/>
+          <a:p>
+            <a:fld id="{ECAD9E62-5FC1-47F7-98F4-A2E33E4F32FD}" type="slidenum">
+              <a:rPr lang="pt-BR" smtClean="0"/>
+              <a:t>9</a:t>
+            </a:fld>
+            <a:endParaRPr lang="pt-BR"/>
+          </a:p>
+        </p:txBody>
+      </p:sp>
+    </p:spTree>
+    <p:extLst>
+      <p:ext uri="{BB962C8B-B14F-4D97-AF65-F5344CB8AC3E}">
+        <p14:creationId xmlns:p14="http://schemas.microsoft.com/office/powerpoint/2010/main" val="4155578618"/>
+      </p:ext>
+    </p:extLst>
+  </p:cSld>
+  <p:clrMapOvr>
+    <a:masterClrMapping/>
+  </p:clrMapOvr>
+</p:notes>
 </file>
 
 <file path=ppt/slideLayouts/slideLayout1.xml><?xml version="1.0" encoding="utf-8"?>
@@ -162,10 +3891,9 @@
           <a:lstStyle/>
           <a:p>
             <a:r>
-              <a:rPr lang="en-US" smtClean="0"/>
+              <a:rPr lang="en-US"/>
               <a:t>Click to edit Master title style</a:t>
             </a:r>
-            <a:endParaRPr lang="en-US"/>
           </a:p>
         </p:txBody>
       </p:sp>
@@ -281,10 +4009,9 @@
           </a:lstStyle>
           <a:p>
             <a:r>
-              <a:rPr lang="en-US" smtClean="0"/>
+              <a:rPr lang="en-US"/>
               <a:t>Click to edit Master subtitle style</a:t>
             </a:r>
-            <a:endParaRPr lang="en-US"/>
           </a:p>
         </p:txBody>
       </p:sp>
@@ -305,7 +4032,7 @@
           <a:p>
             <a:fld id="{5BCAD085-E8A6-8845-BD4E-CB4CCA059FC4}" type="datetimeFigureOut">
               <a:rPr lang="en-US" smtClean="0"/>
-              <a:t>1/27/13</a:t>
+              <a:t>7/7/2026</a:t>
             </a:fld>
             <a:endParaRPr lang="en-US"/>
           </a:p>
@@ -347,7 +4074,7 @@
           <a:p>
             <a:fld id="{C1FF6DA9-008F-8B48-92A6-B652298478BF}" type="slidenum">
               <a:rPr lang="en-US" smtClean="0"/>
-              <a:t>‹#›</a:t>
+              <a:t>‹nº›</a:t>
             </a:fld>
             <a:endParaRPr lang="en-US"/>
           </a:p>
@@ -399,10 +4126,9 @@
           <a:lstStyle/>
           <a:p>
             <a:r>
-              <a:rPr lang="en-US" smtClean="0"/>
+              <a:rPr lang="en-US"/>
               <a:t>Click to edit Master title style</a:t>
             </a:r>
-            <a:endParaRPr lang="en-US"/>
           </a:p>
         </p:txBody>
       </p:sp>
@@ -423,38 +4149,37 @@
           <a:p>
             <a:pPr lvl="0"/>
             <a:r>
-              <a:rPr lang="en-US" smtClean="0"/>
+              <a:rPr lang="en-US"/>
               <a:t>Click to edit Master text styles</a:t>
             </a:r>
           </a:p>
           <a:p>
             <a:pPr lvl="1"/>
             <a:r>
-              <a:rPr lang="en-US" smtClean="0"/>
+              <a:rPr lang="en-US"/>
               <a:t>Second level</a:t>
             </a:r>
           </a:p>
           <a:p>
             <a:pPr lvl="2"/>
             <a:r>
-              <a:rPr lang="en-US" smtClean="0"/>
+              <a:rPr lang="en-US"/>
               <a:t>Third level</a:t>
             </a:r>
           </a:p>
           <a:p>
             <a:pPr lvl="3"/>
             <a:r>
-              <a:rPr lang="en-US" smtClean="0"/>
+              <a:rPr lang="en-US"/>
               <a:t>Fourth level</a:t>
             </a:r>
           </a:p>
           <a:p>
             <a:pPr lvl="4"/>
             <a:r>
-              <a:rPr lang="en-US" smtClean="0"/>
+              <a:rPr lang="en-US"/>
               <a:t>Fifth level</a:t>
             </a:r>
-            <a:endParaRPr lang="en-US"/>
           </a:p>
         </p:txBody>
       </p:sp>
@@ -475,7 +4200,7 @@
           <a:p>
             <a:fld id="{5BCAD085-E8A6-8845-BD4E-CB4CCA059FC4}" type="datetimeFigureOut">
               <a:rPr lang="en-US" smtClean="0"/>
-              <a:t>1/27/13</a:t>
+              <a:t>7/7/2026</a:t>
             </a:fld>
             <a:endParaRPr lang="en-US"/>
           </a:p>
@@ -517,7 +4242,7 @@
           <a:p>
             <a:fld id="{C1FF6DA9-008F-8B48-92A6-B652298478BF}" type="slidenum">
               <a:rPr lang="en-US" smtClean="0"/>
-              <a:t>‹#›</a:t>
+              <a:t>‹nº›</a:t>
             </a:fld>
             <a:endParaRPr lang="en-US"/>
           </a:p>
@@ -574,10 +4299,9 @@
           <a:lstStyle/>
           <a:p>
             <a:r>
-              <a:rPr lang="en-US" smtClean="0"/>
+              <a:rPr lang="en-US"/>
               <a:t>Click to edit Master title style</a:t>
             </a:r>
-            <a:endParaRPr lang="en-US"/>
           </a:p>
         </p:txBody>
       </p:sp>
@@ -603,38 +4327,37 @@
           <a:p>
             <a:pPr lvl="0"/>
             <a:r>
-              <a:rPr lang="en-US" smtClean="0"/>
+              <a:rPr lang="en-US"/>
               <a:t>Click to edit Master text styles</a:t>
             </a:r>
           </a:p>
           <a:p>
             <a:pPr lvl="1"/>
             <a:r>
-              <a:rPr lang="en-US" smtClean="0"/>
+              <a:rPr lang="en-US"/>
               <a:t>Second level</a:t>
             </a:r>
           </a:p>
           <a:p>
             <a:pPr lvl="2"/>
             <a:r>
-              <a:rPr lang="en-US" smtClean="0"/>
+              <a:rPr lang="en-US"/>
               <a:t>Third level</a:t>
             </a:r>
           </a:p>
           <a:p>
             <a:pPr lvl="3"/>
             <a:r>
-              <a:rPr lang="en-US" smtClean="0"/>
+              <a:rPr lang="en-US"/>
               <a:t>Fourth level</a:t>
             </a:r>
           </a:p>
           <a:p>
             <a:pPr lvl="4"/>
             <a:r>
-              <a:rPr lang="en-US" smtClean="0"/>
+              <a:rPr lang="en-US"/>
               <a:t>Fifth level</a:t>
             </a:r>
-            <a:endParaRPr lang="en-US"/>
           </a:p>
         </p:txBody>
       </p:sp>
@@ -655,7 +4378,7 @@
           <a:p>
             <a:fld id="{5BCAD085-E8A6-8845-BD4E-CB4CCA059FC4}" type="datetimeFigureOut">
               <a:rPr lang="en-US" smtClean="0"/>
-              <a:t>1/27/13</a:t>
+              <a:t>7/7/2026</a:t>
             </a:fld>
             <a:endParaRPr lang="en-US"/>
           </a:p>
@@ -697,7 +4420,7 @@
           <a:p>
             <a:fld id="{C1FF6DA9-008F-8B48-92A6-B652298478BF}" type="slidenum">
               <a:rPr lang="en-US" smtClean="0"/>
-              <a:t>‹#›</a:t>
+              <a:t>‹nº›</a:t>
             </a:fld>
             <a:endParaRPr lang="en-US"/>
           </a:p>
@@ -749,10 +4472,9 @@
           <a:lstStyle/>
           <a:p>
             <a:r>
-              <a:rPr lang="en-US" smtClean="0"/>
+              <a:rPr lang="en-US"/>
               <a:t>Click to edit Master title style</a:t>
             </a:r>
-            <a:endParaRPr lang="en-US"/>
           </a:p>
         </p:txBody>
       </p:sp>
@@ -773,38 +4495,37 @@
           <a:p>
             <a:pPr lvl="0"/>
             <a:r>
-              <a:rPr lang="en-US" smtClean="0"/>
+              <a:rPr lang="en-US"/>
               <a:t>Click to edit Master text styles</a:t>
             </a:r>
           </a:p>
           <a:p>
             <a:pPr lvl="1"/>
             <a:r>
-              <a:rPr lang="en-US" smtClean="0"/>
+              <a:rPr lang="en-US"/>
               <a:t>Second level</a:t>
             </a:r>
           </a:p>
           <a:p>
             <a:pPr lvl="2"/>
             <a:r>
-              <a:rPr lang="en-US" smtClean="0"/>
+              <a:rPr lang="en-US"/>
               <a:t>Third level</a:t>
             </a:r>
           </a:p>
           <a:p>
             <a:pPr lvl="3"/>
             <a:r>
-              <a:rPr lang="en-US" smtClean="0"/>
+              <a:rPr lang="en-US"/>
               <a:t>Fourth level</a:t>
             </a:r>
           </a:p>
           <a:p>
             <a:pPr lvl="4"/>
             <a:r>
-              <a:rPr lang="en-US" smtClean="0"/>
+              <a:rPr lang="en-US"/>
               <a:t>Fifth level</a:t>
             </a:r>
-            <a:endParaRPr lang="en-US"/>
           </a:p>
         </p:txBody>
       </p:sp>
@@ -825,7 +4546,7 @@
           <a:p>
             <a:fld id="{5BCAD085-E8A6-8845-BD4E-CB4CCA059FC4}" type="datetimeFigureOut">
               <a:rPr lang="en-US" smtClean="0"/>
-              <a:t>1/27/13</a:t>
+              <a:t>7/7/2026</a:t>
             </a:fld>
             <a:endParaRPr lang="en-US"/>
           </a:p>
@@ -867,7 +4588,7 @@
           <a:p>
             <a:fld id="{C1FF6DA9-008F-8B48-92A6-B652298478BF}" type="slidenum">
               <a:rPr lang="en-US" smtClean="0"/>
-              <a:t>‹#›</a:t>
+              <a:t>‹nº›</a:t>
             </a:fld>
             <a:endParaRPr lang="en-US"/>
           </a:p>
@@ -928,10 +4649,9 @@
           </a:lstStyle>
           <a:p>
             <a:r>
-              <a:rPr lang="en-US" smtClean="0"/>
+              <a:rPr lang="en-US"/>
               <a:t>Click to edit Master title style</a:t>
             </a:r>
-            <a:endParaRPr lang="en-US"/>
           </a:p>
         </p:txBody>
       </p:sp>
@@ -1048,7 +4768,7 @@
           <a:p>
             <a:pPr lvl="0"/>
             <a:r>
-              <a:rPr lang="en-US" smtClean="0"/>
+              <a:rPr lang="en-US"/>
               <a:t>Click to edit Master text styles</a:t>
             </a:r>
           </a:p>
@@ -1071,7 +4791,7 @@
           <a:p>
             <a:fld id="{5BCAD085-E8A6-8845-BD4E-CB4CCA059FC4}" type="datetimeFigureOut">
               <a:rPr lang="en-US" smtClean="0"/>
-              <a:t>1/27/13</a:t>
+              <a:t>7/7/2026</a:t>
             </a:fld>
             <a:endParaRPr lang="en-US"/>
           </a:p>
@@ -1113,7 +4833,7 @@
           <a:p>
             <a:fld id="{C1FF6DA9-008F-8B48-92A6-B652298478BF}" type="slidenum">
               <a:rPr lang="en-US" smtClean="0"/>
-              <a:t>‹#›</a:t>
+              <a:t>‹nº›</a:t>
             </a:fld>
             <a:endParaRPr lang="en-US"/>
           </a:p>
@@ -1165,10 +4885,9 @@
           <a:lstStyle/>
           <a:p>
             <a:r>
-              <a:rPr lang="en-US" smtClean="0"/>
+              <a:rPr lang="en-US"/>
               <a:t>Click to edit Master title style</a:t>
             </a:r>
-            <a:endParaRPr lang="en-US"/>
           </a:p>
         </p:txBody>
       </p:sp>
@@ -1222,38 +4941,37 @@
           <a:p>
             <a:pPr lvl="0"/>
             <a:r>
-              <a:rPr lang="en-US" smtClean="0"/>
+              <a:rPr lang="en-US"/>
               <a:t>Click to edit Master text styles</a:t>
             </a:r>
           </a:p>
           <a:p>
             <a:pPr lvl="1"/>
             <a:r>
-              <a:rPr lang="en-US" smtClean="0"/>
+              <a:rPr lang="en-US"/>
               <a:t>Second level</a:t>
             </a:r>
           </a:p>
           <a:p>
             <a:pPr lvl="2"/>
             <a:r>
-              <a:rPr lang="en-US" smtClean="0"/>
+              <a:rPr lang="en-US"/>
               <a:t>Third level</a:t>
             </a:r>
           </a:p>
           <a:p>
             <a:pPr lvl="3"/>
             <a:r>
-              <a:rPr lang="en-US" smtClean="0"/>
+              <a:rPr lang="en-US"/>
               <a:t>Fourth level</a:t>
             </a:r>
           </a:p>
           <a:p>
             <a:pPr lvl="4"/>
             <a:r>
-              <a:rPr lang="en-US" smtClean="0"/>
+              <a:rPr lang="en-US"/>
               <a:t>Fifth level</a:t>
             </a:r>
-            <a:endParaRPr lang="en-US"/>
           </a:p>
         </p:txBody>
       </p:sp>
@@ -1307,38 +5025,37 @@
           <a:p>
             <a:pPr lvl="0"/>
             <a:r>
-              <a:rPr lang="en-US" smtClean="0"/>
+              <a:rPr lang="en-US"/>
               <a:t>Click to edit Master text styles</a:t>
             </a:r>
           </a:p>
           <a:p>
             <a:pPr lvl="1"/>
             <a:r>
-              <a:rPr lang="en-US" smtClean="0"/>
+              <a:rPr lang="en-US"/>
               <a:t>Second level</a:t>
             </a:r>
           </a:p>
           <a:p>
             <a:pPr lvl="2"/>
             <a:r>
-              <a:rPr lang="en-US" smtClean="0"/>
+              <a:rPr lang="en-US"/>
               <a:t>Third level</a:t>
             </a:r>
           </a:p>
           <a:p>
             <a:pPr lvl="3"/>
             <a:r>
-              <a:rPr lang="en-US" smtClean="0"/>
+              <a:rPr lang="en-US"/>
               <a:t>Fourth level</a:t>
             </a:r>
           </a:p>
           <a:p>
             <a:pPr lvl="4"/>
             <a:r>
-              <a:rPr lang="en-US" smtClean="0"/>
+              <a:rPr lang="en-US"/>
               <a:t>Fifth level</a:t>
             </a:r>
-            <a:endParaRPr lang="en-US"/>
           </a:p>
         </p:txBody>
       </p:sp>
@@ -1359,7 +5076,7 @@
           <a:p>
             <a:fld id="{5BCAD085-E8A6-8845-BD4E-CB4CCA059FC4}" type="datetimeFigureOut">
               <a:rPr lang="en-US" smtClean="0"/>
-              <a:t>1/27/13</a:t>
+              <a:t>7/7/2026</a:t>
             </a:fld>
             <a:endParaRPr lang="en-US"/>
           </a:p>
@@ -1401,7 +5118,7 @@
           <a:p>
             <a:fld id="{C1FF6DA9-008F-8B48-92A6-B652298478BF}" type="slidenum">
               <a:rPr lang="en-US" smtClean="0"/>
-              <a:t>‹#›</a:t>
+              <a:t>‹nº›</a:t>
             </a:fld>
             <a:endParaRPr lang="en-US"/>
           </a:p>
@@ -1457,10 +5174,9 @@
           </a:lstStyle>
           <a:p>
             <a:r>
-              <a:rPr lang="en-US" smtClean="0"/>
+              <a:rPr lang="en-US"/>
               <a:t>Click to edit Master title style</a:t>
             </a:r>
-            <a:endParaRPr lang="en-US"/>
           </a:p>
         </p:txBody>
       </p:sp>
@@ -1523,7 +5239,7 @@
           <a:p>
             <a:pPr lvl="0"/>
             <a:r>
-              <a:rPr lang="en-US" smtClean="0"/>
+              <a:rPr lang="en-US"/>
               <a:t>Click to edit Master text styles</a:t>
             </a:r>
           </a:p>
@@ -1579,38 +5295,37 @@
           <a:p>
             <a:pPr lvl="0"/>
             <a:r>
-              <a:rPr lang="en-US" smtClean="0"/>
+              <a:rPr lang="en-US"/>
               <a:t>Click to edit Master text styles</a:t>
             </a:r>
           </a:p>
           <a:p>
             <a:pPr lvl="1"/>
             <a:r>
-              <a:rPr lang="en-US" smtClean="0"/>
+              <a:rPr lang="en-US"/>
               <a:t>Second level</a:t>
             </a:r>
           </a:p>
           <a:p>
             <a:pPr lvl="2"/>
             <a:r>
-              <a:rPr lang="en-US" smtClean="0"/>
+              <a:rPr lang="en-US"/>
               <a:t>Third level</a:t>
             </a:r>
           </a:p>
           <a:p>
             <a:pPr lvl="3"/>
             <a:r>
-              <a:rPr lang="en-US" smtClean="0"/>
+              <a:rPr lang="en-US"/>
               <a:t>Fourth level</a:t>
             </a:r>
           </a:p>
           <a:p>
             <a:pPr lvl="4"/>
             <a:r>
-              <a:rPr lang="en-US" smtClean="0"/>
+              <a:rPr lang="en-US"/>
               <a:t>Fifth level</a:t>
             </a:r>
-            <a:endParaRPr lang="en-US"/>
           </a:p>
         </p:txBody>
       </p:sp>
@@ -1673,7 +5388,7 @@
           <a:p>
             <a:pPr lvl="0"/>
             <a:r>
-              <a:rPr lang="en-US" smtClean="0"/>
+              <a:rPr lang="en-US"/>
               <a:t>Click to edit Master text styles</a:t>
             </a:r>
           </a:p>
@@ -1729,38 +5444,37 @@
           <a:p>
             <a:pPr lvl="0"/>
             <a:r>
-              <a:rPr lang="en-US" smtClean="0"/>
+              <a:rPr lang="en-US"/>
               <a:t>Click to edit Master text styles</a:t>
             </a:r>
           </a:p>
           <a:p>
             <a:pPr lvl="1"/>
             <a:r>
-              <a:rPr lang="en-US" smtClean="0"/>
+              <a:rPr lang="en-US"/>
               <a:t>Second level</a:t>
             </a:r>
           </a:p>
           <a:p>
             <a:pPr lvl="2"/>
             <a:r>
-              <a:rPr lang="en-US" smtClean="0"/>
+              <a:rPr lang="en-US"/>
               <a:t>Third level</a:t>
             </a:r>
           </a:p>
           <a:p>
             <a:pPr lvl="3"/>
             <a:r>
-              <a:rPr lang="en-US" smtClean="0"/>
+              <a:rPr lang="en-US"/>
               <a:t>Fourth level</a:t>
             </a:r>
           </a:p>
           <a:p>
             <a:pPr lvl="4"/>
             <a:r>
-              <a:rPr lang="en-US" smtClean="0"/>
+              <a:rPr lang="en-US"/>
               <a:t>Fifth level</a:t>
             </a:r>
-            <a:endParaRPr lang="en-US"/>
           </a:p>
         </p:txBody>
       </p:sp>
@@ -1781,7 +5495,7 @@
           <a:p>
             <a:fld id="{5BCAD085-E8A6-8845-BD4E-CB4CCA059FC4}" type="datetimeFigureOut">
               <a:rPr lang="en-US" smtClean="0"/>
-              <a:t>1/27/13</a:t>
+              <a:t>7/7/2026</a:t>
             </a:fld>
             <a:endParaRPr lang="en-US"/>
           </a:p>
@@ -1823,7 +5537,7 @@
           <a:p>
             <a:fld id="{C1FF6DA9-008F-8B48-92A6-B652298478BF}" type="slidenum">
               <a:rPr lang="en-US" smtClean="0"/>
-              <a:t>‹#›</a:t>
+              <a:t>‹nº›</a:t>
             </a:fld>
             <a:endParaRPr lang="en-US"/>
           </a:p>
@@ -1875,10 +5589,9 @@
           <a:lstStyle/>
           <a:p>
             <a:r>
-              <a:rPr lang="en-US" smtClean="0"/>
+              <a:rPr lang="en-US"/>
               <a:t>Click to edit Master title style</a:t>
             </a:r>
-            <a:endParaRPr lang="en-US"/>
           </a:p>
         </p:txBody>
       </p:sp>
@@ -1899,7 +5612,7 @@
           <a:p>
             <a:fld id="{5BCAD085-E8A6-8845-BD4E-CB4CCA059FC4}" type="datetimeFigureOut">
               <a:rPr lang="en-US" smtClean="0"/>
-              <a:t>1/27/13</a:t>
+              <a:t>7/7/2026</a:t>
             </a:fld>
             <a:endParaRPr lang="en-US"/>
           </a:p>
@@ -1941,7 +5654,7 @@
           <a:p>
             <a:fld id="{C1FF6DA9-008F-8B48-92A6-B652298478BF}" type="slidenum">
               <a:rPr lang="en-US" smtClean="0"/>
-              <a:t>‹#›</a:t>
+              <a:t>‹nº›</a:t>
             </a:fld>
             <a:endParaRPr lang="en-US"/>
           </a:p>
@@ -1994,7 +5707,7 @@
           <a:p>
             <a:fld id="{5BCAD085-E8A6-8845-BD4E-CB4CCA059FC4}" type="datetimeFigureOut">
               <a:rPr lang="en-US" smtClean="0"/>
-              <a:t>1/27/13</a:t>
+              <a:t>7/7/2026</a:t>
             </a:fld>
             <a:endParaRPr lang="en-US"/>
           </a:p>
@@ -2036,7 +5749,7 @@
           <a:p>
             <a:fld id="{C1FF6DA9-008F-8B48-92A6-B652298478BF}" type="slidenum">
               <a:rPr lang="en-US" smtClean="0"/>
-              <a:t>‹#›</a:t>
+              <a:t>‹nº›</a:t>
             </a:fld>
             <a:endParaRPr lang="en-US"/>
           </a:p>
@@ -2097,10 +5810,9 @@
           </a:lstStyle>
           <a:p>
             <a:r>
-              <a:rPr lang="en-US" smtClean="0"/>
+              <a:rPr lang="en-US"/>
               <a:t>Click to edit Master title style</a:t>
             </a:r>
-            <a:endParaRPr lang="en-US"/>
           </a:p>
         </p:txBody>
       </p:sp>
@@ -2154,38 +5866,37 @@
           <a:p>
             <a:pPr lvl="0"/>
             <a:r>
-              <a:rPr lang="en-US" smtClean="0"/>
+              <a:rPr lang="en-US"/>
               <a:t>Click to edit Master text styles</a:t>
             </a:r>
           </a:p>
           <a:p>
             <a:pPr lvl="1"/>
             <a:r>
-              <a:rPr lang="en-US" smtClean="0"/>
+              <a:rPr lang="en-US"/>
               <a:t>Second level</a:t>
             </a:r>
           </a:p>
           <a:p>
             <a:pPr lvl="2"/>
             <a:r>
-              <a:rPr lang="en-US" smtClean="0"/>
+              <a:rPr lang="en-US"/>
               <a:t>Third level</a:t>
             </a:r>
           </a:p>
           <a:p>
             <a:pPr lvl="3"/>
             <a:r>
-              <a:rPr lang="en-US" smtClean="0"/>
+              <a:rPr lang="en-US"/>
               <a:t>Fourth level</a:t>
             </a:r>
           </a:p>
           <a:p>
             <a:pPr lvl="4"/>
             <a:r>
-              <a:rPr lang="en-US" smtClean="0"/>
+              <a:rPr lang="en-US"/>
               <a:t>Fifth level</a:t>
             </a:r>
-            <a:endParaRPr lang="en-US"/>
           </a:p>
         </p:txBody>
       </p:sp>
@@ -2248,7 +5959,7 @@
           <a:p>
             <a:pPr lvl="0"/>
             <a:r>
-              <a:rPr lang="en-US" smtClean="0"/>
+              <a:rPr lang="en-US"/>
               <a:t>Click to edit Master text styles</a:t>
             </a:r>
           </a:p>
@@ -2271,7 +5982,7 @@
           <a:p>
             <a:fld id="{5BCAD085-E8A6-8845-BD4E-CB4CCA059FC4}" type="datetimeFigureOut">
               <a:rPr lang="en-US" smtClean="0"/>
-              <a:t>1/27/13</a:t>
+              <a:t>7/7/2026</a:t>
             </a:fld>
             <a:endParaRPr lang="en-US"/>
           </a:p>
@@ -2313,7 +6024,7 @@
           <a:p>
             <a:fld id="{C1FF6DA9-008F-8B48-92A6-B652298478BF}" type="slidenum">
               <a:rPr lang="en-US" smtClean="0"/>
-              <a:t>‹#›</a:t>
+              <a:t>‹nº›</a:t>
             </a:fld>
             <a:endParaRPr lang="en-US"/>
           </a:p>
@@ -2374,10 +6085,9 @@
           </a:lstStyle>
           <a:p>
             <a:r>
-              <a:rPr lang="en-US" smtClean="0"/>
+              <a:rPr lang="en-US"/>
               <a:t>Click to edit Master title style</a:t>
             </a:r>
-            <a:endParaRPr lang="en-US"/>
           </a:p>
         </p:txBody>
       </p:sp>
@@ -2501,7 +6211,7 @@
           <a:p>
             <a:pPr lvl="0"/>
             <a:r>
-              <a:rPr lang="en-US" smtClean="0"/>
+              <a:rPr lang="en-US"/>
               <a:t>Click to edit Master text styles</a:t>
             </a:r>
           </a:p>
@@ -2524,7 +6234,7 @@
           <a:p>
             <a:fld id="{5BCAD085-E8A6-8845-BD4E-CB4CCA059FC4}" type="datetimeFigureOut">
               <a:rPr lang="en-US" smtClean="0"/>
-              <a:t>1/27/13</a:t>
+              <a:t>7/7/2026</a:t>
             </a:fld>
             <a:endParaRPr lang="en-US"/>
           </a:p>
@@ -2566,7 +6276,7 @@
           <a:p>
             <a:fld id="{C1FF6DA9-008F-8B48-92A6-B652298478BF}" type="slidenum">
               <a:rPr lang="en-US" smtClean="0"/>
-              <a:t>‹#›</a:t>
+              <a:t>‹nº›</a:t>
             </a:fld>
             <a:endParaRPr lang="en-US"/>
           </a:p>
@@ -2633,10 +6343,9 @@
           <a:lstStyle/>
           <a:p>
             <a:r>
-              <a:rPr lang="en-US" smtClean="0"/>
+              <a:rPr lang="en-US"/>
               <a:t>Click to edit Master title style</a:t>
             </a:r>
-            <a:endParaRPr lang="en-US"/>
           </a:p>
         </p:txBody>
       </p:sp>
@@ -2667,38 +6376,37 @@
           <a:p>
             <a:pPr lvl="0"/>
             <a:r>
-              <a:rPr lang="en-US" smtClean="0"/>
+              <a:rPr lang="en-US"/>
               <a:t>Click to edit Master text styles</a:t>
             </a:r>
           </a:p>
           <a:p>
             <a:pPr lvl="1"/>
             <a:r>
-              <a:rPr lang="en-US" smtClean="0"/>
+              <a:rPr lang="en-US"/>
               <a:t>Second level</a:t>
             </a:r>
           </a:p>
           <a:p>
             <a:pPr lvl="2"/>
             <a:r>
-              <a:rPr lang="en-US" smtClean="0"/>
+              <a:rPr lang="en-US"/>
               <a:t>Third level</a:t>
             </a:r>
           </a:p>
           <a:p>
             <a:pPr lvl="3"/>
             <a:r>
-              <a:rPr lang="en-US" smtClean="0"/>
+              <a:rPr lang="en-US"/>
               <a:t>Fourth level</a:t>
             </a:r>
           </a:p>
           <a:p>
             <a:pPr lvl="4"/>
             <a:r>
-              <a:rPr lang="en-US" smtClean="0"/>
+              <a:rPr lang="en-US"/>
               <a:t>Fifth level</a:t>
             </a:r>
-            <a:endParaRPr lang="en-US"/>
           </a:p>
         </p:txBody>
       </p:sp>
@@ -2737,7 +6445,7 @@
           <a:p>
             <a:fld id="{5BCAD085-E8A6-8845-BD4E-CB4CCA059FC4}" type="datetimeFigureOut">
               <a:rPr lang="en-US" smtClean="0"/>
-              <a:t>1/27/13</a:t>
+              <a:t>7/7/2026</a:t>
             </a:fld>
             <a:endParaRPr lang="en-US"/>
           </a:p>
@@ -2815,7 +6523,7 @@
           <a:p>
             <a:fld id="{C1FF6DA9-008F-8B48-92A6-B652298478BF}" type="slidenum">
               <a:rPr lang="en-US" smtClean="0"/>
-              <a:t>‹#›</a:t>
+              <a:t>‹nº›</a:t>
             </a:fld>
             <a:endParaRPr lang="en-US"/>
           </a:p>
@@ -3096,7 +6804,7 @@
 </file>
 
 <file path=ppt/slides/slide1.xml><?xml version="1.0" encoding="utf-8"?>
-<p:sld xmlns:a="http://schemas.openxmlformats.org/drawingml/2006/main" xmlns:p="http://schemas.openxmlformats.org/presentationml/2006/main" xmlns:r="http://schemas.openxmlformats.org/officeDocument/2006/relationships">
+<p:sld xmlns:a="http://schemas.openxmlformats.org/drawingml/2006/main" xmlns:r="http://schemas.openxmlformats.org/officeDocument/2006/relationships" xmlns:p="http://schemas.openxmlformats.org/presentationml/2006/main">
   <p:cSld>
     <p:spTree>
       <p:nvGrpSpPr>
@@ -3104,7 +6812,14 @@
         <p:cNvGrpSpPr/>
         <p:nvPr/>
       </p:nvGrpSpPr>
-      <p:grpSpPr/>
+      <p:grpSpPr>
+        <a:xfrm>
+          <a:off x="0" y="0"/>
+          <a:ext cx="0" cy="0"/>
+          <a:chOff x="0" y="0"/>
+          <a:chExt cx="0" cy="0"/>
+        </a:xfrm>
+      </p:grpSpPr>
       <p:sp>
         <p:nvSpPr>
           <p:cNvPr id="2" name="Rectangle 1"/>
@@ -3146,6 +6861,7 @@
           <a:lstStyle/>
           <a:p>
             <a:pPr algn="ctr"/>
+            <a:endParaRPr/>
           </a:p>
         </p:txBody>
       </p:sp>
@@ -3190,6 +6906,7 @@
           <a:lstStyle/>
           <a:p>
             <a:pPr algn="ctr"/>
+            <a:endParaRPr/>
           </a:p>
         </p:txBody>
       </p:sp>
@@ -3202,7 +6919,7 @@
         <p:spPr>
           <a:xfrm>
             <a:off x="822960" y="502920"/>
-            <a:ext cx="10515600" cy="731520"/>
+            <a:ext cx="10515600" cy="548868"/>
           </a:xfrm>
           <a:prstGeom prst="rect">
             <a:avLst/>
@@ -3224,13 +6941,13 @@
               </a:spcAft>
             </a:pPr>
             <a:r>
-              <a:rPr sz="1500" b="1">
+              <a:rPr lang="pt-BR" sz="1500" b="1" dirty="0">
                 <a:solidFill>
                   <a:srgbClr val="FFFFFF"/>
                 </a:solidFill>
                 <a:latin typeface="Calibri"/>
               </a:rPr>
-              <a:t>[UNIVERSIDADE / INSTITUIÇÃO]</a:t>
+              <a:t>INSTITUTO FEDERAL DE EDUCAÇÃO, CIÊNCIA E TECNOLOGIA – IFMA CAMPUS CAXIAS</a:t>
             </a:r>
           </a:p>
           <a:p>
@@ -3243,13 +6960,13 @@
               </a:spcAft>
             </a:pPr>
             <a:r>
-              <a:rPr sz="1300" b="0">
+              <a:rPr lang="pt-BR" sz="1300" b="0" dirty="0">
                 <a:solidFill>
                   <a:srgbClr val="C9CFD6"/>
                 </a:solidFill>
                 <a:latin typeface="Calibri"/>
               </a:rPr>
-              <a:t>Curso de Ciência da Computação</a:t>
+              <a:t>Curso de Bacharelado em Ciência da Computação</a:t>
             </a:r>
           </a:p>
         </p:txBody>
@@ -3285,13 +7002,49 @@
               </a:spcAft>
             </a:pPr>
             <a:r>
-              <a:rPr sz="3800" b="1">
+              <a:rPr sz="3800" b="1" dirty="0">
                 <a:solidFill>
                   <a:srgbClr val="FFFFFF"/>
                 </a:solidFill>
                 <a:latin typeface="Calibri"/>
               </a:rPr>
-              <a:t>Sistema de Recomendação de Produtos para</a:t>
+              <a:t>Sistema de </a:t>
+            </a:r>
+            <a:r>
+              <a:rPr sz="3800" b="1" dirty="0" err="1">
+                <a:solidFill>
+                  <a:srgbClr val="FFFFFF"/>
+                </a:solidFill>
+                <a:latin typeface="Calibri"/>
+              </a:rPr>
+              <a:t>Recomendação</a:t>
+            </a:r>
+            <a:r>
+              <a:rPr sz="3800" b="1" dirty="0">
+                <a:solidFill>
+                  <a:srgbClr val="FFFFFF"/>
+                </a:solidFill>
+                <a:latin typeface="Calibri"/>
+              </a:rPr>
+              <a:t> de </a:t>
+            </a:r>
+            <a:r>
+              <a:rPr sz="3800" b="1" dirty="0" err="1">
+                <a:solidFill>
+                  <a:srgbClr val="FFFFFF"/>
+                </a:solidFill>
+                <a:latin typeface="Calibri"/>
+              </a:rPr>
+              <a:t>Produtos</a:t>
+            </a:r>
+            <a:r>
+              <a:rPr sz="3800" b="1" dirty="0">
+                <a:solidFill>
+                  <a:srgbClr val="FFFFFF"/>
+                </a:solidFill>
+                <a:latin typeface="Calibri"/>
+              </a:rPr>
+              <a:t> para</a:t>
             </a:r>
           </a:p>
           <a:p>
@@ -3304,14 +7057,74 @@
               </a:spcAft>
             </a:pPr>
             <a:r>
-              <a:rPr sz="3800" b="1">
+              <a:rPr sz="3800" b="1" dirty="0" err="1">
                 <a:solidFill>
                   <a:srgbClr val="FFFFFF"/>
                 </a:solidFill>
                 <a:latin typeface="Calibri"/>
               </a:rPr>
-              <a:t>Distribuição B2B Utilizando Regras de Associação</a:t>
-            </a:r>
+              <a:t>Distribuição</a:t>
+            </a:r>
+            <a:r>
+              <a:rPr sz="3800" b="1" dirty="0">
+                <a:solidFill>
+                  <a:srgbClr val="FFFFFF"/>
+                </a:solidFill>
+                <a:latin typeface="Calibri"/>
+              </a:rPr>
+              <a:t> B2B </a:t>
+            </a:r>
+            <a:r>
+              <a:rPr sz="3800" b="1" dirty="0" err="1">
+                <a:solidFill>
+                  <a:srgbClr val="FFFFFF"/>
+                </a:solidFill>
+                <a:latin typeface="Calibri"/>
+              </a:rPr>
+              <a:t>Utilizando</a:t>
+            </a:r>
+            <a:r>
+              <a:rPr sz="3800" b="1" dirty="0">
+                <a:solidFill>
+                  <a:srgbClr val="FFFFFF"/>
+                </a:solidFill>
+                <a:latin typeface="Calibri"/>
+              </a:rPr>
+              <a:t> </a:t>
+            </a:r>
+            <a:r>
+              <a:rPr sz="3800" b="1" dirty="0" err="1">
+                <a:solidFill>
+                  <a:srgbClr val="FFFFFF"/>
+                </a:solidFill>
+                <a:latin typeface="Calibri"/>
+              </a:rPr>
+              <a:t>Regras</a:t>
+            </a:r>
+            <a:r>
+              <a:rPr sz="3800" b="1" dirty="0">
+                <a:solidFill>
+                  <a:srgbClr val="FFFFFF"/>
+                </a:solidFill>
+                <a:latin typeface="Calibri"/>
+              </a:rPr>
+              <a:t> de </a:t>
+            </a:r>
+            <a:r>
+              <a:rPr sz="3800" b="1" dirty="0" err="1">
+                <a:solidFill>
+                  <a:srgbClr val="FFFFFF"/>
+                </a:solidFill>
+                <a:latin typeface="Calibri"/>
+              </a:rPr>
+              <a:t>Associação</a:t>
+            </a:r>
+            <a:endParaRPr sz="3800" b="1" dirty="0">
+              <a:solidFill>
+                <a:srgbClr val="FFFFFF"/>
+              </a:solidFill>
+              <a:latin typeface="Calibri"/>
+            </a:endParaRPr>
           </a:p>
           <a:p>
             <a:pPr algn="l">
@@ -3323,13 +7136,40 @@
               </a:spcAft>
             </a:pPr>
             <a:r>
-              <a:rPr sz="2200" b="1">
+              <a:rPr sz="2200" b="1" dirty="0" err="1">
                 <a:solidFill>
                   <a:srgbClr val="C8A04B"/>
                 </a:solidFill>
                 <a:latin typeface="Calibri"/>
               </a:rPr>
-              <a:t>Estudo de Caso na Quasar Barber</a:t>
+              <a:t>Estudo</a:t>
+            </a:r>
+            <a:r>
+              <a:rPr sz="2200" b="1" dirty="0">
+                <a:solidFill>
+                  <a:srgbClr val="C8A04B"/>
+                </a:solidFill>
+                <a:latin typeface="Calibri"/>
+              </a:rPr>
+              <a:t> de Caso </a:t>
+            </a:r>
+            <a:r>
+              <a:rPr sz="2200" b="1" dirty="0" err="1">
+                <a:solidFill>
+                  <a:srgbClr val="C8A04B"/>
+                </a:solidFill>
+                <a:latin typeface="Calibri"/>
+              </a:rPr>
+              <a:t>na</a:t>
+            </a:r>
+            <a:r>
+              <a:rPr sz="2200" b="1" dirty="0">
+                <a:solidFill>
+                  <a:srgbClr val="C8A04B"/>
+                </a:solidFill>
+                <a:latin typeface="Calibri"/>
+              </a:rPr>
+              <a:t> Quasar Barber</a:t>
             </a:r>
           </a:p>
         </p:txBody>
@@ -3343,7 +7183,7 @@
         <p:spPr>
           <a:xfrm>
             <a:off x="822960" y="5349240"/>
-            <a:ext cx="10515600" cy="1188720"/>
+            <a:ext cx="10515600" cy="933589"/>
           </a:xfrm>
           <a:prstGeom prst="rect">
             <a:avLst/>
@@ -3365,7 +7205,7 @@
               </a:spcAft>
             </a:pPr>
             <a:r>
-              <a:rPr sz="2000" b="1">
+              <a:rPr sz="2000" b="1" dirty="0">
                 <a:solidFill>
                   <a:srgbClr val="FFFFFF"/>
                 </a:solidFill>
@@ -3373,6 +7213,21 @@
               </a:rPr>
               <a:t>Felipe Pereira</a:t>
             </a:r>
+            <a:r>
+              <a:rPr lang="pt-BR" sz="2000" b="1" dirty="0">
+                <a:solidFill>
+                  <a:srgbClr val="FFFFFF"/>
+                </a:solidFill>
+                <a:latin typeface="Calibri"/>
+              </a:rPr>
+              <a:t> Ferreira</a:t>
+            </a:r>
+            <a:endParaRPr sz="2000" b="1" dirty="0">
+              <a:solidFill>
+                <a:srgbClr val="FFFFFF"/>
+              </a:solidFill>
+              <a:latin typeface="Calibri"/>
+            </a:endParaRPr>
           </a:p>
           <a:p>
             <a:pPr algn="l">
@@ -3384,14 +7239,92 @@
               </a:spcAft>
             </a:pPr>
             <a:r>
-              <a:rPr sz="1500" b="0">
+              <a:rPr sz="1500" b="0" dirty="0" err="1">
                 <a:solidFill>
                   <a:srgbClr val="C9CFD6"/>
                 </a:solidFill>
                 <a:latin typeface="Calibri"/>
               </a:rPr>
-              <a:t>Trabalho de Conclusão de Curso  —  Ciência da Computação</a:t>
-            </a:r>
+              <a:t>Trabalho</a:t>
+            </a:r>
+            <a:r>
+              <a:rPr sz="1500" b="0" dirty="0">
+                <a:solidFill>
+                  <a:srgbClr val="C9CFD6"/>
+                </a:solidFill>
+                <a:latin typeface="Calibri"/>
+              </a:rPr>
+              <a:t> de </a:t>
+            </a:r>
+            <a:r>
+              <a:rPr sz="1500" b="0" dirty="0" err="1">
+                <a:solidFill>
+                  <a:srgbClr val="C9CFD6"/>
+                </a:solidFill>
+                <a:latin typeface="Calibri"/>
+              </a:rPr>
+              <a:t>Conclusão</a:t>
+            </a:r>
+            <a:r>
+              <a:rPr sz="1500" b="0" dirty="0">
+                <a:solidFill>
+                  <a:srgbClr val="C9CFD6"/>
+                </a:solidFill>
+                <a:latin typeface="Calibri"/>
+              </a:rPr>
+              <a:t> de </a:t>
+            </a:r>
+            <a:r>
+              <a:rPr sz="1500" b="0" dirty="0" err="1">
+                <a:solidFill>
+                  <a:srgbClr val="C9CFD6"/>
+                </a:solidFill>
+                <a:latin typeface="Calibri"/>
+              </a:rPr>
+              <a:t>Curso</a:t>
+            </a:r>
+            <a:r>
+              <a:rPr sz="1500" b="0" dirty="0">
+                <a:solidFill>
+                  <a:srgbClr val="C9CFD6"/>
+                </a:solidFill>
+                <a:latin typeface="Calibri"/>
+              </a:rPr>
+              <a:t>  —  </a:t>
+            </a:r>
+            <a:r>
+              <a:rPr sz="1500" b="0" dirty="0" err="1">
+                <a:solidFill>
+                  <a:srgbClr val="C9CFD6"/>
+                </a:solidFill>
+                <a:latin typeface="Calibri"/>
+              </a:rPr>
+              <a:t>Ciência</a:t>
+            </a:r>
+            <a:r>
+              <a:rPr sz="1500" b="0" dirty="0">
+                <a:solidFill>
+                  <a:srgbClr val="C9CFD6"/>
+                </a:solidFill>
+                <a:latin typeface="Calibri"/>
+              </a:rPr>
+              <a:t> da </a:t>
+            </a:r>
+            <a:r>
+              <a:rPr sz="1500" b="0" dirty="0" err="1">
+                <a:solidFill>
+                  <a:srgbClr val="C9CFD6"/>
+                </a:solidFill>
+                <a:latin typeface="Calibri"/>
+              </a:rPr>
+              <a:t>Computação</a:t>
+            </a:r>
+            <a:endParaRPr sz="1500" b="0" dirty="0">
+              <a:solidFill>
+                <a:srgbClr val="C9CFD6"/>
+              </a:solidFill>
+              <a:latin typeface="Calibri"/>
+            </a:endParaRPr>
           </a:p>
           <a:p>
             <a:pPr algn="l">
@@ -3403,17 +7336,92 @@
               </a:spcAft>
             </a:pPr>
             <a:r>
-              <a:rPr sz="1300" b="0">
+              <a:rPr sz="1300" b="0" dirty="0" err="1">
                 <a:solidFill>
                   <a:srgbClr val="5A6672"/>
                 </a:solidFill>
                 <a:latin typeface="Calibri"/>
               </a:rPr>
-              <a:t>Orientador(a): [Nome]   |   Codó-MA, 2026</a:t>
-            </a:r>
-          </a:p>
-        </p:txBody>
-      </p:sp>
+              <a:t>Orientador</a:t>
+            </a:r>
+            <a:r>
+              <a:rPr sz="1300" b="0" dirty="0">
+                <a:solidFill>
+                  <a:srgbClr val="5A6672"/>
+                </a:solidFill>
+                <a:latin typeface="Calibri"/>
+              </a:rPr>
+              <a:t>(a): </a:t>
+            </a:r>
+            <a:r>
+              <a:rPr lang="pt-BR" sz="1300" dirty="0">
+                <a:solidFill>
+                  <a:srgbClr val="5A6672"/>
+                </a:solidFill>
+                <a:latin typeface="Calibri"/>
+              </a:rPr>
+              <a:t>François Fernandes Ribeiro Barbosa</a:t>
+            </a:r>
+            <a:r>
+              <a:rPr sz="1300" b="0" dirty="0">
+                <a:solidFill>
+                  <a:srgbClr val="5A6672"/>
+                </a:solidFill>
+                <a:latin typeface="Calibri"/>
+              </a:rPr>
+              <a:t>   |   </a:t>
+            </a:r>
+            <a:r>
+              <a:rPr lang="pt-BR" sz="1300" b="0" dirty="0">
+                <a:solidFill>
+                  <a:srgbClr val="5A6672"/>
+                </a:solidFill>
+                <a:latin typeface="Calibri"/>
+              </a:rPr>
+              <a:t>Caxias - MA</a:t>
+            </a:r>
+            <a:r>
+              <a:rPr sz="1300" b="0" dirty="0">
+                <a:solidFill>
+                  <a:srgbClr val="5A6672"/>
+                </a:solidFill>
+                <a:latin typeface="Calibri"/>
+              </a:rPr>
+              <a:t>, 2026</a:t>
+            </a:r>
+          </a:p>
+        </p:txBody>
+      </p:sp>
+      <p:pic>
+        <p:nvPicPr>
+          <p:cNvPr id="8" name="Imagem 7">
+            <a:extLst>
+              <a:ext uri="{FF2B5EF4-FFF2-40B4-BE49-F238E27FC236}">
+                <a16:creationId xmlns:a16="http://schemas.microsoft.com/office/drawing/2014/main" id="{4756C8BB-1CA9-40B5-A5CC-3B59426AB61B}"/>
+              </a:ext>
+            </a:extLst>
+          </p:cNvPr>
+          <p:cNvPicPr>
+            <a:picLocks noChangeAspect="1"/>
+          </p:cNvPicPr>
+          <p:nvPr/>
+        </p:nvPicPr>
+        <p:blipFill>
+          <a:blip r:embed="rId3"/>
+          <a:stretch>
+            <a:fillRect/>
+          </a:stretch>
+        </p:blipFill>
+        <p:spPr>
+          <a:xfrm>
+            <a:off x="9159790" y="428738"/>
+            <a:ext cx="2675676" cy="623050"/>
+          </a:xfrm>
+          <a:prstGeom prst="rect">
+            <a:avLst/>
+          </a:prstGeom>
+        </p:spPr>
+      </p:pic>
     </p:spTree>
   </p:cSld>
   <p:clrMapOvr>
@@ -3423,7 +7431,7 @@
 </file>
 
 <file path=ppt/slides/slide10.xml><?xml version="1.0" encoding="utf-8"?>
-<p:sld xmlns:a="http://schemas.openxmlformats.org/drawingml/2006/main" xmlns:p="http://schemas.openxmlformats.org/presentationml/2006/main" xmlns:r="http://schemas.openxmlformats.org/officeDocument/2006/relationships">
+<p:sld xmlns:a="http://schemas.openxmlformats.org/drawingml/2006/main" xmlns:r="http://schemas.openxmlformats.org/officeDocument/2006/relationships" xmlns:p="http://schemas.openxmlformats.org/presentationml/2006/main">
   <p:cSld>
     <p:spTree>
       <p:nvGrpSpPr>
@@ -3431,7 +7439,14 @@
         <p:cNvGrpSpPr/>
         <p:nvPr/>
       </p:nvGrpSpPr>
-      <p:grpSpPr/>
+      <p:grpSpPr>
+        <a:xfrm>
+          <a:off x="0" y="0"/>
+          <a:ext cx="0" cy="0"/>
+          <a:chOff x="0" y="0"/>
+          <a:chExt cx="0" cy="0"/>
+        </a:xfrm>
+      </p:grpSpPr>
       <p:sp>
         <p:nvSpPr>
           <p:cNvPr id="2" name="Rectangle 1"/>
@@ -3473,6 +7488,7 @@
           <a:lstStyle/>
           <a:p>
             <a:pPr algn="ctr"/>
+            <a:endParaRPr/>
           </a:p>
         </p:txBody>
       </p:sp>
@@ -3517,6 +7533,7 @@
           <a:lstStyle/>
           <a:p>
             <a:pPr algn="ctr"/>
+            <a:endParaRPr/>
           </a:p>
         </p:txBody>
       </p:sp>
@@ -3645,6 +7662,7 @@
           <a:lstStyle/>
           <a:p>
             <a:pPr algn="ctr"/>
+            <a:endParaRPr/>
           </a:p>
         </p:txBody>
       </p:sp>
@@ -3741,7 +7759,7 @@
           <p:nvPr/>
         </p:nvPicPr>
         <p:blipFill>
-          <a:blip r:embed="rId2"/>
+          <a:blip r:embed="rId3"/>
           <a:stretch>
             <a:fillRect/>
           </a:stretch>
@@ -3765,7 +7783,7 @@
 </file>
 
 <file path=ppt/slides/slide11.xml><?xml version="1.0" encoding="utf-8"?>
-<p:sld xmlns:a="http://schemas.openxmlformats.org/drawingml/2006/main" xmlns:p="http://schemas.openxmlformats.org/presentationml/2006/main" xmlns:r="http://schemas.openxmlformats.org/officeDocument/2006/relationships">
+<p:sld xmlns:a="http://schemas.openxmlformats.org/drawingml/2006/main" xmlns:r="http://schemas.openxmlformats.org/officeDocument/2006/relationships" xmlns:p="http://schemas.openxmlformats.org/presentationml/2006/main">
   <p:cSld>
     <p:spTree>
       <p:nvGrpSpPr>
@@ -3773,7 +7791,14 @@
         <p:cNvGrpSpPr/>
         <p:nvPr/>
       </p:nvGrpSpPr>
-      <p:grpSpPr/>
+      <p:grpSpPr>
+        <a:xfrm>
+          <a:off x="0" y="0"/>
+          <a:ext cx="0" cy="0"/>
+          <a:chOff x="0" y="0"/>
+          <a:chExt cx="0" cy="0"/>
+        </a:xfrm>
+      </p:grpSpPr>
       <p:sp>
         <p:nvSpPr>
           <p:cNvPr id="2" name="Rectangle 1"/>
@@ -3815,6 +7840,7 @@
           <a:lstStyle/>
           <a:p>
             <a:pPr algn="ctr"/>
+            <a:endParaRPr/>
           </a:p>
         </p:txBody>
       </p:sp>
@@ -3859,6 +7885,7 @@
           <a:lstStyle/>
           <a:p>
             <a:pPr algn="ctr"/>
+            <a:endParaRPr/>
           </a:p>
         </p:txBody>
       </p:sp>
@@ -3987,6 +8014,7 @@
           <a:lstStyle/>
           <a:p>
             <a:pPr algn="ctr"/>
+            <a:endParaRPr/>
           </a:p>
         </p:txBody>
       </p:sp>
@@ -4309,7 +8337,7 @@
 </file>
 
 <file path=ppt/slides/slide12.xml><?xml version="1.0" encoding="utf-8"?>
-<p:sld xmlns:a="http://schemas.openxmlformats.org/drawingml/2006/main" xmlns:p="http://schemas.openxmlformats.org/presentationml/2006/main" xmlns:r="http://schemas.openxmlformats.org/officeDocument/2006/relationships">
+<p:sld xmlns:a="http://schemas.openxmlformats.org/drawingml/2006/main" xmlns:r="http://schemas.openxmlformats.org/officeDocument/2006/relationships" xmlns:p="http://schemas.openxmlformats.org/presentationml/2006/main">
   <p:cSld>
     <p:spTree>
       <p:nvGrpSpPr>
@@ -4317,7 +8345,14 @@
         <p:cNvGrpSpPr/>
         <p:nvPr/>
       </p:nvGrpSpPr>
-      <p:grpSpPr/>
+      <p:grpSpPr>
+        <a:xfrm>
+          <a:off x="0" y="0"/>
+          <a:ext cx="0" cy="0"/>
+          <a:chOff x="0" y="0"/>
+          <a:chExt cx="0" cy="0"/>
+        </a:xfrm>
+      </p:grpSpPr>
       <p:sp>
         <p:nvSpPr>
           <p:cNvPr id="2" name="Rectangle 1"/>
@@ -4359,6 +8394,7 @@
           <a:lstStyle/>
           <a:p>
             <a:pPr algn="ctr"/>
+            <a:endParaRPr/>
           </a:p>
         </p:txBody>
       </p:sp>
@@ -4403,6 +8439,7 @@
           <a:lstStyle/>
           <a:p>
             <a:pPr algn="ctr"/>
+            <a:endParaRPr/>
           </a:p>
         </p:txBody>
       </p:sp>
@@ -4531,6 +8568,7 @@
           <a:lstStyle/>
           <a:p>
             <a:pPr algn="ctr"/>
+            <a:endParaRPr/>
           </a:p>
         </p:txBody>
       </p:sp>
@@ -4679,388 +8717,6 @@
           </a:p>
         </p:txBody>
       </p:sp>
-      <p:graphicFrame>
-        <p:nvGraphicFramePr>
-          <p:cNvPr id="10" name="Table 9"/>
-          <p:cNvGraphicFramePr>
-            <a:graphicFrameLocks noGrp="1"/>
-          </p:cNvGraphicFramePr>
-          <p:nvPr/>
-        </p:nvGraphicFramePr>
-        <p:xfrm>
-          <a:off x="640080" y="2377440"/>
-          <a:ext cx="7680960" cy="2560320"/>
-        </p:xfrm>
-        <a:graphic>
-          <a:graphicData uri="http://schemas.openxmlformats.org/drawingml/2006/table">
-            <a:tbl>
-              <a:tblPr firstRow="1" bandRow="1">
-                <a:tableStyleId>{5C22544A-7EE6-4342-B048-85BDC9FD1C3A}</a:tableStyleId>
-              </a:tblPr>
-              <a:tblGrid>
-                <a:gridCol w="5303520"/>
-                <a:gridCol w="1188720"/>
-                <a:gridCol w="1188720"/>
-              </a:tblGrid>
-              <a:tr h="512064">
-                <a:tc>
-                  <a:txBody>
-                    <a:bodyPr/>
-                    <a:lstStyle/>
-                    <a:p>
-                      <a:pPr algn="l"/>
-                      <a:r>
-                        <a:rPr sz="1300" b="1">
-                          <a:solidFill>
-                            <a:srgbClr val="FFFFFF"/>
-                          </a:solidFill>
-                          <a:latin typeface="Calibri"/>
-                        </a:rPr>
-                        <a:t>Antecedente ⇒ Consequente</a:t>
-                      </a:r>
-                    </a:p>
-                  </a:txBody>
-                  <a:tcPr anchor="ctr" marT="25400" marB="25400">
-                    <a:solidFill>
-                      <a:srgbClr val="0F1B2D"/>
-                    </a:solidFill>
-                  </a:tcPr>
-                </a:tc>
-                <a:tc>
-                  <a:txBody>
-                    <a:bodyPr/>
-                    <a:lstStyle/>
-                    <a:p>
-                      <a:pPr algn="ctr"/>
-                      <a:r>
-                        <a:rPr sz="1300" b="1">
-                          <a:solidFill>
-                            <a:srgbClr val="FFFFFF"/>
-                          </a:solidFill>
-                          <a:latin typeface="Calibri"/>
-                        </a:rPr>
-                        <a:t>Conf.</a:t>
-                      </a:r>
-                    </a:p>
-                  </a:txBody>
-                  <a:tcPr anchor="ctr" marT="25400" marB="25400">
-                    <a:solidFill>
-                      <a:srgbClr val="0F1B2D"/>
-                    </a:solidFill>
-                  </a:tcPr>
-                </a:tc>
-                <a:tc>
-                  <a:txBody>
-                    <a:bodyPr/>
-                    <a:lstStyle/>
-                    <a:p>
-                      <a:pPr algn="ctr"/>
-                      <a:r>
-                        <a:rPr sz="1300" b="1">
-                          <a:solidFill>
-                            <a:srgbClr val="FFFFFF"/>
-                          </a:solidFill>
-                          <a:latin typeface="Calibri"/>
-                        </a:rPr>
-                        <a:t>Lift</a:t>
-                      </a:r>
-                    </a:p>
-                  </a:txBody>
-                  <a:tcPr anchor="ctr" marT="25400" marB="25400">
-                    <a:solidFill>
-                      <a:srgbClr val="0F1B2D"/>
-                    </a:solidFill>
-                  </a:tcPr>
-                </a:tc>
-              </a:tr>
-              <a:tr h="512064">
-                <a:tc>
-                  <a:txBody>
-                    <a:bodyPr/>
-                    <a:lstStyle/>
-                    <a:p>
-                      <a:pPr algn="l"/>
-                      <a:r>
-                        <a:rPr sz="1400" b="0">
-                          <a:solidFill>
-                            <a:srgbClr val="1A232E"/>
-                          </a:solidFill>
-                          <a:latin typeface="Calibri"/>
-                        </a:rPr>
-                        <a:t>After Shave (QOD) ⇒ Café Verde Shampoo</a:t>
-                      </a:r>
-                    </a:p>
-                  </a:txBody>
-                  <a:tcPr anchor="ctr" marT="25400" marB="25400">
-                    <a:solidFill>
-                      <a:srgbClr val="F4F1EA"/>
-                    </a:solidFill>
-                  </a:tcPr>
-                </a:tc>
-                <a:tc>
-                  <a:txBody>
-                    <a:bodyPr/>
-                    <a:lstStyle/>
-                    <a:p>
-                      <a:pPr algn="ctr"/>
-                      <a:r>
-                        <a:rPr sz="1400" b="0">
-                          <a:solidFill>
-                            <a:srgbClr val="1A232E"/>
-                          </a:solidFill>
-                          <a:latin typeface="Calibri"/>
-                        </a:rPr>
-                        <a:t>1,00</a:t>
-                      </a:r>
-                    </a:p>
-                  </a:txBody>
-                  <a:tcPr anchor="ctr" marT="25400" marB="25400">
-                    <a:solidFill>
-                      <a:srgbClr val="F4F1EA"/>
-                    </a:solidFill>
-                  </a:tcPr>
-                </a:tc>
-                <a:tc>
-                  <a:txBody>
-                    <a:bodyPr/>
-                    <a:lstStyle/>
-                    <a:p>
-                      <a:pPr algn="ctr"/>
-                      <a:r>
-                        <a:rPr sz="1400" b="0">
-                          <a:solidFill>
-                            <a:srgbClr val="1A232E"/>
-                          </a:solidFill>
-                          <a:latin typeface="Calibri"/>
-                        </a:rPr>
-                        <a:t>30,0</a:t>
-                      </a:r>
-                    </a:p>
-                  </a:txBody>
-                  <a:tcPr anchor="ctr" marT="25400" marB="25400">
-                    <a:solidFill>
-                      <a:srgbClr val="F4F1EA"/>
-                    </a:solidFill>
-                  </a:tcPr>
-                </a:tc>
-              </a:tr>
-              <a:tr h="512064">
-                <a:tc>
-                  <a:txBody>
-                    <a:bodyPr/>
-                    <a:lstStyle/>
-                    <a:p>
-                      <a:pPr algn="l"/>
-                      <a:r>
-                        <a:rPr sz="1400" b="0">
-                          <a:solidFill>
-                            <a:srgbClr val="1A232E"/>
-                          </a:solidFill>
-                          <a:latin typeface="Calibri"/>
-                        </a:rPr>
-                        <a:t>Silver Boost (QOD) ⇒ Bálsamo Fortalecedor</a:t>
-                      </a:r>
-                    </a:p>
-                  </a:txBody>
-                  <a:tcPr anchor="ctr" marT="25400" marB="25400">
-                    <a:solidFill>
-                      <a:srgbClr val="FFFFFF"/>
-                    </a:solidFill>
-                  </a:tcPr>
-                </a:tc>
-                <a:tc>
-                  <a:txBody>
-                    <a:bodyPr/>
-                    <a:lstStyle/>
-                    <a:p>
-                      <a:pPr algn="ctr"/>
-                      <a:r>
-                        <a:rPr sz="1400" b="0">
-                          <a:solidFill>
-                            <a:srgbClr val="1A232E"/>
-                          </a:solidFill>
-                          <a:latin typeface="Calibri"/>
-                        </a:rPr>
-                        <a:t>1,00</a:t>
-                      </a:r>
-                    </a:p>
-                  </a:txBody>
-                  <a:tcPr anchor="ctr" marT="25400" marB="25400">
-                    <a:solidFill>
-                      <a:srgbClr val="FFFFFF"/>
-                    </a:solidFill>
-                  </a:tcPr>
-                </a:tc>
-                <a:tc>
-                  <a:txBody>
-                    <a:bodyPr/>
-                    <a:lstStyle/>
-                    <a:p>
-                      <a:pPr algn="ctr"/>
-                      <a:r>
-                        <a:rPr sz="1400" b="0">
-                          <a:solidFill>
-                            <a:srgbClr val="1A232E"/>
-                          </a:solidFill>
-                          <a:latin typeface="Calibri"/>
-                        </a:rPr>
-                        <a:t>30,0</a:t>
-                      </a:r>
-                    </a:p>
-                  </a:txBody>
-                  <a:tcPr anchor="ctr" marT="25400" marB="25400">
-                    <a:solidFill>
-                      <a:srgbClr val="FFFFFF"/>
-                    </a:solidFill>
-                  </a:tcPr>
-                </a:tc>
-              </a:tr>
-              <a:tr h="512064">
-                <a:tc>
-                  <a:txBody>
-                    <a:bodyPr/>
-                    <a:lstStyle/>
-                    <a:p>
-                      <a:pPr algn="l"/>
-                      <a:r>
-                        <a:rPr sz="1400" b="0">
-                          <a:solidFill>
-                            <a:srgbClr val="1A232E"/>
-                          </a:solidFill>
-                          <a:latin typeface="Calibri"/>
-                        </a:rPr>
-                        <a:t>Shampoo ⇒ Óleo Barba (Fox for Men)</a:t>
-                      </a:r>
-                    </a:p>
-                  </a:txBody>
-                  <a:tcPr anchor="ctr" marT="25400" marB="25400">
-                    <a:solidFill>
-                      <a:srgbClr val="F4F1EA"/>
-                    </a:solidFill>
-                  </a:tcPr>
-                </a:tc>
-                <a:tc>
-                  <a:txBody>
-                    <a:bodyPr/>
-                    <a:lstStyle/>
-                    <a:p>
-                      <a:pPr algn="ctr"/>
-                      <a:r>
-                        <a:rPr sz="1400" b="0">
-                          <a:solidFill>
-                            <a:srgbClr val="1A232E"/>
-                          </a:solidFill>
-                          <a:latin typeface="Calibri"/>
-                        </a:rPr>
-                        <a:t>1,00</a:t>
-                      </a:r>
-                    </a:p>
-                  </a:txBody>
-                  <a:tcPr anchor="ctr" marT="25400" marB="25400">
-                    <a:solidFill>
-                      <a:srgbClr val="F4F1EA"/>
-                    </a:solidFill>
-                  </a:tcPr>
-                </a:tc>
-                <a:tc>
-                  <a:txBody>
-                    <a:bodyPr/>
-                    <a:lstStyle/>
-                    <a:p>
-                      <a:pPr algn="ctr"/>
-                      <a:r>
-                        <a:rPr sz="1400" b="0">
-                          <a:solidFill>
-                            <a:srgbClr val="1A232E"/>
-                          </a:solidFill>
-                          <a:latin typeface="Calibri"/>
-                        </a:rPr>
-                        <a:t>15,0</a:t>
-                      </a:r>
-                    </a:p>
-                  </a:txBody>
-                  <a:tcPr anchor="ctr" marT="25400" marB="25400">
-                    <a:solidFill>
-                      <a:srgbClr val="F4F1EA"/>
-                    </a:solidFill>
-                  </a:tcPr>
-                </a:tc>
-              </a:tr>
-              <a:tr h="512064">
-                <a:tc>
-                  <a:txBody>
-                    <a:bodyPr/>
-                    <a:lstStyle/>
-                    <a:p>
-                      <a:pPr algn="l"/>
-                      <a:r>
-                        <a:rPr sz="1400" b="0">
-                          <a:solidFill>
-                            <a:srgbClr val="1A232E"/>
-                          </a:solidFill>
-                          <a:latin typeface="Calibri"/>
-                        </a:rPr>
-                        <a:t>Maquiagem ⇒ Aplicador Fibra (Fox)</a:t>
-                      </a:r>
-                    </a:p>
-                  </a:txBody>
-                  <a:tcPr anchor="ctr" marT="25400" marB="25400">
-                    <a:solidFill>
-                      <a:srgbClr val="FFFFFF"/>
-                    </a:solidFill>
-                  </a:tcPr>
-                </a:tc>
-                <a:tc>
-                  <a:txBody>
-                    <a:bodyPr/>
-                    <a:lstStyle/>
-                    <a:p>
-                      <a:pPr algn="ctr"/>
-                      <a:r>
-                        <a:rPr sz="1400" b="0">
-                          <a:solidFill>
-                            <a:srgbClr val="1A232E"/>
-                          </a:solidFill>
-                          <a:latin typeface="Calibri"/>
-                        </a:rPr>
-                        <a:t>1,00</a:t>
-                      </a:r>
-                    </a:p>
-                  </a:txBody>
-                  <a:tcPr anchor="ctr" marT="25400" marB="25400">
-                    <a:solidFill>
-                      <a:srgbClr val="FFFFFF"/>
-                    </a:solidFill>
-                  </a:tcPr>
-                </a:tc>
-                <a:tc>
-                  <a:txBody>
-                    <a:bodyPr/>
-                    <a:lstStyle/>
-                    <a:p>
-                      <a:pPr algn="ctr"/>
-                      <a:r>
-                        <a:rPr sz="1400" b="0">
-                          <a:solidFill>
-                            <a:srgbClr val="1A232E"/>
-                          </a:solidFill>
-                          <a:latin typeface="Calibri"/>
-                        </a:rPr>
-                        <a:t>15,0</a:t>
-                      </a:r>
-                    </a:p>
-                  </a:txBody>
-                  <a:tcPr anchor="ctr" marT="25400" marB="25400">
-                    <a:solidFill>
-                      <a:srgbClr val="FFFFFF"/>
-                    </a:solidFill>
-                  </a:tcPr>
-                </a:tc>
-              </a:tr>
-            </a:tbl>
-          </a:graphicData>
-        </a:graphic>
-      </p:graphicFrame>
       <p:sp>
         <p:nvSpPr>
           <p:cNvPr id="11" name="TextBox 10"/>
@@ -5112,15 +8768,15 @@
           <p:nvPr/>
         </p:nvPicPr>
         <p:blipFill>
-          <a:blip r:embed="rId2"/>
+          <a:blip r:embed="rId3"/>
           <a:stretch>
             <a:fillRect/>
           </a:stretch>
         </p:blipFill>
         <p:spPr>
           <a:xfrm>
-            <a:off x="8503920" y="1508760"/>
-            <a:ext cx="3382778" cy="4754880"/>
+            <a:off x="8289244" y="484631"/>
+            <a:ext cx="3725972" cy="5913121"/>
           </a:xfrm>
           <a:prstGeom prst="rect">
             <a:avLst/>
@@ -5178,7 +8834,7 @@
 </file>
 
 <file path=ppt/slides/slide13.xml><?xml version="1.0" encoding="utf-8"?>
-<p:sld xmlns:a="http://schemas.openxmlformats.org/drawingml/2006/main" xmlns:p="http://schemas.openxmlformats.org/presentationml/2006/main" xmlns:r="http://schemas.openxmlformats.org/officeDocument/2006/relationships">
+<p:sld xmlns:a="http://schemas.openxmlformats.org/drawingml/2006/main" xmlns:r="http://schemas.openxmlformats.org/officeDocument/2006/relationships" xmlns:p="http://schemas.openxmlformats.org/presentationml/2006/main">
   <p:cSld>
     <p:spTree>
       <p:nvGrpSpPr>
@@ -5186,7 +8842,14 @@
         <p:cNvGrpSpPr/>
         <p:nvPr/>
       </p:nvGrpSpPr>
-      <p:grpSpPr/>
+      <p:grpSpPr>
+        <a:xfrm>
+          <a:off x="0" y="0"/>
+          <a:ext cx="0" cy="0"/>
+          <a:chOff x="0" y="0"/>
+          <a:chExt cx="0" cy="0"/>
+        </a:xfrm>
+      </p:grpSpPr>
       <p:sp>
         <p:nvSpPr>
           <p:cNvPr id="2" name="Rectangle 1"/>
@@ -5228,6 +8891,7 @@
           <a:lstStyle/>
           <a:p>
             <a:pPr algn="ctr"/>
+            <a:endParaRPr/>
           </a:p>
         </p:txBody>
       </p:sp>
@@ -5272,6 +8936,7 @@
           <a:lstStyle/>
           <a:p>
             <a:pPr algn="ctr"/>
+            <a:endParaRPr/>
           </a:p>
         </p:txBody>
       </p:sp>
@@ -5400,6 +9065,7 @@
           <a:lstStyle/>
           <a:p>
             <a:pPr algn="ctr"/>
+            <a:endParaRPr/>
           </a:p>
         </p:txBody>
       </p:sp>
@@ -5528,6 +9194,7 @@
           <a:lstStyle/>
           <a:p>
             <a:pPr algn="ctr"/>
+            <a:endParaRPr/>
           </a:p>
         </p:txBody>
       </p:sp>
@@ -5698,6 +9365,7 @@
           <a:lstStyle/>
           <a:p>
             <a:pPr algn="ctr"/>
+            <a:endParaRPr/>
           </a:p>
         </p:txBody>
       </p:sp>
@@ -5868,6 +9536,7 @@
           <a:lstStyle/>
           <a:p>
             <a:pPr algn="ctr"/>
+            <a:endParaRPr/>
           </a:p>
         </p:txBody>
       </p:sp>
@@ -6113,7 +9782,7 @@
 </file>
 
 <file path=ppt/slides/slide14.xml><?xml version="1.0" encoding="utf-8"?>
-<p:sld xmlns:a="http://schemas.openxmlformats.org/drawingml/2006/main" xmlns:p="http://schemas.openxmlformats.org/presentationml/2006/main" xmlns:r="http://schemas.openxmlformats.org/officeDocument/2006/relationships">
+<p:sld xmlns:a="http://schemas.openxmlformats.org/drawingml/2006/main" xmlns:r="http://schemas.openxmlformats.org/officeDocument/2006/relationships" xmlns:p="http://schemas.openxmlformats.org/presentationml/2006/main">
   <p:cSld>
     <p:spTree>
       <p:nvGrpSpPr>
@@ -6121,7 +9790,14 @@
         <p:cNvGrpSpPr/>
         <p:nvPr/>
       </p:nvGrpSpPr>
-      <p:grpSpPr/>
+      <p:grpSpPr>
+        <a:xfrm>
+          <a:off x="0" y="0"/>
+          <a:ext cx="0" cy="0"/>
+          <a:chOff x="0" y="0"/>
+          <a:chExt cx="0" cy="0"/>
+        </a:xfrm>
+      </p:grpSpPr>
       <p:sp>
         <p:nvSpPr>
           <p:cNvPr id="2" name="Rectangle 1"/>
@@ -6163,6 +9839,7 @@
           <a:lstStyle/>
           <a:p>
             <a:pPr algn="ctr"/>
+            <a:endParaRPr/>
           </a:p>
         </p:txBody>
       </p:sp>
@@ -6207,6 +9884,7 @@
           <a:lstStyle/>
           <a:p>
             <a:pPr algn="ctr"/>
+            <a:endParaRPr/>
           </a:p>
         </p:txBody>
       </p:sp>
@@ -6335,6 +10013,7 @@
           <a:lstStyle/>
           <a:p>
             <a:pPr algn="ctr"/>
+            <a:endParaRPr/>
           </a:p>
         </p:txBody>
       </p:sp>
@@ -6431,7 +10110,7 @@
         <p:spPr>
           <a:xfrm>
             <a:off x="640080" y="1554480"/>
-            <a:ext cx="10972800" cy="4846320"/>
+            <a:ext cx="10972800" cy="1508105"/>
           </a:xfrm>
           <a:prstGeom prst="rect">
             <a:avLst/>
@@ -6453,7 +10132,7 @@
               </a:spcAft>
             </a:pPr>
             <a:r>
-              <a:rPr sz="1900" b="1">
+              <a:rPr sz="1900" b="1" dirty="0">
                 <a:solidFill>
                   <a:srgbClr val="C8A04B"/>
                 </a:solidFill>
@@ -6462,25 +10141,88 @@
               <a:t>•  </a:t>
             </a:r>
             <a:r>
-              <a:rPr sz="1900" b="0">
+              <a:rPr sz="1900" b="0" dirty="0" err="1">
                 <a:solidFill>
                   <a:srgbClr val="1A232E"/>
                 </a:solidFill>
                 <a:latin typeface="Calibri"/>
               </a:rPr>
-              <a:t>Regras de maior lift fazem </a:t>
-            </a:r>
-            <a:r>
-              <a:rPr sz="1900" b="1">
+              <a:t>Regras</a:t>
+            </a:r>
+            <a:r>
+              <a:rPr sz="1900" b="0" dirty="0">
+                <a:solidFill>
+                  <a:srgbClr val="1A232E"/>
+                </a:solidFill>
+                <a:latin typeface="Calibri"/>
+              </a:rPr>
+              <a:t> de </a:t>
+            </a:r>
+            <a:r>
+              <a:rPr sz="1900" b="0" dirty="0" err="1">
+                <a:solidFill>
+                  <a:srgbClr val="1A232E"/>
+                </a:solidFill>
+                <a:latin typeface="Calibri"/>
+              </a:rPr>
+              <a:t>maior</a:t>
+            </a:r>
+            <a:r>
+              <a:rPr sz="1900" b="0" dirty="0">
+                <a:solidFill>
+                  <a:srgbClr val="1A232E"/>
+                </a:solidFill>
+                <a:latin typeface="Calibri"/>
+              </a:rPr>
+              <a:t> lift </a:t>
+            </a:r>
+            <a:r>
+              <a:rPr sz="1900" b="0" dirty="0" err="1">
+                <a:solidFill>
+                  <a:srgbClr val="1A232E"/>
+                </a:solidFill>
+                <a:latin typeface="Calibri"/>
+              </a:rPr>
+              <a:t>fazem</a:t>
+            </a:r>
+            <a:r>
+              <a:rPr sz="1900" b="0" dirty="0">
+                <a:solidFill>
+                  <a:srgbClr val="1A232E"/>
+                </a:solidFill>
+                <a:latin typeface="Calibri"/>
+              </a:rPr>
+              <a:t> </a:t>
+            </a:r>
+            <a:r>
+              <a:rPr sz="1900" b="1" dirty="0" err="1">
                 <a:solidFill>
                   <a:srgbClr val="0F1B2D"/>
                 </a:solidFill>
                 <a:latin typeface="Calibri"/>
               </a:rPr>
-              <a:t>sentido comercial</a:t>
-            </a:r>
-            <a:r>
-              <a:rPr sz="1900" b="0">
+              <a:t>sentido</a:t>
+            </a:r>
+            <a:r>
+              <a:rPr sz="1900" b="1" dirty="0">
+                <a:solidFill>
+                  <a:srgbClr val="0F1B2D"/>
+                </a:solidFill>
+                <a:latin typeface="Calibri"/>
+              </a:rPr>
+              <a:t> </a:t>
+            </a:r>
+            <a:r>
+              <a:rPr sz="1900" b="1" dirty="0" err="1">
+                <a:solidFill>
+                  <a:srgbClr val="0F1B2D"/>
+                </a:solidFill>
+                <a:latin typeface="Calibri"/>
+              </a:rPr>
+              <a:t>comercial</a:t>
+            </a:r>
+            <a:r>
+              <a:rPr sz="1900" b="0" dirty="0">
                 <a:solidFill>
                   <a:srgbClr val="1A232E"/>
                 </a:solidFill>
@@ -6499,7 +10241,7 @@
               </a:spcAft>
             </a:pPr>
             <a:r>
-              <a:rPr sz="1600" b="1">
+              <a:rPr sz="1600" b="1" dirty="0">
                 <a:solidFill>
                   <a:srgbClr val="C8A04B"/>
                 </a:solidFill>
@@ -6508,14 +10250,92 @@
               <a:t>–  </a:t>
             </a:r>
             <a:r>
-              <a:rPr sz="1600" b="0">
+              <a:rPr sz="1600" b="0" dirty="0" err="1">
                 <a:solidFill>
                   <a:srgbClr val="5A6672"/>
                 </a:solidFill>
                 <a:latin typeface="Calibri"/>
               </a:rPr>
-              <a:t>Rotina de barba: shampoo + óleo + bálsamo + pós-barba</a:t>
-            </a:r>
+              <a:t>Rotina</a:t>
+            </a:r>
+            <a:r>
+              <a:rPr sz="1600" b="0" dirty="0">
+                <a:solidFill>
+                  <a:srgbClr val="5A6672"/>
+                </a:solidFill>
+                <a:latin typeface="Calibri"/>
+              </a:rPr>
+              <a:t> de </a:t>
+            </a:r>
+            <a:r>
+              <a:rPr sz="1600" b="0" dirty="0" err="1">
+                <a:solidFill>
+                  <a:srgbClr val="5A6672"/>
+                </a:solidFill>
+                <a:latin typeface="Calibri"/>
+              </a:rPr>
+              <a:t>barba</a:t>
+            </a:r>
+            <a:r>
+              <a:rPr sz="1600" b="0" dirty="0">
+                <a:solidFill>
+                  <a:srgbClr val="5A6672"/>
+                </a:solidFill>
+                <a:latin typeface="Calibri"/>
+              </a:rPr>
+              <a:t>: shampoo + </a:t>
+            </a:r>
+            <a:r>
+              <a:rPr sz="1600" b="0" dirty="0" err="1">
+                <a:solidFill>
+                  <a:srgbClr val="5A6672"/>
+                </a:solidFill>
+                <a:latin typeface="Calibri"/>
+              </a:rPr>
+              <a:t>óleo</a:t>
+            </a:r>
+            <a:r>
+              <a:rPr sz="1600" b="0" dirty="0">
+                <a:solidFill>
+                  <a:srgbClr val="5A6672"/>
+                </a:solidFill>
+                <a:latin typeface="Calibri"/>
+              </a:rPr>
+              <a:t> + </a:t>
+            </a:r>
+            <a:r>
+              <a:rPr sz="1600" b="0" dirty="0" err="1">
+                <a:solidFill>
+                  <a:srgbClr val="5A6672"/>
+                </a:solidFill>
+                <a:latin typeface="Calibri"/>
+              </a:rPr>
+              <a:t>bálsamo</a:t>
+            </a:r>
+            <a:r>
+              <a:rPr sz="1600" b="0" dirty="0">
+                <a:solidFill>
+                  <a:srgbClr val="5A6672"/>
+                </a:solidFill>
+                <a:latin typeface="Calibri"/>
+              </a:rPr>
+              <a:t> + </a:t>
+            </a:r>
+            <a:r>
+              <a:rPr sz="1600" b="0" dirty="0" err="1">
+                <a:solidFill>
+                  <a:srgbClr val="5A6672"/>
+                </a:solidFill>
+                <a:latin typeface="Calibri"/>
+              </a:rPr>
+              <a:t>pós-barba</a:t>
+            </a:r>
+            <a:endParaRPr sz="1600" b="0" dirty="0">
+              <a:solidFill>
+                <a:srgbClr val="5A6672"/>
+              </a:solidFill>
+              <a:latin typeface="Calibri"/>
+            </a:endParaRPr>
           </a:p>
           <a:p>
             <a:pPr algn="l">
@@ -6527,7 +10347,7 @@
               </a:spcAft>
             </a:pPr>
             <a:r>
-              <a:rPr sz="1600" b="1">
+              <a:rPr sz="1600" b="1" dirty="0">
                 <a:solidFill>
                   <a:srgbClr val="C8A04B"/>
                 </a:solidFill>
@@ -6536,13 +10356,58 @@
               <a:t>–  </a:t>
             </a:r>
             <a:r>
-              <a:rPr sz="1600" b="0">
+              <a:rPr sz="1600" b="0" dirty="0" err="1">
                 <a:solidFill>
                   <a:srgbClr val="5A6672"/>
                 </a:solidFill>
                 <a:latin typeface="Calibri"/>
               </a:rPr>
-              <a:t>Coerência de marca: linhas QOD e Fox for Men</a:t>
+              <a:t>Coerência</a:t>
+            </a:r>
+            <a:r>
+              <a:rPr sz="1600" b="0" dirty="0">
+                <a:solidFill>
+                  <a:srgbClr val="5A6672"/>
+                </a:solidFill>
+                <a:latin typeface="Calibri"/>
+              </a:rPr>
+              <a:t> de </a:t>
+            </a:r>
+            <a:r>
+              <a:rPr sz="1600" b="0" dirty="0" err="1">
+                <a:solidFill>
+                  <a:srgbClr val="5A6672"/>
+                </a:solidFill>
+                <a:latin typeface="Calibri"/>
+              </a:rPr>
+              <a:t>marca</a:t>
+            </a:r>
+            <a:r>
+              <a:rPr sz="1600" b="0" dirty="0">
+                <a:solidFill>
+                  <a:srgbClr val="5A6672"/>
+                </a:solidFill>
+                <a:latin typeface="Calibri"/>
+              </a:rPr>
+              <a:t>: </a:t>
+            </a:r>
+            <a:r>
+              <a:rPr sz="1600" b="0" dirty="0" err="1">
+                <a:solidFill>
+                  <a:srgbClr val="5A6672"/>
+                </a:solidFill>
+                <a:latin typeface="Calibri"/>
+              </a:rPr>
+              <a:t>linhas</a:t>
+            </a:r>
+            <a:r>
+              <a:rPr sz="1600" b="0" dirty="0">
+                <a:solidFill>
+                  <a:srgbClr val="5A6672"/>
+                </a:solidFill>
+                <a:latin typeface="Calibri"/>
+              </a:rPr>
+              <a:t> QOD e Fox for Men</a:t>
             </a:r>
           </a:p>
           <a:p>
@@ -6555,7 +10420,7 @@
               </a:spcAft>
             </a:pPr>
             <a:r>
-              <a:rPr sz="1600" b="1">
+              <a:rPr sz="1600" b="1" dirty="0">
                 <a:solidFill>
                   <a:srgbClr val="C8A04B"/>
                 </a:solidFill>
@@ -6564,14 +10429,101 @@
               <a:t>–  </a:t>
             </a:r>
             <a:r>
-              <a:rPr sz="1600" b="0">
+              <a:rPr sz="1600" b="0" dirty="0" err="1">
                 <a:solidFill>
                   <a:srgbClr val="5A6672"/>
                 </a:solidFill>
                 <a:latin typeface="Calibri"/>
               </a:rPr>
-              <a:t>Acessórios de função equivalente compr. juntos</a:t>
-            </a:r>
+              <a:t>Acessórios</a:t>
+            </a:r>
+            <a:r>
+              <a:rPr sz="1600" b="0" dirty="0">
+                <a:solidFill>
+                  <a:srgbClr val="5A6672"/>
+                </a:solidFill>
+                <a:latin typeface="Calibri"/>
+              </a:rPr>
+              <a:t> de </a:t>
+            </a:r>
+            <a:r>
+              <a:rPr sz="1600" b="0" dirty="0" err="1">
+                <a:solidFill>
+                  <a:srgbClr val="5A6672"/>
+                </a:solidFill>
+                <a:latin typeface="Calibri"/>
+              </a:rPr>
+              <a:t>função</a:t>
+            </a:r>
+            <a:r>
+              <a:rPr sz="1600" b="0" dirty="0">
+                <a:solidFill>
+                  <a:srgbClr val="5A6672"/>
+                </a:solidFill>
+                <a:latin typeface="Calibri"/>
+              </a:rPr>
+              <a:t> </a:t>
+            </a:r>
+            <a:r>
+              <a:rPr sz="1600" b="0" dirty="0" err="1">
+                <a:solidFill>
+                  <a:srgbClr val="5A6672"/>
+                </a:solidFill>
+                <a:latin typeface="Calibri"/>
+              </a:rPr>
+              <a:t>equivalente</a:t>
+            </a:r>
+            <a:r>
+              <a:rPr sz="1600" b="0" dirty="0">
+                <a:solidFill>
+                  <a:srgbClr val="5A6672"/>
+                </a:solidFill>
+                <a:latin typeface="Calibri"/>
+              </a:rPr>
+              <a:t> </a:t>
+            </a:r>
+            <a:r>
+              <a:rPr sz="1600" b="0" dirty="0" err="1">
+                <a:solidFill>
+                  <a:srgbClr val="5A6672"/>
+                </a:solidFill>
+                <a:latin typeface="Calibri"/>
+              </a:rPr>
+              <a:t>compr</a:t>
+            </a:r>
+            <a:r>
+              <a:rPr lang="pt-BR" sz="1600" dirty="0">
+                <a:solidFill>
+                  <a:srgbClr val="5A6672"/>
+                </a:solidFill>
+                <a:latin typeface="Calibri"/>
+              </a:rPr>
+              <a:t>ados</a:t>
+            </a:r>
+            <a:r>
+              <a:rPr sz="1600" b="0" dirty="0">
+                <a:solidFill>
+                  <a:srgbClr val="5A6672"/>
+                </a:solidFill>
+                <a:latin typeface="Calibri"/>
+              </a:rPr>
+              <a:t> </a:t>
+            </a:r>
+            <a:r>
+              <a:rPr sz="1600" b="0" dirty="0" err="1">
+                <a:solidFill>
+                  <a:srgbClr val="5A6672"/>
+                </a:solidFill>
+                <a:latin typeface="Calibri"/>
+              </a:rPr>
+              <a:t>juntos</a:t>
+            </a:r>
+            <a:endParaRPr sz="1600" b="0" dirty="0">
+              <a:solidFill>
+                <a:srgbClr val="5A6672"/>
+              </a:solidFill>
+              <a:latin typeface="Calibri"/>
+            </a:endParaRPr>
           </a:p>
         </p:txBody>
       </p:sp>
@@ -6616,6 +10568,7 @@
           <a:lstStyle/>
           <a:p>
             <a:pPr algn="ctr"/>
+            <a:endParaRPr/>
           </a:p>
         </p:txBody>
       </p:sp>
@@ -6717,7 +10670,7 @@
 </file>
 
 <file path=ppt/slides/slide15.xml><?xml version="1.0" encoding="utf-8"?>
-<p:sld xmlns:a="http://schemas.openxmlformats.org/drawingml/2006/main" xmlns:p="http://schemas.openxmlformats.org/presentationml/2006/main" xmlns:r="http://schemas.openxmlformats.org/officeDocument/2006/relationships">
+<p:sld xmlns:a="http://schemas.openxmlformats.org/drawingml/2006/main" xmlns:r="http://schemas.openxmlformats.org/officeDocument/2006/relationships" xmlns:p="http://schemas.openxmlformats.org/presentationml/2006/main">
   <p:cSld>
     <p:spTree>
       <p:nvGrpSpPr>
@@ -6725,7 +10678,14 @@
         <p:cNvGrpSpPr/>
         <p:nvPr/>
       </p:nvGrpSpPr>
-      <p:grpSpPr/>
+      <p:grpSpPr>
+        <a:xfrm>
+          <a:off x="0" y="0"/>
+          <a:ext cx="0" cy="0"/>
+          <a:chOff x="0" y="0"/>
+          <a:chExt cx="0" cy="0"/>
+        </a:xfrm>
+      </p:grpSpPr>
       <p:sp>
         <p:nvSpPr>
           <p:cNvPr id="2" name="Rectangle 1"/>
@@ -6767,6 +10727,7 @@
           <a:lstStyle/>
           <a:p>
             <a:pPr algn="ctr"/>
+            <a:endParaRPr/>
           </a:p>
         </p:txBody>
       </p:sp>
@@ -6811,6 +10772,7 @@
           <a:lstStyle/>
           <a:p>
             <a:pPr algn="ctr"/>
+            <a:endParaRPr/>
           </a:p>
         </p:txBody>
       </p:sp>
@@ -6845,7 +10807,7 @@
               </a:spcAft>
             </a:pPr>
             <a:r>
-              <a:rPr sz="3000" b="1">
+              <a:rPr sz="3000" b="1" dirty="0" err="1">
                 <a:solidFill>
                   <a:srgbClr val="0F1B2D"/>
                 </a:solidFill>
@@ -6853,6 +10815,12 @@
               </a:rPr>
               <a:t>Conclusão</a:t>
             </a:r>
+            <a:endParaRPr sz="3000" b="1" dirty="0">
+              <a:solidFill>
+                <a:srgbClr val="0F1B2D"/>
+              </a:solidFill>
+              <a:latin typeface="Calibri"/>
+            </a:endParaRPr>
           </a:p>
         </p:txBody>
       </p:sp>
@@ -6939,6 +10907,7 @@
           <a:lstStyle/>
           <a:p>
             <a:pPr algn="ctr"/>
+            <a:endParaRPr/>
           </a:p>
         </p:txBody>
       </p:sp>
@@ -7057,7 +11026,7 @@
               </a:spcAft>
             </a:pPr>
             <a:r>
-              <a:rPr sz="2000" b="1">
+              <a:rPr sz="2000" b="1" dirty="0">
                 <a:solidFill>
                   <a:srgbClr val="C8A04B"/>
                 </a:solidFill>
@@ -7066,25 +11035,178 @@
               <a:t>•  </a:t>
             </a:r>
             <a:r>
-              <a:rPr sz="2000" b="0">
+              <a:rPr sz="2000" b="0" dirty="0">
                 <a:solidFill>
                   <a:srgbClr val="1A232E"/>
                 </a:solidFill>
                 <a:latin typeface="Calibri"/>
               </a:rPr>
-              <a:t>Sim: regras de associação geram recomendações relevantes em B2B de baixo volume — </a:t>
-            </a:r>
-            <a:r>
-              <a:rPr sz="2000" b="1">
+              <a:t>Sim: </a:t>
+            </a:r>
+            <a:r>
+              <a:rPr sz="2000" b="0" dirty="0" err="1">
+                <a:solidFill>
+                  <a:srgbClr val="1A232E"/>
+                </a:solidFill>
+                <a:latin typeface="Calibri"/>
+              </a:rPr>
+              <a:t>regras</a:t>
+            </a:r>
+            <a:r>
+              <a:rPr sz="2000" b="0" dirty="0">
+                <a:solidFill>
+                  <a:srgbClr val="1A232E"/>
+                </a:solidFill>
+                <a:latin typeface="Calibri"/>
+              </a:rPr>
+              <a:t> de </a:t>
+            </a:r>
+            <a:r>
+              <a:rPr sz="2000" b="0" dirty="0" err="1">
+                <a:solidFill>
+                  <a:srgbClr val="1A232E"/>
+                </a:solidFill>
+                <a:latin typeface="Calibri"/>
+              </a:rPr>
+              <a:t>associação</a:t>
+            </a:r>
+            <a:r>
+              <a:rPr sz="2000" b="0" dirty="0">
+                <a:solidFill>
+                  <a:srgbClr val="1A232E"/>
+                </a:solidFill>
+                <a:latin typeface="Calibri"/>
+              </a:rPr>
+              <a:t> </a:t>
+            </a:r>
+            <a:r>
+              <a:rPr sz="2000" b="0" dirty="0" err="1">
+                <a:solidFill>
+                  <a:srgbClr val="1A232E"/>
+                </a:solidFill>
+                <a:latin typeface="Calibri"/>
+              </a:rPr>
+              <a:t>geram</a:t>
+            </a:r>
+            <a:r>
+              <a:rPr sz="2000" b="0" dirty="0">
+                <a:solidFill>
+                  <a:srgbClr val="1A232E"/>
+                </a:solidFill>
+                <a:latin typeface="Calibri"/>
+              </a:rPr>
+              <a:t> </a:t>
+            </a:r>
+            <a:r>
+              <a:rPr sz="2000" b="0" dirty="0" err="1">
+                <a:solidFill>
+                  <a:srgbClr val="1A232E"/>
+                </a:solidFill>
+                <a:latin typeface="Calibri"/>
+              </a:rPr>
+              <a:t>recomendações</a:t>
+            </a:r>
+            <a:r>
+              <a:rPr sz="2000" b="0" dirty="0">
+                <a:solidFill>
+                  <a:srgbClr val="1A232E"/>
+                </a:solidFill>
+                <a:latin typeface="Calibri"/>
+              </a:rPr>
+              <a:t> </a:t>
+            </a:r>
+            <a:r>
+              <a:rPr sz="2000" b="0" dirty="0" err="1">
+                <a:solidFill>
+                  <a:srgbClr val="1A232E"/>
+                </a:solidFill>
+                <a:latin typeface="Calibri"/>
+              </a:rPr>
+              <a:t>relevantes</a:t>
+            </a:r>
+            <a:r>
+              <a:rPr sz="2000" b="0" dirty="0">
+                <a:solidFill>
+                  <a:srgbClr val="1A232E"/>
+                </a:solidFill>
+                <a:latin typeface="Calibri"/>
+              </a:rPr>
+              <a:t> </a:t>
+            </a:r>
+            <a:r>
+              <a:rPr sz="2000" b="0" dirty="0" err="1">
+                <a:solidFill>
+                  <a:srgbClr val="1A232E"/>
+                </a:solidFill>
+                <a:latin typeface="Calibri"/>
+              </a:rPr>
+              <a:t>em</a:t>
+            </a:r>
+            <a:r>
+              <a:rPr sz="2000" b="0" dirty="0">
+                <a:solidFill>
+                  <a:srgbClr val="1A232E"/>
+                </a:solidFill>
+                <a:latin typeface="Calibri"/>
+              </a:rPr>
+              <a:t> B2B de </a:t>
+            </a:r>
+            <a:r>
+              <a:rPr sz="2000" b="0" dirty="0" err="1">
+                <a:solidFill>
+                  <a:srgbClr val="1A232E"/>
+                </a:solidFill>
+                <a:latin typeface="Calibri"/>
+              </a:rPr>
+              <a:t>baixo</a:t>
+            </a:r>
+            <a:r>
+              <a:rPr sz="2000" b="0" dirty="0">
+                <a:solidFill>
+                  <a:srgbClr val="1A232E"/>
+                </a:solidFill>
+                <a:latin typeface="Calibri"/>
+              </a:rPr>
+              <a:t> volume — </a:t>
+            </a:r>
+            <a:r>
+              <a:rPr sz="2000" b="1" dirty="0">
                 <a:solidFill>
                   <a:srgbClr val="0F1B2D"/>
                 </a:solidFill>
                 <a:latin typeface="Calibri"/>
               </a:rPr>
-              <a:t>com ressalva de escala</a:t>
-            </a:r>
-            <a:r>
-              <a:rPr sz="2000" b="0">
+              <a:t>com </a:t>
+            </a:r>
+            <a:r>
+              <a:rPr sz="2000" b="1" dirty="0" err="1">
+                <a:solidFill>
+                  <a:srgbClr val="0F1B2D"/>
+                </a:solidFill>
+                <a:latin typeface="Calibri"/>
+              </a:rPr>
+              <a:t>ressalva</a:t>
+            </a:r>
+            <a:r>
+              <a:rPr sz="2000" b="1" dirty="0">
+                <a:solidFill>
+                  <a:srgbClr val="0F1B2D"/>
+                </a:solidFill>
+                <a:latin typeface="Calibri"/>
+              </a:rPr>
+              <a:t> de </a:t>
+            </a:r>
+            <a:r>
+              <a:rPr sz="2000" b="1" dirty="0" err="1">
+                <a:solidFill>
+                  <a:srgbClr val="0F1B2D"/>
+                </a:solidFill>
+                <a:latin typeface="Calibri"/>
+              </a:rPr>
+              <a:t>escala</a:t>
+            </a:r>
+            <a:r>
+              <a:rPr sz="2000" b="0" dirty="0">
                 <a:solidFill>
                   <a:srgbClr val="1A232E"/>
                 </a:solidFill>
@@ -7103,7 +11225,7 @@
               </a:spcAft>
             </a:pPr>
             <a:r>
-              <a:rPr sz="2000" b="1">
+              <a:rPr sz="2000" b="1" dirty="0">
                 <a:solidFill>
                   <a:srgbClr val="C8A04B"/>
                 </a:solidFill>
@@ -7112,31 +11234,112 @@
               <a:t>•  </a:t>
             </a:r>
             <a:r>
-              <a:rPr sz="2000" b="0">
+              <a:rPr sz="2000" b="0" dirty="0" err="1">
                 <a:solidFill>
                   <a:srgbClr val="1A232E"/>
                 </a:solidFill>
                 <a:latin typeface="Calibri"/>
               </a:rPr>
-              <a:t>Artefato </a:t>
-            </a:r>
-            <a:r>
-              <a:rPr sz="2000" b="1">
+              <a:t>Artefato</a:t>
+            </a:r>
+            <a:r>
+              <a:rPr sz="2000" b="0" dirty="0">
+                <a:solidFill>
+                  <a:srgbClr val="1A232E"/>
+                </a:solidFill>
+                <a:latin typeface="Calibri"/>
+              </a:rPr>
+              <a:t> </a:t>
+            </a:r>
+            <a:r>
+              <a:rPr sz="2000" b="1" dirty="0" err="1">
                 <a:solidFill>
                   <a:srgbClr val="0F1B2D"/>
                 </a:solidFill>
                 <a:latin typeface="Calibri"/>
               </a:rPr>
-              <a:t>completo e reproduzível</a:t>
-            </a:r>
-            <a:r>
-              <a:rPr sz="2000" b="0">
+              <a:t>completo</a:t>
+            </a:r>
+            <a:r>
+              <a:rPr sz="2000" b="1" dirty="0">
+                <a:solidFill>
+                  <a:srgbClr val="0F1B2D"/>
+                </a:solidFill>
+                <a:latin typeface="Calibri"/>
+              </a:rPr>
+              <a:t> e </a:t>
+            </a:r>
+            <a:r>
+              <a:rPr sz="2000" b="1" dirty="0" err="1">
+                <a:solidFill>
+                  <a:srgbClr val="0F1B2D"/>
+                </a:solidFill>
+                <a:latin typeface="Calibri"/>
+              </a:rPr>
+              <a:t>reproduzível</a:t>
+            </a:r>
+            <a:r>
+              <a:rPr sz="2000" b="0" dirty="0">
                 <a:solidFill>
                   <a:srgbClr val="1A232E"/>
                 </a:solidFill>
                 <a:latin typeface="Calibri"/>
               </a:rPr>
-              <a:t>, de baixo custo, sobre dados reais.</a:t>
+              <a:t>, de </a:t>
+            </a:r>
+            <a:r>
+              <a:rPr sz="2000" b="0" dirty="0" err="1">
+                <a:solidFill>
+                  <a:srgbClr val="1A232E"/>
+                </a:solidFill>
+                <a:latin typeface="Calibri"/>
+              </a:rPr>
+              <a:t>baixo</a:t>
+            </a:r>
+            <a:r>
+              <a:rPr sz="2000" b="0" dirty="0">
+                <a:solidFill>
+                  <a:srgbClr val="1A232E"/>
+                </a:solidFill>
+                <a:latin typeface="Calibri"/>
+              </a:rPr>
+              <a:t> </a:t>
+            </a:r>
+            <a:r>
+              <a:rPr sz="2000" b="0" dirty="0" err="1">
+                <a:solidFill>
+                  <a:srgbClr val="1A232E"/>
+                </a:solidFill>
+                <a:latin typeface="Calibri"/>
+              </a:rPr>
+              <a:t>custo</a:t>
+            </a:r>
+            <a:r>
+              <a:rPr sz="2000" b="0" dirty="0">
+                <a:solidFill>
+                  <a:srgbClr val="1A232E"/>
+                </a:solidFill>
+                <a:latin typeface="Calibri"/>
+              </a:rPr>
+              <a:t>, </a:t>
+            </a:r>
+            <a:r>
+              <a:rPr sz="2000" b="0" dirty="0" err="1">
+                <a:solidFill>
+                  <a:srgbClr val="1A232E"/>
+                </a:solidFill>
+                <a:latin typeface="Calibri"/>
+              </a:rPr>
+              <a:t>sobre</a:t>
+            </a:r>
+            <a:r>
+              <a:rPr sz="2000" b="0" dirty="0">
+                <a:solidFill>
+                  <a:srgbClr val="1A232E"/>
+                </a:solidFill>
+                <a:latin typeface="Calibri"/>
+              </a:rPr>
+              <a:t> dados reais.</a:t>
             </a:r>
           </a:p>
           <a:p>
@@ -7149,7 +11352,7 @@
               </a:spcAft>
             </a:pPr>
             <a:r>
-              <a:rPr sz="2000" b="1">
+              <a:rPr sz="2000" b="1" dirty="0">
                 <a:solidFill>
                   <a:srgbClr val="C8A04B"/>
                 </a:solidFill>
@@ -7158,16 +11361,43 @@
               <a:t>•  </a:t>
             </a:r>
             <a:r>
-              <a:rPr sz="2000" b="0">
+              <a:rPr sz="2000" b="0" dirty="0" err="1">
                 <a:solidFill>
                   <a:srgbClr val="1A232E"/>
                 </a:solidFill>
                 <a:latin typeface="Calibri"/>
               </a:rPr>
-              <a:t>Contribuição metodológica: </a:t>
-            </a:r>
-            <a:r>
-              <a:rPr sz="2000" b="1">
+              <a:t>Contribuição</a:t>
+            </a:r>
+            <a:r>
+              <a:rPr sz="2000" b="0" dirty="0">
+                <a:solidFill>
+                  <a:srgbClr val="1A232E"/>
+                </a:solidFill>
+                <a:latin typeface="Calibri"/>
+              </a:rPr>
+              <a:t> </a:t>
+            </a:r>
+            <a:r>
+              <a:rPr sz="2000" b="0" dirty="0" err="1">
+                <a:solidFill>
+                  <a:srgbClr val="1A232E"/>
+                </a:solidFill>
+                <a:latin typeface="Calibri"/>
+              </a:rPr>
+              <a:t>metodológica</a:t>
+            </a:r>
+            <a:r>
+              <a:rPr sz="2000" b="0" dirty="0">
+                <a:solidFill>
+                  <a:srgbClr val="1A232E"/>
+                </a:solidFill>
+                <a:latin typeface="Calibri"/>
+              </a:rPr>
+              <a:t>: </a:t>
+            </a:r>
+            <a:r>
+              <a:rPr sz="2000" b="1" dirty="0">
                 <a:solidFill>
                   <a:srgbClr val="0F1B2D"/>
                 </a:solidFill>
@@ -7176,25 +11406,70 @@
               <a:t>LOOCV</a:t>
             </a:r>
             <a:r>
-              <a:rPr sz="2000" b="0">
+              <a:rPr sz="2000" b="0" dirty="0">
                 <a:solidFill>
                   <a:srgbClr val="1A232E"/>
                 </a:solidFill>
                 <a:latin typeface="Calibri"/>
               </a:rPr>
-              <a:t> + leitura honesta do </a:t>
-            </a:r>
-            <a:r>
-              <a:rPr sz="2000" b="1">
+              <a:t> + </a:t>
+            </a:r>
+            <a:r>
+              <a:rPr sz="2000" b="0" dirty="0" err="1">
+                <a:solidFill>
+                  <a:srgbClr val="1A232E"/>
+                </a:solidFill>
+                <a:latin typeface="Calibri"/>
+              </a:rPr>
+              <a:t>leitura</a:t>
+            </a:r>
+            <a:r>
+              <a:rPr sz="2000" b="0" dirty="0">
+                <a:solidFill>
+                  <a:srgbClr val="1A232E"/>
+                </a:solidFill>
+                <a:latin typeface="Calibri"/>
+              </a:rPr>
+              <a:t> </a:t>
+            </a:r>
+            <a:r>
+              <a:rPr sz="2000" b="0" dirty="0" err="1">
+                <a:solidFill>
+                  <a:srgbClr val="1A232E"/>
+                </a:solidFill>
+                <a:latin typeface="Calibri"/>
+              </a:rPr>
+              <a:t>honesta</a:t>
+            </a:r>
+            <a:r>
+              <a:rPr sz="2000" b="0" dirty="0">
+                <a:solidFill>
+                  <a:srgbClr val="1A232E"/>
+                </a:solidFill>
+                <a:latin typeface="Calibri"/>
+              </a:rPr>
+              <a:t> do </a:t>
+            </a:r>
+            <a:r>
+              <a:rPr sz="2000" b="1" dirty="0" err="1">
                 <a:solidFill>
                   <a:srgbClr val="0F1B2D"/>
                 </a:solidFill>
                 <a:latin typeface="Calibri"/>
               </a:rPr>
-              <a:t>teto da Precision</a:t>
-            </a:r>
-            <a:r>
-              <a:rPr sz="2000" b="0">
+              <a:t>teto</a:t>
+            </a:r>
+            <a:r>
+              <a:rPr sz="2000" b="1" dirty="0">
+                <a:solidFill>
+                  <a:srgbClr val="0F1B2D"/>
+                </a:solidFill>
+                <a:latin typeface="Calibri"/>
+              </a:rPr>
+              <a:t> da Precision</a:t>
+            </a:r>
+            <a:r>
+              <a:rPr sz="2000" b="0" dirty="0">
                 <a:solidFill>
                   <a:srgbClr val="1A232E"/>
                 </a:solidFill>
@@ -7213,7 +11488,7 @@
               </a:spcAft>
             </a:pPr>
             <a:r>
-              <a:rPr sz="2000" b="1">
+              <a:rPr sz="2000" b="1" dirty="0">
                 <a:solidFill>
                   <a:srgbClr val="C8A04B"/>
                 </a:solidFill>
@@ -7222,31 +11497,130 @@
               <a:t>•  </a:t>
             </a:r>
             <a:r>
-              <a:rPr sz="2000" b="0">
+              <a:rPr sz="2000" b="0" dirty="0" err="1">
                 <a:solidFill>
                   <a:srgbClr val="1A232E"/>
                 </a:solidFill>
                 <a:latin typeface="Calibri"/>
               </a:rPr>
-              <a:t>Recomendações como </a:t>
-            </a:r>
-            <a:r>
-              <a:rPr sz="2000" b="1">
+              <a:t>Recomendações</a:t>
+            </a:r>
+            <a:r>
+              <a:rPr sz="2000" b="0" dirty="0">
+                <a:solidFill>
+                  <a:srgbClr val="1A232E"/>
+                </a:solidFill>
+                <a:latin typeface="Calibri"/>
+              </a:rPr>
+              <a:t> </a:t>
+            </a:r>
+            <a:r>
+              <a:rPr sz="2000" b="0" dirty="0" err="1">
+                <a:solidFill>
+                  <a:srgbClr val="1A232E"/>
+                </a:solidFill>
+                <a:latin typeface="Calibri"/>
+              </a:rPr>
+              <a:t>como</a:t>
+            </a:r>
+            <a:r>
+              <a:rPr sz="2000" b="0" dirty="0">
+                <a:solidFill>
+                  <a:srgbClr val="1A232E"/>
+                </a:solidFill>
+                <a:latin typeface="Calibri"/>
+              </a:rPr>
+              <a:t> </a:t>
+            </a:r>
+            <a:r>
+              <a:rPr sz="2000" b="1" dirty="0" err="1">
                 <a:solidFill>
                   <a:srgbClr val="0F1B2D"/>
                 </a:solidFill>
                 <a:latin typeface="Calibri"/>
               </a:rPr>
-              <a:t>apoio à decisão</a:t>
-            </a:r>
-            <a:r>
-              <a:rPr sz="2000" b="0">
+              <a:t>apoio</a:t>
+            </a:r>
+            <a:r>
+              <a:rPr sz="2000" b="1" dirty="0">
+                <a:solidFill>
+                  <a:srgbClr val="0F1B2D"/>
+                </a:solidFill>
+                <a:latin typeface="Calibri"/>
+              </a:rPr>
+              <a:t> à </a:t>
+            </a:r>
+            <a:r>
+              <a:rPr sz="2000" b="1" dirty="0" err="1">
+                <a:solidFill>
+                  <a:srgbClr val="0F1B2D"/>
+                </a:solidFill>
+                <a:latin typeface="Calibri"/>
+              </a:rPr>
+              <a:t>decisão</a:t>
+            </a:r>
+            <a:r>
+              <a:rPr sz="2000" b="0" dirty="0">
                 <a:solidFill>
                   <a:srgbClr val="1A232E"/>
                 </a:solidFill>
                 <a:latin typeface="Calibri"/>
               </a:rPr>
-              <a:t>, não prescrição automática.</a:t>
+              <a:t>, </a:t>
+            </a:r>
+            <a:r>
+              <a:rPr sz="2000" b="0" dirty="0" err="1">
+                <a:solidFill>
+                  <a:srgbClr val="1A232E"/>
+                </a:solidFill>
+                <a:latin typeface="Calibri"/>
+              </a:rPr>
+              <a:t>não</a:t>
+            </a:r>
+            <a:r>
+              <a:rPr sz="2000" b="0" dirty="0">
+                <a:solidFill>
+                  <a:srgbClr val="1A232E"/>
+                </a:solidFill>
+                <a:latin typeface="Calibri"/>
+              </a:rPr>
+              <a:t> </a:t>
+            </a:r>
+            <a:r>
+              <a:rPr sz="2000" b="0" dirty="0" err="1">
+                <a:solidFill>
+                  <a:srgbClr val="1A232E"/>
+                </a:solidFill>
+                <a:latin typeface="Calibri"/>
+              </a:rPr>
+              <a:t>prescrição</a:t>
+            </a:r>
+            <a:r>
+              <a:rPr sz="2000" b="0" dirty="0">
+                <a:solidFill>
+                  <a:srgbClr val="1A232E"/>
+                </a:solidFill>
+                <a:latin typeface="Calibri"/>
+              </a:rPr>
+              <a:t> </a:t>
+            </a:r>
+            <a:r>
+              <a:rPr sz="2000" b="0" dirty="0" err="1">
+                <a:solidFill>
+                  <a:srgbClr val="1A232E"/>
+                </a:solidFill>
+                <a:latin typeface="Calibri"/>
+              </a:rPr>
+              <a:t>automática</a:t>
+            </a:r>
+            <a:r>
+              <a:rPr sz="2000" b="0" dirty="0">
+                <a:solidFill>
+                  <a:srgbClr val="1A232E"/>
+                </a:solidFill>
+                <a:latin typeface="Calibri"/>
+              </a:rPr>
+              <a:t>.</a:t>
             </a:r>
           </a:p>
         </p:txBody>
@@ -7260,7 +11634,7 @@
 </file>
 
 <file path=ppt/slides/slide16.xml><?xml version="1.0" encoding="utf-8"?>
-<p:sld xmlns:a="http://schemas.openxmlformats.org/drawingml/2006/main" xmlns:p="http://schemas.openxmlformats.org/presentationml/2006/main" xmlns:r="http://schemas.openxmlformats.org/officeDocument/2006/relationships">
+<p:sld xmlns:a="http://schemas.openxmlformats.org/drawingml/2006/main" xmlns:r="http://schemas.openxmlformats.org/officeDocument/2006/relationships" xmlns:p="http://schemas.openxmlformats.org/presentationml/2006/main">
   <p:cSld>
     <p:spTree>
       <p:nvGrpSpPr>
@@ -7268,7 +11642,14 @@
         <p:cNvGrpSpPr/>
         <p:nvPr/>
       </p:nvGrpSpPr>
-      <p:grpSpPr/>
+      <p:grpSpPr>
+        <a:xfrm>
+          <a:off x="0" y="0"/>
+          <a:ext cx="0" cy="0"/>
+          <a:chOff x="0" y="0"/>
+          <a:chExt cx="0" cy="0"/>
+        </a:xfrm>
+      </p:grpSpPr>
       <p:sp>
         <p:nvSpPr>
           <p:cNvPr id="2" name="Rectangle 1"/>
@@ -7310,6 +11691,7 @@
           <a:lstStyle/>
           <a:p>
             <a:pPr algn="ctr"/>
+            <a:endParaRPr/>
           </a:p>
         </p:txBody>
       </p:sp>
@@ -7354,6 +11736,7 @@
           <a:lstStyle/>
           <a:p>
             <a:pPr algn="ctr"/>
+            <a:endParaRPr/>
           </a:p>
         </p:txBody>
       </p:sp>
@@ -7482,6 +11865,7 @@
           <a:lstStyle/>
           <a:p>
             <a:pPr algn="ctr"/>
+            <a:endParaRPr/>
           </a:p>
         </p:txBody>
       </p:sp>
@@ -7749,7 +12133,7 @@
 </file>
 
 <file path=ppt/slides/slide17.xml><?xml version="1.0" encoding="utf-8"?>
-<p:sld xmlns:a="http://schemas.openxmlformats.org/drawingml/2006/main" xmlns:p="http://schemas.openxmlformats.org/presentationml/2006/main" xmlns:r="http://schemas.openxmlformats.org/officeDocument/2006/relationships">
+<p:sld xmlns:a="http://schemas.openxmlformats.org/drawingml/2006/main" xmlns:r="http://schemas.openxmlformats.org/officeDocument/2006/relationships" xmlns:p="http://schemas.openxmlformats.org/presentationml/2006/main">
   <p:cSld>
     <p:spTree>
       <p:nvGrpSpPr>
@@ -7757,7 +12141,14 @@
         <p:cNvGrpSpPr/>
         <p:nvPr/>
       </p:nvGrpSpPr>
-      <p:grpSpPr/>
+      <p:grpSpPr>
+        <a:xfrm>
+          <a:off x="0" y="0"/>
+          <a:ext cx="0" cy="0"/>
+          <a:chOff x="0" y="0"/>
+          <a:chExt cx="0" cy="0"/>
+        </a:xfrm>
+      </p:grpSpPr>
       <p:sp>
         <p:nvSpPr>
           <p:cNvPr id="2" name="Rectangle 1"/>
@@ -7799,6 +12190,7 @@
           <a:lstStyle/>
           <a:p>
             <a:pPr algn="ctr"/>
+            <a:endParaRPr/>
           </a:p>
         </p:txBody>
       </p:sp>
@@ -7843,6 +12235,7 @@
           <a:lstStyle/>
           <a:p>
             <a:pPr algn="ctr"/>
+            <a:endParaRPr/>
           </a:p>
         </p:txBody>
       </p:sp>
@@ -7971,6 +12364,7 @@
           <a:lstStyle/>
           <a:p>
             <a:pPr algn="ctr"/>
+            <a:endParaRPr/>
           </a:p>
         </p:txBody>
       </p:sp>
@@ -8216,7 +12610,7 @@
                 </a:solidFill>
                 <a:latin typeface="Calibri"/>
               </a:rPr>
-              <a:t>SARWAR, B. et al. Item-based collaborative filtering recommendation algorithms. In: WWW, 2001. p. 285-299.</a:t>
+              <a:t>SARWAR, B. et al. Item-based collaborative filtering recommendation algorithms. In: WWW, 2001. p. 285-295.</a:t>
             </a:r>
           </a:p>
           <a:p>
@@ -8356,7 +12750,7 @@
 </file>
 
 <file path=ppt/slides/slide18.xml><?xml version="1.0" encoding="utf-8"?>
-<p:sld xmlns:a="http://schemas.openxmlformats.org/drawingml/2006/main" xmlns:p="http://schemas.openxmlformats.org/presentationml/2006/main" xmlns:r="http://schemas.openxmlformats.org/officeDocument/2006/relationships">
+<p:sld xmlns:a="http://schemas.openxmlformats.org/drawingml/2006/main" xmlns:r="http://schemas.openxmlformats.org/officeDocument/2006/relationships" xmlns:p="http://schemas.openxmlformats.org/presentationml/2006/main">
   <p:cSld>
     <p:spTree>
       <p:nvGrpSpPr>
@@ -8364,7 +12758,14 @@
         <p:cNvGrpSpPr/>
         <p:nvPr/>
       </p:nvGrpSpPr>
-      <p:grpSpPr/>
+      <p:grpSpPr>
+        <a:xfrm>
+          <a:off x="0" y="0"/>
+          <a:ext cx="0" cy="0"/>
+          <a:chOff x="0" y="0"/>
+          <a:chExt cx="0" cy="0"/>
+        </a:xfrm>
+      </p:grpSpPr>
       <p:sp>
         <p:nvSpPr>
           <p:cNvPr id="2" name="Rectangle 1"/>
@@ -8406,6 +12807,7 @@
           <a:lstStyle/>
           <a:p>
             <a:pPr algn="ctr"/>
+            <a:endParaRPr/>
           </a:p>
         </p:txBody>
       </p:sp>
@@ -8450,6 +12852,7 @@
           <a:lstStyle/>
           <a:p>
             <a:pPr algn="ctr"/>
+            <a:endParaRPr/>
           </a:p>
         </p:txBody>
       </p:sp>
@@ -8584,7 +12987,7 @@
 </file>
 
 <file path=ppt/slides/slide2.xml><?xml version="1.0" encoding="utf-8"?>
-<p:sld xmlns:a="http://schemas.openxmlformats.org/drawingml/2006/main" xmlns:p="http://schemas.openxmlformats.org/presentationml/2006/main" xmlns:r="http://schemas.openxmlformats.org/officeDocument/2006/relationships">
+<p:sld xmlns:a="http://schemas.openxmlformats.org/drawingml/2006/main" xmlns:r="http://schemas.openxmlformats.org/officeDocument/2006/relationships" xmlns:p="http://schemas.openxmlformats.org/presentationml/2006/main">
   <p:cSld>
     <p:spTree>
       <p:nvGrpSpPr>
@@ -8592,7 +12995,14 @@
         <p:cNvGrpSpPr/>
         <p:nvPr/>
       </p:nvGrpSpPr>
-      <p:grpSpPr/>
+      <p:grpSpPr>
+        <a:xfrm>
+          <a:off x="0" y="0"/>
+          <a:ext cx="0" cy="0"/>
+          <a:chOff x="0" y="0"/>
+          <a:chExt cx="0" cy="0"/>
+        </a:xfrm>
+      </p:grpSpPr>
       <p:sp>
         <p:nvSpPr>
           <p:cNvPr id="2" name="Rectangle 1"/>
@@ -8634,6 +13044,7 @@
           <a:lstStyle/>
           <a:p>
             <a:pPr algn="ctr"/>
+            <a:endParaRPr/>
           </a:p>
         </p:txBody>
       </p:sp>
@@ -8678,6 +13089,7 @@
           <a:lstStyle/>
           <a:p>
             <a:pPr algn="ctr"/>
+            <a:endParaRPr/>
           </a:p>
         </p:txBody>
       </p:sp>
@@ -8806,6 +13218,7 @@
           <a:lstStyle/>
           <a:p>
             <a:pPr algn="ctr"/>
+            <a:endParaRPr/>
           </a:p>
         </p:txBody>
       </p:sp>
@@ -8902,7 +13315,7 @@
         <p:spPr>
           <a:xfrm>
             <a:off x="640080" y="1645920"/>
-            <a:ext cx="10972800" cy="4846320"/>
+            <a:ext cx="10972800" cy="3877985"/>
           </a:xfrm>
           <a:prstGeom prst="rect">
             <a:avLst/>
@@ -8924,23 +13337,74 @@
               </a:spcAft>
             </a:pPr>
             <a:r>
-              <a:rPr sz="2200" b="1">
+              <a:rPr lang="pt-BR" sz="2200" b="1" dirty="0">
                 <a:solidFill>
                   <a:srgbClr val="C8A04B"/>
                 </a:solidFill>
                 <a:latin typeface="Calibri"/>
               </a:rPr>
-              <a:t>•  </a:t>
-            </a:r>
-            <a:r>
-              <a:rPr sz="2200" b="0">
+              <a:t>1</a:t>
+            </a:r>
+            <a:r>
+              <a:rPr sz="2200" b="1" dirty="0">
+                <a:solidFill>
+                  <a:srgbClr val="C8A04B"/>
+                </a:solidFill>
+                <a:latin typeface="Calibri"/>
+              </a:rPr>
+              <a:t>  </a:t>
+            </a:r>
+            <a:r>
+              <a:rPr sz="2200" b="0" dirty="0" err="1">
                 <a:solidFill>
                   <a:srgbClr val="1A232E"/>
                 </a:solidFill>
                 <a:latin typeface="Calibri"/>
               </a:rPr>
-              <a:t>Contexto e problema de pesquisa</a:t>
-            </a:r>
+              <a:t>Contexto</a:t>
+            </a:r>
+            <a:r>
+              <a:rPr sz="2200" b="0" dirty="0">
+                <a:solidFill>
+                  <a:srgbClr val="1A232E"/>
+                </a:solidFill>
+                <a:latin typeface="Calibri"/>
+              </a:rPr>
+              <a:t> e </a:t>
+            </a:r>
+            <a:r>
+              <a:rPr sz="2200" b="0" dirty="0" err="1">
+                <a:solidFill>
+                  <a:srgbClr val="1A232E"/>
+                </a:solidFill>
+                <a:latin typeface="Calibri"/>
+              </a:rPr>
+              <a:t>problema</a:t>
+            </a:r>
+            <a:r>
+              <a:rPr sz="2200" b="0" dirty="0">
+                <a:solidFill>
+                  <a:srgbClr val="1A232E"/>
+                </a:solidFill>
+                <a:latin typeface="Calibri"/>
+              </a:rPr>
+              <a:t> de </a:t>
+            </a:r>
+            <a:r>
+              <a:rPr sz="2200" b="0" dirty="0" err="1">
+                <a:solidFill>
+                  <a:srgbClr val="1A232E"/>
+                </a:solidFill>
+                <a:latin typeface="Calibri"/>
+              </a:rPr>
+              <a:t>pesquisa</a:t>
+            </a:r>
+            <a:endParaRPr sz="2200" b="0" dirty="0">
+              <a:solidFill>
+                <a:srgbClr val="1A232E"/>
+              </a:solidFill>
+              <a:latin typeface="Calibri"/>
+            </a:endParaRPr>
           </a:p>
           <a:p>
             <a:pPr algn="l">
@@ -8952,23 +13416,74 @@
               </a:spcAft>
             </a:pPr>
             <a:r>
-              <a:rPr sz="2200" b="1">
+              <a:rPr lang="pt-BR" sz="2200" b="1" dirty="0">
                 <a:solidFill>
                   <a:srgbClr val="C8A04B"/>
                 </a:solidFill>
                 <a:latin typeface="Calibri"/>
               </a:rPr>
-              <a:t>•  </a:t>
-            </a:r>
-            <a:r>
-              <a:rPr sz="2200" b="0">
+              <a:t>2</a:t>
+            </a:r>
+            <a:r>
+              <a:rPr sz="2200" b="1" dirty="0">
+                <a:solidFill>
+                  <a:srgbClr val="C8A04B"/>
+                </a:solidFill>
+                <a:latin typeface="Calibri"/>
+              </a:rPr>
+              <a:t>  </a:t>
+            </a:r>
+            <a:r>
+              <a:rPr sz="2200" b="0" dirty="0" err="1">
                 <a:solidFill>
                   <a:srgbClr val="1A232E"/>
                 </a:solidFill>
                 <a:latin typeface="Calibri"/>
               </a:rPr>
-              <a:t>Pergunta, hipótese e objetivos</a:t>
-            </a:r>
+              <a:t>Pergunta</a:t>
+            </a:r>
+            <a:r>
+              <a:rPr sz="2200" b="0" dirty="0">
+                <a:solidFill>
+                  <a:srgbClr val="1A232E"/>
+                </a:solidFill>
+                <a:latin typeface="Calibri"/>
+              </a:rPr>
+              <a:t>, </a:t>
+            </a:r>
+            <a:r>
+              <a:rPr sz="2200" b="0" dirty="0" err="1">
+                <a:solidFill>
+                  <a:srgbClr val="1A232E"/>
+                </a:solidFill>
+                <a:latin typeface="Calibri"/>
+              </a:rPr>
+              <a:t>hipótese</a:t>
+            </a:r>
+            <a:r>
+              <a:rPr sz="2200" b="0" dirty="0">
+                <a:solidFill>
+                  <a:srgbClr val="1A232E"/>
+                </a:solidFill>
+                <a:latin typeface="Calibri"/>
+              </a:rPr>
+              <a:t> e </a:t>
+            </a:r>
+            <a:r>
+              <a:rPr sz="2200" b="0" dirty="0" err="1">
+                <a:solidFill>
+                  <a:srgbClr val="1A232E"/>
+                </a:solidFill>
+                <a:latin typeface="Calibri"/>
+              </a:rPr>
+              <a:t>objetivos</a:t>
+            </a:r>
+            <a:endParaRPr sz="2200" b="0" dirty="0">
+              <a:solidFill>
+                <a:srgbClr val="1A232E"/>
+              </a:solidFill>
+              <a:latin typeface="Calibri"/>
+            </a:endParaRPr>
           </a:p>
           <a:p>
             <a:pPr algn="l">
@@ -8980,23 +13495,74 @@
               </a:spcAft>
             </a:pPr>
             <a:r>
-              <a:rPr sz="2200" b="1">
+              <a:rPr lang="pt-BR" sz="2200" b="1" dirty="0">
                 <a:solidFill>
                   <a:srgbClr val="C8A04B"/>
                 </a:solidFill>
                 <a:latin typeface="Calibri"/>
               </a:rPr>
-              <a:t>•  </a:t>
-            </a:r>
-            <a:r>
-              <a:rPr sz="2200" b="0">
+              <a:t>3</a:t>
+            </a:r>
+            <a:r>
+              <a:rPr sz="2200" b="1" dirty="0">
+                <a:solidFill>
+                  <a:srgbClr val="C8A04B"/>
+                </a:solidFill>
+                <a:latin typeface="Calibri"/>
+              </a:rPr>
+              <a:t>  </a:t>
+            </a:r>
+            <a:r>
+              <a:rPr sz="2200" b="0" dirty="0" err="1">
                 <a:solidFill>
                   <a:srgbClr val="1A232E"/>
                 </a:solidFill>
                 <a:latin typeface="Calibri"/>
               </a:rPr>
-              <a:t>Fundamentação: regras de associação</a:t>
-            </a:r>
+              <a:t>Fundamentação</a:t>
+            </a:r>
+            <a:r>
+              <a:rPr sz="2200" b="0" dirty="0">
+                <a:solidFill>
+                  <a:srgbClr val="1A232E"/>
+                </a:solidFill>
+                <a:latin typeface="Calibri"/>
+              </a:rPr>
+              <a:t>: </a:t>
+            </a:r>
+            <a:r>
+              <a:rPr sz="2200" b="0" dirty="0" err="1">
+                <a:solidFill>
+                  <a:srgbClr val="1A232E"/>
+                </a:solidFill>
+                <a:latin typeface="Calibri"/>
+              </a:rPr>
+              <a:t>regras</a:t>
+            </a:r>
+            <a:r>
+              <a:rPr sz="2200" b="0" dirty="0">
+                <a:solidFill>
+                  <a:srgbClr val="1A232E"/>
+                </a:solidFill>
+                <a:latin typeface="Calibri"/>
+              </a:rPr>
+              <a:t> de </a:t>
+            </a:r>
+            <a:r>
+              <a:rPr sz="2200" b="0" dirty="0" err="1">
+                <a:solidFill>
+                  <a:srgbClr val="1A232E"/>
+                </a:solidFill>
+                <a:latin typeface="Calibri"/>
+              </a:rPr>
+              <a:t>associação</a:t>
+            </a:r>
+            <a:endParaRPr sz="2200" b="0" dirty="0">
+              <a:solidFill>
+                <a:srgbClr val="1A232E"/>
+              </a:solidFill>
+              <a:latin typeface="Calibri"/>
+            </a:endParaRPr>
           </a:p>
           <a:p>
             <a:pPr algn="l">
@@ -9008,22 +13574,40 @@
               </a:spcAft>
             </a:pPr>
             <a:r>
-              <a:rPr sz="2200" b="1">
+              <a:rPr lang="pt-BR" sz="2200" b="1" dirty="0">
                 <a:solidFill>
                   <a:srgbClr val="C8A04B"/>
                 </a:solidFill>
                 <a:latin typeface="Calibri"/>
               </a:rPr>
-              <a:t>•  </a:t>
-            </a:r>
-            <a:r>
-              <a:rPr sz="2200" b="0">
+              <a:t>4</a:t>
+            </a:r>
+            <a:r>
+              <a:rPr sz="2200" b="1" dirty="0">
+                <a:solidFill>
+                  <a:srgbClr val="C8A04B"/>
+                </a:solidFill>
+                <a:latin typeface="Calibri"/>
+              </a:rPr>
+              <a:t>  </a:t>
+            </a:r>
+            <a:r>
+              <a:rPr sz="2200" b="0" dirty="0" err="1">
                 <a:solidFill>
                   <a:srgbClr val="1A232E"/>
                 </a:solidFill>
                 <a:latin typeface="Calibri"/>
               </a:rPr>
-              <a:t>Metodologia e dados reais</a:t>
+              <a:t>Metodologia</a:t>
+            </a:r>
+            <a:r>
+              <a:rPr sz="2200" b="0" dirty="0">
+                <a:solidFill>
+                  <a:srgbClr val="1A232E"/>
+                </a:solidFill>
+                <a:latin typeface="Calibri"/>
+              </a:rPr>
+              <a:t> e dados reais</a:t>
             </a:r>
           </a:p>
           <a:p>
@@ -9036,23 +13620,56 @@
               </a:spcAft>
             </a:pPr>
             <a:r>
-              <a:rPr sz="2200" b="1">
+              <a:rPr lang="pt-BR" sz="2200" b="1" dirty="0">
                 <a:solidFill>
                   <a:srgbClr val="C8A04B"/>
                 </a:solidFill>
                 <a:latin typeface="Calibri"/>
               </a:rPr>
-              <a:t>•  </a:t>
-            </a:r>
-            <a:r>
-              <a:rPr sz="2200" b="0">
+              <a:t>5</a:t>
+            </a:r>
+            <a:r>
+              <a:rPr sz="2200" b="1" dirty="0">
+                <a:solidFill>
+                  <a:srgbClr val="C8A04B"/>
+                </a:solidFill>
+                <a:latin typeface="Calibri"/>
+              </a:rPr>
+              <a:t>  </a:t>
+            </a:r>
+            <a:r>
+              <a:rPr sz="2200" b="0" dirty="0" err="1">
                 <a:solidFill>
                   <a:srgbClr val="1A232E"/>
                 </a:solidFill>
                 <a:latin typeface="Calibri"/>
               </a:rPr>
-              <a:t>Arquitetura do sistema</a:t>
-            </a:r>
+              <a:t>Arquitetura</a:t>
+            </a:r>
+            <a:r>
+              <a:rPr sz="2200" b="0" dirty="0">
+                <a:solidFill>
+                  <a:srgbClr val="1A232E"/>
+                </a:solidFill>
+                <a:latin typeface="Calibri"/>
+              </a:rPr>
+              <a:t> do </a:t>
+            </a:r>
+            <a:r>
+              <a:rPr sz="2200" b="0" dirty="0" err="1">
+                <a:solidFill>
+                  <a:srgbClr val="1A232E"/>
+                </a:solidFill>
+                <a:latin typeface="Calibri"/>
+              </a:rPr>
+              <a:t>sistema</a:t>
+            </a:r>
+            <a:endParaRPr sz="2200" b="0" dirty="0">
+              <a:solidFill>
+                <a:srgbClr val="1A232E"/>
+              </a:solidFill>
+              <a:latin typeface="Calibri"/>
+            </a:endParaRPr>
           </a:p>
           <a:p>
             <a:pPr algn="l">
@@ -9064,22 +13681,58 @@
               </a:spcAft>
             </a:pPr>
             <a:r>
-              <a:rPr sz="2200" b="1">
+              <a:rPr lang="pt-BR" sz="2200" b="1" dirty="0">
                 <a:solidFill>
                   <a:srgbClr val="C8A04B"/>
                 </a:solidFill>
                 <a:latin typeface="Calibri"/>
               </a:rPr>
-              <a:t>•  </a:t>
-            </a:r>
-            <a:r>
-              <a:rPr sz="2200" b="0">
+              <a:t>6</a:t>
+            </a:r>
+            <a:r>
+              <a:rPr sz="2200" b="1" dirty="0">
+                <a:solidFill>
+                  <a:srgbClr val="C8A04B"/>
+                </a:solidFill>
+                <a:latin typeface="Calibri"/>
+              </a:rPr>
+              <a:t>  </a:t>
+            </a:r>
+            <a:r>
+              <a:rPr sz="2200" b="0" dirty="0" err="1">
                 <a:solidFill>
                   <a:srgbClr val="1A232E"/>
                 </a:solidFill>
                 <a:latin typeface="Calibri"/>
               </a:rPr>
-              <a:t>Protocolo de validação (LOOCV)</a:t>
+              <a:t>Protocolo</a:t>
+            </a:r>
+            <a:r>
+              <a:rPr sz="2200" b="0" dirty="0">
+                <a:solidFill>
+                  <a:srgbClr val="1A232E"/>
+                </a:solidFill>
+                <a:latin typeface="Calibri"/>
+              </a:rPr>
+              <a:t> de </a:t>
+            </a:r>
+            <a:r>
+              <a:rPr sz="2200" b="0" dirty="0" err="1">
+                <a:solidFill>
+                  <a:srgbClr val="1A232E"/>
+                </a:solidFill>
+                <a:latin typeface="Calibri"/>
+              </a:rPr>
+              <a:t>validação</a:t>
+            </a:r>
+            <a:r>
+              <a:rPr sz="2200" b="0" dirty="0">
+                <a:solidFill>
+                  <a:srgbClr val="1A232E"/>
+                </a:solidFill>
+                <a:latin typeface="Calibri"/>
+              </a:rPr>
+              <a:t> (LOOCV)</a:t>
             </a:r>
           </a:p>
           <a:p>
@@ -9092,23 +13745,56 @@
               </a:spcAft>
             </a:pPr>
             <a:r>
-              <a:rPr sz="2200" b="1">
+              <a:rPr lang="pt-BR" sz="2200" b="1" dirty="0">
                 <a:solidFill>
                   <a:srgbClr val="C8A04B"/>
                 </a:solidFill>
                 <a:latin typeface="Calibri"/>
               </a:rPr>
-              <a:t>•  </a:t>
-            </a:r>
-            <a:r>
-              <a:rPr sz="2200" b="0">
+              <a:t>7</a:t>
+            </a:r>
+            <a:r>
+              <a:rPr sz="2200" b="1" dirty="0">
+                <a:solidFill>
+                  <a:srgbClr val="C8A04B"/>
+                </a:solidFill>
+                <a:latin typeface="Calibri"/>
+              </a:rPr>
+              <a:t>  </a:t>
+            </a:r>
+            <a:r>
+              <a:rPr sz="2200" b="0" dirty="0" err="1">
                 <a:solidFill>
                   <a:srgbClr val="1A232E"/>
                 </a:solidFill>
                 <a:latin typeface="Calibri"/>
               </a:rPr>
-              <a:t>Resultados e discussão</a:t>
-            </a:r>
+              <a:t>Resultados</a:t>
+            </a:r>
+            <a:r>
+              <a:rPr sz="2200" b="0" dirty="0">
+                <a:solidFill>
+                  <a:srgbClr val="1A232E"/>
+                </a:solidFill>
+                <a:latin typeface="Calibri"/>
+              </a:rPr>
+              <a:t> e </a:t>
+            </a:r>
+            <a:r>
+              <a:rPr sz="2200" b="0" dirty="0" err="1">
+                <a:solidFill>
+                  <a:srgbClr val="1A232E"/>
+                </a:solidFill>
+                <a:latin typeface="Calibri"/>
+              </a:rPr>
+              <a:t>discussão</a:t>
+            </a:r>
+            <a:endParaRPr sz="2200" b="0" dirty="0">
+              <a:solidFill>
+                <a:srgbClr val="1A232E"/>
+              </a:solidFill>
+              <a:latin typeface="Calibri"/>
+            </a:endParaRPr>
           </a:p>
           <a:p>
             <a:pPr algn="l">
@@ -9120,23 +13806,74 @@
               </a:spcAft>
             </a:pPr>
             <a:r>
-              <a:rPr sz="2200" b="1">
+              <a:rPr lang="pt-BR" sz="2200" b="1" dirty="0">
                 <a:solidFill>
                   <a:srgbClr val="C8A04B"/>
                 </a:solidFill>
                 <a:latin typeface="Calibri"/>
               </a:rPr>
-              <a:t>•  </a:t>
-            </a:r>
-            <a:r>
-              <a:rPr sz="2200" b="0">
+              <a:t>8</a:t>
+            </a:r>
+            <a:r>
+              <a:rPr sz="2200" b="1" dirty="0">
+                <a:solidFill>
+                  <a:srgbClr val="C8A04B"/>
+                </a:solidFill>
+                <a:latin typeface="Calibri"/>
+              </a:rPr>
+              <a:t>  </a:t>
+            </a:r>
+            <a:r>
+              <a:rPr sz="2200" b="0" dirty="0" err="1">
                 <a:solidFill>
                   <a:srgbClr val="1A232E"/>
                 </a:solidFill>
                 <a:latin typeface="Calibri"/>
               </a:rPr>
-              <a:t>Conclusão e trabalhos futuros</a:t>
-            </a:r>
+              <a:t>Conclusão</a:t>
+            </a:r>
+            <a:r>
+              <a:rPr sz="2200" b="0" dirty="0">
+                <a:solidFill>
+                  <a:srgbClr val="1A232E"/>
+                </a:solidFill>
+                <a:latin typeface="Calibri"/>
+              </a:rPr>
+              <a:t> e </a:t>
+            </a:r>
+            <a:r>
+              <a:rPr sz="2200" b="0" dirty="0" err="1">
+                <a:solidFill>
+                  <a:srgbClr val="1A232E"/>
+                </a:solidFill>
+                <a:latin typeface="Calibri"/>
+              </a:rPr>
+              <a:t>trabalhos</a:t>
+            </a:r>
+            <a:r>
+              <a:rPr sz="2200" b="0" dirty="0">
+                <a:solidFill>
+                  <a:srgbClr val="1A232E"/>
+                </a:solidFill>
+                <a:latin typeface="Calibri"/>
+              </a:rPr>
+              <a:t> </a:t>
+            </a:r>
+            <a:r>
+              <a:rPr sz="2200" b="0" dirty="0" err="1">
+                <a:solidFill>
+                  <a:srgbClr val="1A232E"/>
+                </a:solidFill>
+                <a:latin typeface="Calibri"/>
+              </a:rPr>
+              <a:t>futuros</a:t>
+            </a:r>
+            <a:endParaRPr sz="2200" b="0" dirty="0">
+              <a:solidFill>
+                <a:srgbClr val="1A232E"/>
+              </a:solidFill>
+              <a:latin typeface="Calibri"/>
+            </a:endParaRPr>
           </a:p>
         </p:txBody>
       </p:sp>
@@ -9149,7 +13886,7 @@
 </file>
 
 <file path=ppt/slides/slide3.xml><?xml version="1.0" encoding="utf-8"?>
-<p:sld xmlns:a="http://schemas.openxmlformats.org/drawingml/2006/main" xmlns:p="http://schemas.openxmlformats.org/presentationml/2006/main" xmlns:r="http://schemas.openxmlformats.org/officeDocument/2006/relationships">
+<p:sld xmlns:a="http://schemas.openxmlformats.org/drawingml/2006/main" xmlns:r="http://schemas.openxmlformats.org/officeDocument/2006/relationships" xmlns:p="http://schemas.openxmlformats.org/presentationml/2006/main">
   <p:cSld>
     <p:spTree>
       <p:nvGrpSpPr>
@@ -9157,7 +13894,14 @@
         <p:cNvGrpSpPr/>
         <p:nvPr/>
       </p:nvGrpSpPr>
-      <p:grpSpPr/>
+      <p:grpSpPr>
+        <a:xfrm>
+          <a:off x="0" y="0"/>
+          <a:ext cx="0" cy="0"/>
+          <a:chOff x="0" y="0"/>
+          <a:chExt cx="0" cy="0"/>
+        </a:xfrm>
+      </p:grpSpPr>
       <p:sp>
         <p:nvSpPr>
           <p:cNvPr id="2" name="Rectangle 1"/>
@@ -9199,6 +13943,7 @@
           <a:lstStyle/>
           <a:p>
             <a:pPr algn="ctr"/>
+            <a:endParaRPr/>
           </a:p>
         </p:txBody>
       </p:sp>
@@ -9243,6 +13988,7 @@
           <a:lstStyle/>
           <a:p>
             <a:pPr algn="ctr"/>
+            <a:endParaRPr/>
           </a:p>
         </p:txBody>
       </p:sp>
@@ -9371,6 +14117,7 @@
           <a:lstStyle/>
           <a:p>
             <a:pPr algn="ctr"/>
+            <a:endParaRPr/>
           </a:p>
         </p:txBody>
       </p:sp>
@@ -9767,7 +14514,7 @@
 </file>
 
 <file path=ppt/slides/slide4.xml><?xml version="1.0" encoding="utf-8"?>
-<p:sld xmlns:a="http://schemas.openxmlformats.org/drawingml/2006/main" xmlns:p="http://schemas.openxmlformats.org/presentationml/2006/main" xmlns:r="http://schemas.openxmlformats.org/officeDocument/2006/relationships">
+<p:sld xmlns:a="http://schemas.openxmlformats.org/drawingml/2006/main" xmlns:r="http://schemas.openxmlformats.org/officeDocument/2006/relationships" xmlns:p="http://schemas.openxmlformats.org/presentationml/2006/main">
   <p:cSld>
     <p:spTree>
       <p:nvGrpSpPr>
@@ -9775,7 +14522,14 @@
         <p:cNvGrpSpPr/>
         <p:nvPr/>
       </p:nvGrpSpPr>
-      <p:grpSpPr/>
+      <p:grpSpPr>
+        <a:xfrm>
+          <a:off x="0" y="0"/>
+          <a:ext cx="0" cy="0"/>
+          <a:chOff x="0" y="0"/>
+          <a:chExt cx="0" cy="0"/>
+        </a:xfrm>
+      </p:grpSpPr>
       <p:sp>
         <p:nvSpPr>
           <p:cNvPr id="2" name="Rectangle 1"/>
@@ -9817,6 +14571,7 @@
           <a:lstStyle/>
           <a:p>
             <a:pPr algn="ctr"/>
+            <a:endParaRPr/>
           </a:p>
         </p:txBody>
       </p:sp>
@@ -9861,6 +14616,7 @@
           <a:lstStyle/>
           <a:p>
             <a:pPr algn="ctr"/>
+            <a:endParaRPr/>
           </a:p>
         </p:txBody>
       </p:sp>
@@ -9989,6 +14745,7 @@
           <a:lstStyle/>
           <a:p>
             <a:pPr algn="ctr"/>
+            <a:endParaRPr/>
           </a:p>
         </p:txBody>
       </p:sp>
@@ -10117,6 +14874,7 @@
           <a:lstStyle/>
           <a:p>
             <a:pPr algn="ctr"/>
+            <a:endParaRPr/>
           </a:p>
         </p:txBody>
       </p:sp>
@@ -10306,7 +15064,7 @@
 </file>
 
 <file path=ppt/slides/slide5.xml><?xml version="1.0" encoding="utf-8"?>
-<p:sld xmlns:a="http://schemas.openxmlformats.org/drawingml/2006/main" xmlns:p="http://schemas.openxmlformats.org/presentationml/2006/main" xmlns:r="http://schemas.openxmlformats.org/officeDocument/2006/relationships">
+<p:sld xmlns:a="http://schemas.openxmlformats.org/drawingml/2006/main" xmlns:r="http://schemas.openxmlformats.org/officeDocument/2006/relationships" xmlns:p="http://schemas.openxmlformats.org/presentationml/2006/main">
   <p:cSld>
     <p:spTree>
       <p:nvGrpSpPr>
@@ -10314,7 +15072,14 @@
         <p:cNvGrpSpPr/>
         <p:nvPr/>
       </p:nvGrpSpPr>
-      <p:grpSpPr/>
+      <p:grpSpPr>
+        <a:xfrm>
+          <a:off x="0" y="0"/>
+          <a:ext cx="0" cy="0"/>
+          <a:chOff x="0" y="0"/>
+          <a:chExt cx="0" cy="0"/>
+        </a:xfrm>
+      </p:grpSpPr>
       <p:sp>
         <p:nvSpPr>
           <p:cNvPr id="2" name="Rectangle 1"/>
@@ -10356,6 +15121,7 @@
           <a:lstStyle/>
           <a:p>
             <a:pPr algn="ctr"/>
+            <a:endParaRPr/>
           </a:p>
         </p:txBody>
       </p:sp>
@@ -10400,6 +15166,7 @@
           <a:lstStyle/>
           <a:p>
             <a:pPr algn="ctr"/>
+            <a:endParaRPr/>
           </a:p>
         </p:txBody>
       </p:sp>
@@ -10528,6 +15295,7 @@
           <a:lstStyle/>
           <a:p>
             <a:pPr algn="ctr"/>
+            <a:endParaRPr/>
           </a:p>
         </p:txBody>
       </p:sp>
@@ -10908,7 +15676,7 @@
 </file>
 
 <file path=ppt/slides/slide6.xml><?xml version="1.0" encoding="utf-8"?>
-<p:sld xmlns:a="http://schemas.openxmlformats.org/drawingml/2006/main" xmlns:p="http://schemas.openxmlformats.org/presentationml/2006/main" xmlns:r="http://schemas.openxmlformats.org/officeDocument/2006/relationships">
+<p:sld xmlns:a="http://schemas.openxmlformats.org/drawingml/2006/main" xmlns:r="http://schemas.openxmlformats.org/officeDocument/2006/relationships" xmlns:p="http://schemas.openxmlformats.org/presentationml/2006/main">
   <p:cSld>
     <p:spTree>
       <p:nvGrpSpPr>
@@ -10916,7 +15684,14 @@
         <p:cNvGrpSpPr/>
         <p:nvPr/>
       </p:nvGrpSpPr>
-      <p:grpSpPr/>
+      <p:grpSpPr>
+        <a:xfrm>
+          <a:off x="0" y="0"/>
+          <a:ext cx="0" cy="0"/>
+          <a:chOff x="0" y="0"/>
+          <a:chExt cx="0" cy="0"/>
+        </a:xfrm>
+      </p:grpSpPr>
       <p:sp>
         <p:nvSpPr>
           <p:cNvPr id="2" name="Rectangle 1"/>
@@ -10958,6 +15733,7 @@
           <a:lstStyle/>
           <a:p>
             <a:pPr algn="ctr"/>
+            <a:endParaRPr/>
           </a:p>
         </p:txBody>
       </p:sp>
@@ -11002,6 +15778,7 @@
           <a:lstStyle/>
           <a:p>
             <a:pPr algn="ctr"/>
+            <a:endParaRPr/>
           </a:p>
         </p:txBody>
       </p:sp>
@@ -11130,6 +15907,7 @@
           <a:lstStyle/>
           <a:p>
             <a:pPr algn="ctr"/>
+            <a:endParaRPr/>
           </a:p>
         </p:txBody>
       </p:sp>
@@ -11258,6 +16036,7 @@
           <a:lstStyle/>
           <a:p>
             <a:pPr algn="ctr"/>
+            <a:endParaRPr/>
           </a:p>
         </p:txBody>
       </p:sp>
@@ -11302,6 +16081,7 @@
           <a:lstStyle/>
           <a:p>
             <a:pPr algn="ctr"/>
+            <a:endParaRPr/>
           </a:p>
         </p:txBody>
       </p:sp>
@@ -11430,6 +16210,7 @@
           <a:lstStyle/>
           <a:p>
             <a:pPr algn="ctr"/>
+            <a:endParaRPr/>
           </a:p>
         </p:txBody>
       </p:sp>
@@ -11474,6 +16255,7 @@
           <a:lstStyle/>
           <a:p>
             <a:pPr algn="ctr"/>
+            <a:endParaRPr/>
           </a:p>
         </p:txBody>
       </p:sp>
@@ -11602,6 +16384,7 @@
           <a:lstStyle/>
           <a:p>
             <a:pPr algn="ctr"/>
+            <a:endParaRPr/>
           </a:p>
         </p:txBody>
       </p:sp>
@@ -11646,6 +16429,7 @@
           <a:lstStyle/>
           <a:p>
             <a:pPr algn="ctr"/>
+            <a:endParaRPr/>
           </a:p>
         </p:txBody>
       </p:sp>
@@ -11742,7 +16526,7 @@
 </file>
 
 <file path=ppt/slides/slide7.xml><?xml version="1.0" encoding="utf-8"?>
-<p:sld xmlns:a="http://schemas.openxmlformats.org/drawingml/2006/main" xmlns:p="http://schemas.openxmlformats.org/presentationml/2006/main" xmlns:r="http://schemas.openxmlformats.org/officeDocument/2006/relationships">
+<p:sld xmlns:a="http://schemas.openxmlformats.org/drawingml/2006/main" xmlns:r="http://schemas.openxmlformats.org/officeDocument/2006/relationships" xmlns:p="http://schemas.openxmlformats.org/presentationml/2006/main">
   <p:cSld>
     <p:spTree>
       <p:nvGrpSpPr>
@@ -11750,7 +16534,14 @@
         <p:cNvGrpSpPr/>
         <p:nvPr/>
       </p:nvGrpSpPr>
-      <p:grpSpPr/>
+      <p:grpSpPr>
+        <a:xfrm>
+          <a:off x="0" y="0"/>
+          <a:ext cx="0" cy="0"/>
+          <a:chOff x="0" y="0"/>
+          <a:chExt cx="0" cy="0"/>
+        </a:xfrm>
+      </p:grpSpPr>
       <p:sp>
         <p:nvSpPr>
           <p:cNvPr id="2" name="Rectangle 1"/>
@@ -11792,6 +16583,7 @@
           <a:lstStyle/>
           <a:p>
             <a:pPr algn="ctr"/>
+            <a:endParaRPr/>
           </a:p>
         </p:txBody>
       </p:sp>
@@ -11836,6 +16628,7 @@
           <a:lstStyle/>
           <a:p>
             <a:pPr algn="ctr"/>
+            <a:endParaRPr/>
           </a:p>
         </p:txBody>
       </p:sp>
@@ -11964,6 +16757,7 @@
           <a:lstStyle/>
           <a:p>
             <a:pPr algn="ctr"/>
+            <a:endParaRPr/>
           </a:p>
         </p:txBody>
       </p:sp>
@@ -12134,6 +16928,7 @@
           <a:lstStyle/>
           <a:p>
             <a:pPr algn="ctr"/>
+            <a:endParaRPr/>
           </a:p>
         </p:txBody>
       </p:sp>
@@ -12178,6 +16973,7 @@
           <a:lstStyle/>
           <a:p>
             <a:pPr algn="ctr"/>
+            <a:endParaRPr/>
           </a:p>
         </p:txBody>
       </p:sp>
@@ -12348,6 +17144,7 @@
           <a:lstStyle/>
           <a:p>
             <a:pPr algn="ctr"/>
+            <a:endParaRPr/>
           </a:p>
         </p:txBody>
       </p:sp>
@@ -12392,6 +17189,7 @@
           <a:lstStyle/>
           <a:p>
             <a:pPr algn="ctr"/>
+            <a:endParaRPr/>
           </a:p>
         </p:txBody>
       </p:sp>
@@ -12562,6 +17360,7 @@
           <a:lstStyle/>
           <a:p>
             <a:pPr algn="ctr"/>
+            <a:endParaRPr/>
           </a:p>
         </p:txBody>
       </p:sp>
@@ -12606,6 +17405,7 @@
           <a:lstStyle/>
           <a:p>
             <a:pPr algn="ctr"/>
+            <a:endParaRPr/>
           </a:p>
         </p:txBody>
       </p:sp>
@@ -12744,7 +17544,7 @@
 </file>
 
 <file path=ppt/slides/slide8.xml><?xml version="1.0" encoding="utf-8"?>
-<p:sld xmlns:a="http://schemas.openxmlformats.org/drawingml/2006/main" xmlns:p="http://schemas.openxmlformats.org/presentationml/2006/main" xmlns:r="http://schemas.openxmlformats.org/officeDocument/2006/relationships">
+<p:sld xmlns:a="http://schemas.openxmlformats.org/drawingml/2006/main" xmlns:r="http://schemas.openxmlformats.org/officeDocument/2006/relationships" xmlns:p="http://schemas.openxmlformats.org/presentationml/2006/main">
   <p:cSld>
     <p:spTree>
       <p:nvGrpSpPr>
@@ -12752,7 +17552,14 @@
         <p:cNvGrpSpPr/>
         <p:nvPr/>
       </p:nvGrpSpPr>
-      <p:grpSpPr/>
+      <p:grpSpPr>
+        <a:xfrm>
+          <a:off x="0" y="0"/>
+          <a:ext cx="0" cy="0"/>
+          <a:chOff x="0" y="0"/>
+          <a:chExt cx="0" cy="0"/>
+        </a:xfrm>
+      </p:grpSpPr>
       <p:sp>
         <p:nvSpPr>
           <p:cNvPr id="2" name="Rectangle 1"/>
@@ -12794,6 +17601,7 @@
           <a:lstStyle/>
           <a:p>
             <a:pPr algn="ctr"/>
+            <a:endParaRPr/>
           </a:p>
         </p:txBody>
       </p:sp>
@@ -12838,6 +17646,7 @@
           <a:lstStyle/>
           <a:p>
             <a:pPr algn="ctr"/>
+            <a:endParaRPr/>
           </a:p>
         </p:txBody>
       </p:sp>
@@ -12966,6 +17775,7 @@
           <a:lstStyle/>
           <a:p>
             <a:pPr algn="ctr"/>
+            <a:endParaRPr/>
           </a:p>
         </p:txBody>
       </p:sp>
@@ -13084,7 +17894,7 @@
               </a:spcAft>
             </a:pPr>
             <a:r>
-              <a:rPr sz="2000" b="1">
+              <a:rPr sz="2000" b="1" dirty="0">
                 <a:solidFill>
                   <a:srgbClr val="C8A04B"/>
                 </a:solidFill>
@@ -13093,22 +17903,166 @@
               <a:t>•  </a:t>
             </a:r>
             <a:r>
-              <a:rPr sz="2000" b="1">
+              <a:rPr sz="2000" b="1" dirty="0" err="1">
                 <a:solidFill>
                   <a:srgbClr val="0F1B2D"/>
                 </a:solidFill>
                 <a:latin typeface="Calibri"/>
               </a:rPr>
-              <a:t>Filtragem colaborativa</a:t>
-            </a:r>
-            <a:r>
-              <a:rPr sz="2000" b="0">
+              <a:t>Filtragem</a:t>
+            </a:r>
+            <a:r>
+              <a:rPr sz="2000" b="1" dirty="0">
+                <a:solidFill>
+                  <a:srgbClr val="0F1B2D"/>
+                </a:solidFill>
+                <a:latin typeface="Calibri"/>
+              </a:rPr>
+              <a:t> </a:t>
+            </a:r>
+            <a:r>
+              <a:rPr sz="2000" b="1" dirty="0" err="1">
+                <a:solidFill>
+                  <a:srgbClr val="0F1B2D"/>
+                </a:solidFill>
+                <a:latin typeface="Calibri"/>
+              </a:rPr>
+              <a:t>colaborativa</a:t>
+            </a:r>
+            <a:r>
+              <a:rPr sz="2000" b="0" dirty="0">
                 <a:solidFill>
                   <a:srgbClr val="1A232E"/>
                 </a:solidFill>
                 <a:latin typeface="Calibri"/>
               </a:rPr>
-              <a:t> exige matriz usuário-item densa → falha em B2B esparso.</a:t>
+              <a:t> </a:t>
+            </a:r>
+            <a:r>
+              <a:rPr sz="2000" b="0" dirty="0" err="1">
+                <a:solidFill>
+                  <a:srgbClr val="1A232E"/>
+                </a:solidFill>
+                <a:latin typeface="Calibri"/>
+              </a:rPr>
+              <a:t>exige</a:t>
+            </a:r>
+            <a:r>
+              <a:rPr sz="2000" b="0" dirty="0">
+                <a:solidFill>
+                  <a:srgbClr val="1A232E"/>
+                </a:solidFill>
+                <a:latin typeface="Calibri"/>
+              </a:rPr>
+              <a:t> </a:t>
+            </a:r>
+            <a:r>
+              <a:rPr sz="2000" b="0" dirty="0" err="1">
+                <a:solidFill>
+                  <a:srgbClr val="1A232E"/>
+                </a:solidFill>
+                <a:latin typeface="Calibri"/>
+              </a:rPr>
+              <a:t>matriz</a:t>
+            </a:r>
+            <a:r>
+              <a:rPr sz="2000" b="0" dirty="0">
+                <a:solidFill>
+                  <a:srgbClr val="1A232E"/>
+                </a:solidFill>
+                <a:latin typeface="Calibri"/>
+              </a:rPr>
+              <a:t> </a:t>
+            </a:r>
+            <a:r>
+              <a:rPr sz="2000" b="0" dirty="0" err="1">
+                <a:solidFill>
+                  <a:srgbClr val="1A232E"/>
+                </a:solidFill>
+                <a:latin typeface="Calibri"/>
+              </a:rPr>
+              <a:t>usuário</a:t>
+            </a:r>
+            <a:r>
+              <a:rPr sz="2000" b="0" dirty="0">
+                <a:solidFill>
+                  <a:srgbClr val="1A232E"/>
+                </a:solidFill>
+                <a:latin typeface="Calibri"/>
+              </a:rPr>
+              <a:t>-item </a:t>
+            </a:r>
+            <a:r>
+              <a:rPr sz="2000" b="0" dirty="0" err="1">
+                <a:solidFill>
+                  <a:srgbClr val="1A232E"/>
+                </a:solidFill>
+                <a:latin typeface="Calibri"/>
+              </a:rPr>
+              <a:t>densa</a:t>
+            </a:r>
+            <a:r>
+              <a:rPr sz="2000" b="0" dirty="0">
+                <a:solidFill>
+                  <a:srgbClr val="1A232E"/>
+                </a:solidFill>
+                <a:latin typeface="Calibri"/>
+              </a:rPr>
+              <a:t> → </a:t>
+            </a:r>
+            <a:r>
+              <a:rPr sz="2000" b="0" dirty="0" err="1">
+                <a:solidFill>
+                  <a:srgbClr val="1A232E"/>
+                </a:solidFill>
+                <a:latin typeface="Calibri"/>
+              </a:rPr>
+              <a:t>falha</a:t>
+            </a:r>
+            <a:r>
+              <a:rPr sz="2000" b="0" dirty="0">
+                <a:solidFill>
+                  <a:srgbClr val="1A232E"/>
+                </a:solidFill>
+                <a:latin typeface="Calibri"/>
+              </a:rPr>
+              <a:t> </a:t>
+            </a:r>
+            <a:r>
+              <a:rPr sz="2000" b="0" dirty="0" err="1">
+                <a:solidFill>
+                  <a:srgbClr val="1A232E"/>
+                </a:solidFill>
+                <a:latin typeface="Calibri"/>
+              </a:rPr>
+              <a:t>em</a:t>
+            </a:r>
+            <a:r>
+              <a:rPr sz="2000" b="0" dirty="0">
+                <a:solidFill>
+                  <a:srgbClr val="1A232E"/>
+                </a:solidFill>
+                <a:latin typeface="Calibri"/>
+              </a:rPr>
+              <a:t> B2B </a:t>
+            </a:r>
+            <a:r>
+              <a:rPr sz="2000" b="0" dirty="0" err="1">
+                <a:solidFill>
+                  <a:srgbClr val="1A232E"/>
+                </a:solidFill>
+                <a:latin typeface="Calibri"/>
+              </a:rPr>
+              <a:t>esparso</a:t>
+            </a:r>
+            <a:r>
+              <a:rPr sz="2000" b="0" dirty="0">
+                <a:solidFill>
+                  <a:srgbClr val="1A232E"/>
+                </a:solidFill>
+                <a:latin typeface="Calibri"/>
+              </a:rPr>
+              <a:t>.</a:t>
             </a:r>
           </a:p>
           <a:p>
@@ -13121,7 +18075,7 @@
               </a:spcAft>
             </a:pPr>
             <a:r>
-              <a:rPr sz="2000" b="1">
+              <a:rPr sz="2000" b="1" dirty="0">
                 <a:solidFill>
                   <a:srgbClr val="C8A04B"/>
                 </a:solidFill>
@@ -13130,7 +18084,7 @@
               <a:t>•  </a:t>
             </a:r>
             <a:r>
-              <a:rPr sz="2000" b="1">
+              <a:rPr sz="2000" b="1" dirty="0">
                 <a:solidFill>
                   <a:srgbClr val="0F1B2D"/>
                 </a:solidFill>
@@ -13139,13 +18093,139 @@
               <a:t>Cold start</a:t>
             </a:r>
             <a:r>
-              <a:rPr sz="2000" b="0">
+              <a:rPr sz="2000" b="0" dirty="0">
                 <a:solidFill>
                   <a:srgbClr val="1A232E"/>
                 </a:solidFill>
                 <a:latin typeface="Calibri"/>
               </a:rPr>
-              <a:t> e esparsidade são a regra, não a exceção, nesse cenário.</a:t>
+              <a:t> e </a:t>
+            </a:r>
+            <a:r>
+              <a:rPr sz="2000" b="0" dirty="0" err="1">
+                <a:solidFill>
+                  <a:srgbClr val="1A232E"/>
+                </a:solidFill>
+                <a:latin typeface="Calibri"/>
+              </a:rPr>
+              <a:t>esparsidade</a:t>
+            </a:r>
+            <a:r>
+              <a:rPr sz="2000" b="0" dirty="0">
+                <a:solidFill>
+                  <a:srgbClr val="1A232E"/>
+                </a:solidFill>
+                <a:latin typeface="Calibri"/>
+              </a:rPr>
+              <a:t> </a:t>
+            </a:r>
+            <a:r>
+              <a:rPr sz="2000" b="0" dirty="0" err="1">
+                <a:solidFill>
+                  <a:srgbClr val="1A232E"/>
+                </a:solidFill>
+                <a:latin typeface="Calibri"/>
+              </a:rPr>
+              <a:t>são</a:t>
+            </a:r>
+            <a:r>
+              <a:rPr sz="2000" b="0" dirty="0">
+                <a:solidFill>
+                  <a:srgbClr val="1A232E"/>
+                </a:solidFill>
+                <a:latin typeface="Calibri"/>
+              </a:rPr>
+              <a:t> a </a:t>
+            </a:r>
+            <a:r>
+              <a:rPr sz="2000" b="0" dirty="0" err="1">
+                <a:solidFill>
+                  <a:srgbClr val="1A232E"/>
+                </a:solidFill>
+                <a:latin typeface="Calibri"/>
+              </a:rPr>
+              <a:t>regra</a:t>
+            </a:r>
+            <a:r>
+              <a:rPr sz="2000" b="0" dirty="0">
+                <a:solidFill>
+                  <a:srgbClr val="1A232E"/>
+                </a:solidFill>
+                <a:latin typeface="Calibri"/>
+              </a:rPr>
+              <a:t>, </a:t>
+            </a:r>
+            <a:r>
+              <a:rPr sz="2000" b="0" dirty="0" err="1">
+                <a:solidFill>
+                  <a:srgbClr val="1A232E"/>
+                </a:solidFill>
+                <a:latin typeface="Calibri"/>
+              </a:rPr>
+              <a:t>não</a:t>
+            </a:r>
+            <a:r>
+              <a:rPr sz="2000" b="0" dirty="0">
+                <a:solidFill>
+                  <a:srgbClr val="1A232E"/>
+                </a:solidFill>
+                <a:latin typeface="Calibri"/>
+              </a:rPr>
+              <a:t> a </a:t>
+            </a:r>
+            <a:r>
+              <a:rPr sz="2000" b="0" dirty="0" err="1">
+                <a:solidFill>
+                  <a:srgbClr val="1A232E"/>
+                </a:solidFill>
+                <a:latin typeface="Calibri"/>
+              </a:rPr>
+              <a:t>exceção</a:t>
+            </a:r>
+            <a:r>
+              <a:rPr sz="2000" b="0" dirty="0">
+                <a:solidFill>
+                  <a:srgbClr val="1A232E"/>
+                </a:solidFill>
+                <a:latin typeface="Calibri"/>
+              </a:rPr>
+              <a:t>, </a:t>
+            </a:r>
+            <a:r>
+              <a:rPr sz="2000" b="0" dirty="0" err="1">
+                <a:solidFill>
+                  <a:srgbClr val="1A232E"/>
+                </a:solidFill>
+                <a:latin typeface="Calibri"/>
+              </a:rPr>
+              <a:t>nesse</a:t>
+            </a:r>
+            <a:r>
+              <a:rPr sz="2000" b="0" dirty="0">
+                <a:solidFill>
+                  <a:srgbClr val="1A232E"/>
+                </a:solidFill>
+                <a:latin typeface="Calibri"/>
+              </a:rPr>
+              <a:t> </a:t>
+            </a:r>
+            <a:r>
+              <a:rPr sz="2000" b="0" dirty="0" err="1">
+                <a:solidFill>
+                  <a:srgbClr val="1A232E"/>
+                </a:solidFill>
+                <a:latin typeface="Calibri"/>
+              </a:rPr>
+              <a:t>cenário</a:t>
+            </a:r>
+            <a:r>
+              <a:rPr sz="2000" b="0" dirty="0">
+                <a:solidFill>
+                  <a:srgbClr val="1A232E"/>
+                </a:solidFill>
+                <a:latin typeface="Calibri"/>
+              </a:rPr>
+              <a:t>.</a:t>
             </a:r>
           </a:p>
           <a:p>
@@ -13158,7 +18238,7 @@
               </a:spcAft>
             </a:pPr>
             <a:r>
-              <a:rPr sz="2000" b="1">
+              <a:rPr sz="2000" b="1" dirty="0">
                 <a:solidFill>
                   <a:srgbClr val="C8A04B"/>
                 </a:solidFill>
@@ -13167,25 +18247,133 @@
               <a:t>•  </a:t>
             </a:r>
             <a:r>
-              <a:rPr sz="2000" b="0">
+              <a:rPr sz="2000" b="0" dirty="0" err="1">
                 <a:solidFill>
                   <a:srgbClr val="1A232E"/>
                 </a:solidFill>
                 <a:latin typeface="Calibri"/>
               </a:rPr>
-              <a:t>Regras de associação operam direto sobre </a:t>
-            </a:r>
-            <a:r>
-              <a:rPr sz="2000" b="1">
+              <a:t>Regras</a:t>
+            </a:r>
+            <a:r>
+              <a:rPr sz="2000" b="0" dirty="0">
+                <a:solidFill>
+                  <a:srgbClr val="1A232E"/>
+                </a:solidFill>
+                <a:latin typeface="Calibri"/>
+              </a:rPr>
+              <a:t> de </a:t>
+            </a:r>
+            <a:r>
+              <a:rPr sz="2000" b="0" dirty="0" err="1">
+                <a:solidFill>
+                  <a:srgbClr val="1A232E"/>
+                </a:solidFill>
+                <a:latin typeface="Calibri"/>
+              </a:rPr>
+              <a:t>associação</a:t>
+            </a:r>
+            <a:r>
+              <a:rPr sz="2000" b="0" dirty="0">
+                <a:solidFill>
+                  <a:srgbClr val="1A232E"/>
+                </a:solidFill>
+                <a:latin typeface="Calibri"/>
+              </a:rPr>
+              <a:t> </a:t>
+            </a:r>
+            <a:r>
+              <a:rPr sz="2000" b="0" dirty="0" err="1">
+                <a:solidFill>
+                  <a:srgbClr val="1A232E"/>
+                </a:solidFill>
+                <a:latin typeface="Calibri"/>
+              </a:rPr>
+              <a:t>operam</a:t>
+            </a:r>
+            <a:r>
+              <a:rPr sz="2000" b="0" dirty="0">
+                <a:solidFill>
+                  <a:srgbClr val="1A232E"/>
+                </a:solidFill>
+                <a:latin typeface="Calibri"/>
+              </a:rPr>
+              <a:t> </a:t>
+            </a:r>
+            <a:r>
+              <a:rPr sz="2000" b="0" dirty="0" err="1">
+                <a:solidFill>
+                  <a:srgbClr val="1A232E"/>
+                </a:solidFill>
+                <a:latin typeface="Calibri"/>
+              </a:rPr>
+              <a:t>direto</a:t>
+            </a:r>
+            <a:r>
+              <a:rPr sz="2000" b="0" dirty="0">
+                <a:solidFill>
+                  <a:srgbClr val="1A232E"/>
+                </a:solidFill>
+                <a:latin typeface="Calibri"/>
+              </a:rPr>
+              <a:t> </a:t>
+            </a:r>
+            <a:r>
+              <a:rPr sz="2000" b="0" dirty="0" err="1">
+                <a:solidFill>
+                  <a:srgbClr val="1A232E"/>
+                </a:solidFill>
+                <a:latin typeface="Calibri"/>
+              </a:rPr>
+              <a:t>sobre</a:t>
+            </a:r>
+            <a:r>
+              <a:rPr sz="2000" b="0" dirty="0">
+                <a:solidFill>
+                  <a:srgbClr val="1A232E"/>
+                </a:solidFill>
+                <a:latin typeface="Calibri"/>
+              </a:rPr>
+              <a:t> </a:t>
+            </a:r>
+            <a:r>
+              <a:rPr sz="2000" b="1" dirty="0">
                 <a:solidFill>
                   <a:srgbClr val="0F1B2D"/>
                 </a:solidFill>
                 <a:latin typeface="Calibri"/>
               </a:rPr>
-              <a:t>coocorrência em transações</a:t>
-            </a:r>
-            <a:r>
-              <a:rPr sz="2000" b="0">
+              <a:t>coocorrência </a:t>
+            </a:r>
+            <a:r>
+              <a:rPr sz="2000" b="1" dirty="0" err="1">
+                <a:solidFill>
+                  <a:srgbClr val="0F1B2D"/>
+                </a:solidFill>
+                <a:latin typeface="Calibri"/>
+              </a:rPr>
+              <a:t>em</a:t>
+            </a:r>
+            <a:r>
+              <a:rPr sz="2000" b="1" dirty="0">
+                <a:solidFill>
+                  <a:srgbClr val="0F1B2D"/>
+                </a:solidFill>
+                <a:latin typeface="Calibri"/>
+              </a:rPr>
+              <a:t> </a:t>
+            </a:r>
+            <a:r>
+              <a:rPr sz="2000" b="1" dirty="0" err="1">
+                <a:solidFill>
+                  <a:srgbClr val="0F1B2D"/>
+                </a:solidFill>
+                <a:latin typeface="Calibri"/>
+              </a:rPr>
+              <a:t>transações</a:t>
+            </a:r>
+            <a:r>
+              <a:rPr sz="2000" b="0" dirty="0">
                 <a:solidFill>
                   <a:srgbClr val="1A232E"/>
                 </a:solidFill>
@@ -13204,7 +18392,7 @@
               </a:spcAft>
             </a:pPr>
             <a:r>
-              <a:rPr sz="1700" b="1">
+              <a:rPr sz="1700" b="1" dirty="0">
                 <a:solidFill>
                   <a:srgbClr val="C8A04B"/>
                 </a:solidFill>
@@ -13213,14 +18401,110 @@
               <a:t>–  </a:t>
             </a:r>
             <a:r>
-              <a:rPr sz="1700" b="0">
+              <a:rPr sz="1700" b="0" dirty="0" err="1">
                 <a:solidFill>
                   <a:srgbClr val="5A6672"/>
                 </a:solidFill>
                 <a:latin typeface="Calibri"/>
               </a:rPr>
-              <a:t>Não precisam de notas nem de muitos clientes</a:t>
-            </a:r>
+              <a:t>Não</a:t>
+            </a:r>
+            <a:r>
+              <a:rPr sz="1700" b="0" dirty="0">
+                <a:solidFill>
+                  <a:srgbClr val="5A6672"/>
+                </a:solidFill>
+                <a:latin typeface="Calibri"/>
+              </a:rPr>
+              <a:t> </a:t>
+            </a:r>
+            <a:r>
+              <a:rPr sz="1700" b="0" dirty="0" err="1">
+                <a:solidFill>
+                  <a:srgbClr val="5A6672"/>
+                </a:solidFill>
+                <a:latin typeface="Calibri"/>
+              </a:rPr>
+              <a:t>precisam</a:t>
+            </a:r>
+            <a:r>
+              <a:rPr sz="1700" b="0" dirty="0">
+                <a:solidFill>
+                  <a:srgbClr val="5A6672"/>
+                </a:solidFill>
+                <a:latin typeface="Calibri"/>
+              </a:rPr>
+              <a:t> de </a:t>
+            </a:r>
+            <a:r>
+              <a:rPr sz="1700" b="0" dirty="0" err="1">
+                <a:solidFill>
+                  <a:srgbClr val="5A6672"/>
+                </a:solidFill>
+                <a:latin typeface="Calibri"/>
+              </a:rPr>
+              <a:t>notas</a:t>
+            </a:r>
+            <a:r>
+              <a:rPr sz="1700" b="0" dirty="0">
+                <a:solidFill>
+                  <a:srgbClr val="5A6672"/>
+                </a:solidFill>
+                <a:latin typeface="Calibri"/>
+              </a:rPr>
+              <a:t> </a:t>
+            </a:r>
+            <a:r>
+              <a:rPr sz="1700" b="0" dirty="0" err="1">
+                <a:solidFill>
+                  <a:srgbClr val="5A6672"/>
+                </a:solidFill>
+                <a:latin typeface="Calibri"/>
+              </a:rPr>
+              <a:t>nem</a:t>
+            </a:r>
+            <a:r>
+              <a:rPr sz="1700" b="0" dirty="0">
+                <a:solidFill>
+                  <a:srgbClr val="5A6672"/>
+                </a:solidFill>
+                <a:latin typeface="Calibri"/>
+              </a:rPr>
+              <a:t> de </a:t>
+            </a:r>
+            <a:r>
+              <a:rPr sz="1700" b="0" dirty="0" err="1">
+                <a:solidFill>
+                  <a:srgbClr val="5A6672"/>
+                </a:solidFill>
+                <a:latin typeface="Calibri"/>
+              </a:rPr>
+              <a:t>muitos</a:t>
+            </a:r>
+            <a:r>
+              <a:rPr sz="1700" b="0" dirty="0">
+                <a:solidFill>
+                  <a:srgbClr val="5A6672"/>
+                </a:solidFill>
+                <a:latin typeface="Calibri"/>
+              </a:rPr>
+              <a:t> </a:t>
+            </a:r>
+            <a:r>
+              <a:rPr sz="1700" b="0" dirty="0" err="1">
+                <a:solidFill>
+                  <a:srgbClr val="5A6672"/>
+                </a:solidFill>
+                <a:latin typeface="Calibri"/>
+              </a:rPr>
+              <a:t>clientes</a:t>
+            </a:r>
+            <a:endParaRPr sz="1700" b="0" dirty="0">
+              <a:solidFill>
+                <a:srgbClr val="5A6672"/>
+              </a:solidFill>
+              <a:latin typeface="Calibri"/>
+            </a:endParaRPr>
           </a:p>
           <a:p>
             <a:pPr algn="l">
@@ -13232,7 +18516,7 @@
               </a:spcAft>
             </a:pPr>
             <a:r>
-              <a:rPr sz="1700" b="1">
+              <a:rPr sz="1700" b="1" dirty="0">
                 <a:solidFill>
                   <a:srgbClr val="C8A04B"/>
                 </a:solidFill>
@@ -13241,14 +18525,74 @@
               <a:t>–  </a:t>
             </a:r>
             <a:r>
-              <a:rPr sz="1700" b="0">
+              <a:rPr sz="1700" b="0" dirty="0" err="1">
                 <a:solidFill>
                   <a:srgbClr val="5A6672"/>
                 </a:solidFill>
                 <a:latin typeface="Calibri"/>
               </a:rPr>
-              <a:t>Resultado interpretável pela equipe de vendas</a:t>
-            </a:r>
+              <a:t>Resultado</a:t>
+            </a:r>
+            <a:r>
+              <a:rPr sz="1700" b="0" dirty="0">
+                <a:solidFill>
+                  <a:srgbClr val="5A6672"/>
+                </a:solidFill>
+                <a:latin typeface="Calibri"/>
+              </a:rPr>
+              <a:t> </a:t>
+            </a:r>
+            <a:r>
+              <a:rPr sz="1700" b="0" dirty="0" err="1">
+                <a:solidFill>
+                  <a:srgbClr val="5A6672"/>
+                </a:solidFill>
+                <a:latin typeface="Calibri"/>
+              </a:rPr>
+              <a:t>interpretável</a:t>
+            </a:r>
+            <a:r>
+              <a:rPr sz="1700" b="0" dirty="0">
+                <a:solidFill>
+                  <a:srgbClr val="5A6672"/>
+                </a:solidFill>
+                <a:latin typeface="Calibri"/>
+              </a:rPr>
+              <a:t> pela </a:t>
+            </a:r>
+            <a:r>
+              <a:rPr sz="1700" b="0" dirty="0" err="1">
+                <a:solidFill>
+                  <a:srgbClr val="5A6672"/>
+                </a:solidFill>
+                <a:latin typeface="Calibri"/>
+              </a:rPr>
+              <a:t>equipe</a:t>
+            </a:r>
+            <a:r>
+              <a:rPr sz="1700" b="0" dirty="0">
+                <a:solidFill>
+                  <a:srgbClr val="5A6672"/>
+                </a:solidFill>
+                <a:latin typeface="Calibri"/>
+              </a:rPr>
+              <a:t> de </a:t>
+            </a:r>
+            <a:r>
+              <a:rPr sz="1700" b="0" dirty="0" err="1">
+                <a:solidFill>
+                  <a:srgbClr val="5A6672"/>
+                </a:solidFill>
+                <a:latin typeface="Calibri"/>
+              </a:rPr>
+              <a:t>vendas</a:t>
+            </a:r>
+            <a:endParaRPr sz="1700" b="0" dirty="0">
+              <a:solidFill>
+                <a:srgbClr val="5A6672"/>
+              </a:solidFill>
+              <a:latin typeface="Calibri"/>
+            </a:endParaRPr>
           </a:p>
           <a:p>
             <a:pPr algn="l">
@@ -13260,7 +18604,7 @@
               </a:spcAft>
             </a:pPr>
             <a:r>
-              <a:rPr sz="1700" b="1">
+              <a:rPr sz="1700" b="1" dirty="0">
                 <a:solidFill>
                   <a:srgbClr val="C8A04B"/>
                 </a:solidFill>
@@ -13269,14 +18613,74 @@
               <a:t>–  </a:t>
             </a:r>
             <a:r>
-              <a:rPr sz="1700" b="0">
+              <a:rPr sz="1700" b="0" dirty="0" err="1">
                 <a:solidFill>
                   <a:srgbClr val="5A6672"/>
                 </a:solidFill>
                 <a:latin typeface="Calibri"/>
               </a:rPr>
-              <a:t>Baixo custo computacional no volume estudado</a:t>
-            </a:r>
+              <a:t>Baixo</a:t>
+            </a:r>
+            <a:r>
+              <a:rPr sz="1700" b="0" dirty="0">
+                <a:solidFill>
+                  <a:srgbClr val="5A6672"/>
+                </a:solidFill>
+                <a:latin typeface="Calibri"/>
+              </a:rPr>
+              <a:t> </a:t>
+            </a:r>
+            <a:r>
+              <a:rPr sz="1700" b="0" dirty="0" err="1">
+                <a:solidFill>
+                  <a:srgbClr val="5A6672"/>
+                </a:solidFill>
+                <a:latin typeface="Calibri"/>
+              </a:rPr>
+              <a:t>custo</a:t>
+            </a:r>
+            <a:r>
+              <a:rPr sz="1700" b="0" dirty="0">
+                <a:solidFill>
+                  <a:srgbClr val="5A6672"/>
+                </a:solidFill>
+                <a:latin typeface="Calibri"/>
+              </a:rPr>
+              <a:t> </a:t>
+            </a:r>
+            <a:r>
+              <a:rPr sz="1700" b="0" dirty="0" err="1">
+                <a:solidFill>
+                  <a:srgbClr val="5A6672"/>
+                </a:solidFill>
+                <a:latin typeface="Calibri"/>
+              </a:rPr>
+              <a:t>computacional</a:t>
+            </a:r>
+            <a:r>
+              <a:rPr sz="1700" b="0" dirty="0">
+                <a:solidFill>
+                  <a:srgbClr val="5A6672"/>
+                </a:solidFill>
+                <a:latin typeface="Calibri"/>
+              </a:rPr>
+              <a:t> no volume </a:t>
+            </a:r>
+            <a:r>
+              <a:rPr sz="1700" b="0" dirty="0" err="1">
+                <a:solidFill>
+                  <a:srgbClr val="5A6672"/>
+                </a:solidFill>
+                <a:latin typeface="Calibri"/>
+              </a:rPr>
+              <a:t>estudado</a:t>
+            </a:r>
+            <a:endParaRPr sz="1700" b="0" dirty="0">
+              <a:solidFill>
+                <a:srgbClr val="5A6672"/>
+              </a:solidFill>
+              <a:latin typeface="Calibri"/>
+            </a:endParaRPr>
           </a:p>
           <a:p>
             <a:pPr algn="l">
@@ -13288,7 +18692,7 @@
               </a:spcAft>
             </a:pPr>
             <a:r>
-              <a:rPr sz="2000" b="1">
+              <a:rPr sz="2000" b="1" dirty="0">
                 <a:solidFill>
                   <a:srgbClr val="C8A04B"/>
                 </a:solidFill>
@@ -13297,25 +18701,106 @@
               <a:t>•  </a:t>
             </a:r>
             <a:r>
-              <a:rPr sz="2000" b="0">
+              <a:rPr sz="2000" b="0" dirty="0">
                 <a:solidFill>
                   <a:srgbClr val="1A232E"/>
                 </a:solidFill>
                 <a:latin typeface="Calibri"/>
               </a:rPr>
-              <a:t>Lacuna acadêmica: maioria dos estudos foca B2C de </a:t>
-            </a:r>
-            <a:r>
-              <a:rPr sz="2000" b="1">
+              <a:t>Lacuna </a:t>
+            </a:r>
+            <a:r>
+              <a:rPr sz="2000" b="0" dirty="0" err="1">
+                <a:solidFill>
+                  <a:srgbClr val="1A232E"/>
+                </a:solidFill>
+                <a:latin typeface="Calibri"/>
+              </a:rPr>
+              <a:t>acadêmica</a:t>
+            </a:r>
+            <a:r>
+              <a:rPr sz="2000" b="0" dirty="0">
+                <a:solidFill>
+                  <a:srgbClr val="1A232E"/>
+                </a:solidFill>
+                <a:latin typeface="Calibri"/>
+              </a:rPr>
+              <a:t>: </a:t>
+            </a:r>
+            <a:r>
+              <a:rPr sz="2000" b="0" dirty="0" err="1">
+                <a:solidFill>
+                  <a:srgbClr val="1A232E"/>
+                </a:solidFill>
+                <a:latin typeface="Calibri"/>
+              </a:rPr>
+              <a:t>maioria</a:t>
+            </a:r>
+            <a:r>
+              <a:rPr sz="2000" b="0" dirty="0">
+                <a:solidFill>
+                  <a:srgbClr val="1A232E"/>
+                </a:solidFill>
+                <a:latin typeface="Calibri"/>
+              </a:rPr>
+              <a:t> dos </a:t>
+            </a:r>
+            <a:r>
+              <a:rPr sz="2000" b="0" dirty="0" err="1">
+                <a:solidFill>
+                  <a:srgbClr val="1A232E"/>
+                </a:solidFill>
+                <a:latin typeface="Calibri"/>
+              </a:rPr>
+              <a:t>estudos</a:t>
+            </a:r>
+            <a:r>
+              <a:rPr sz="2000" b="0" dirty="0">
+                <a:solidFill>
+                  <a:srgbClr val="1A232E"/>
+                </a:solidFill>
+                <a:latin typeface="Calibri"/>
+              </a:rPr>
+              <a:t> </a:t>
+            </a:r>
+            <a:r>
+              <a:rPr sz="2000" b="0" dirty="0" err="1">
+                <a:solidFill>
+                  <a:srgbClr val="1A232E"/>
+                </a:solidFill>
+                <a:latin typeface="Calibri"/>
+              </a:rPr>
+              <a:t>foca</a:t>
+            </a:r>
+            <a:r>
+              <a:rPr sz="2000" b="0" dirty="0">
+                <a:solidFill>
+                  <a:srgbClr val="1A232E"/>
+                </a:solidFill>
+                <a:latin typeface="Calibri"/>
+              </a:rPr>
+              <a:t> B2C de </a:t>
+            </a:r>
+            <a:r>
+              <a:rPr sz="2000" b="1" dirty="0" err="1">
                 <a:solidFill>
                   <a:srgbClr val="0F1B2D"/>
                 </a:solidFill>
                 <a:latin typeface="Calibri"/>
               </a:rPr>
-              <a:t>grande volume</a:t>
-            </a:r>
-            <a:r>
-              <a:rPr sz="2000" b="0">
+              <a:t>grande</a:t>
+            </a:r>
+            <a:r>
+              <a:rPr sz="2000" b="1" dirty="0">
+                <a:solidFill>
+                  <a:srgbClr val="0F1B2D"/>
+                </a:solidFill>
+                <a:latin typeface="Calibri"/>
+              </a:rPr>
+              <a:t> volume</a:t>
+            </a:r>
+            <a:r>
+              <a:rPr sz="2000" b="0" dirty="0">
                 <a:solidFill>
                   <a:srgbClr val="1A232E"/>
                 </a:solidFill>
@@ -13335,7 +18820,7 @@
 </file>
 
 <file path=ppt/slides/slide9.xml><?xml version="1.0" encoding="utf-8"?>
-<p:sld xmlns:a="http://schemas.openxmlformats.org/drawingml/2006/main" xmlns:p="http://schemas.openxmlformats.org/presentationml/2006/main" xmlns:r="http://schemas.openxmlformats.org/officeDocument/2006/relationships">
+<p:sld xmlns:a="http://schemas.openxmlformats.org/drawingml/2006/main" xmlns:r="http://schemas.openxmlformats.org/officeDocument/2006/relationships" xmlns:p="http://schemas.openxmlformats.org/presentationml/2006/main">
   <p:cSld>
     <p:spTree>
       <p:nvGrpSpPr>
@@ -13343,7 +18828,14 @@
         <p:cNvGrpSpPr/>
         <p:nvPr/>
       </p:nvGrpSpPr>
-      <p:grpSpPr/>
+      <p:grpSpPr>
+        <a:xfrm>
+          <a:off x="0" y="0"/>
+          <a:ext cx="0" cy="0"/>
+          <a:chOff x="0" y="0"/>
+          <a:chExt cx="0" cy="0"/>
+        </a:xfrm>
+      </p:grpSpPr>
       <p:sp>
         <p:nvSpPr>
           <p:cNvPr id="2" name="Rectangle 1"/>
@@ -13385,6 +18877,7 @@
           <a:lstStyle/>
           <a:p>
             <a:pPr algn="ctr"/>
+            <a:endParaRPr/>
           </a:p>
         </p:txBody>
       </p:sp>
@@ -13429,6 +18922,7 @@
           <a:lstStyle/>
           <a:p>
             <a:pPr algn="ctr"/>
+            <a:endParaRPr/>
           </a:p>
         </p:txBody>
       </p:sp>
@@ -13557,6 +19051,7 @@
           <a:lstStyle/>
           <a:p>
             <a:pPr algn="ctr"/>
+            <a:endParaRPr/>
           </a:p>
         </p:txBody>
       </p:sp>
@@ -13828,6 +19323,7 @@
           <a:lstStyle/>
           <a:p>
             <a:pPr algn="ctr"/>
+            <a:endParaRPr/>
           </a:p>
         </p:txBody>
       </p:sp>
@@ -13956,6 +19452,7 @@
           <a:lstStyle/>
           <a:p>
             <a:pPr algn="ctr"/>
+            <a:endParaRPr/>
           </a:p>
         </p:txBody>
       </p:sp>
@@ -14084,6 +19581,7 @@
           <a:lstStyle/>
           <a:p>
             <a:pPr algn="ctr"/>
+            <a:endParaRPr/>
           </a:p>
         </p:txBody>
       </p:sp>
@@ -14212,6 +19710,7 @@
           <a:lstStyle/>
           <a:p>
             <a:pPr algn="ctr"/>
+            <a:endParaRPr/>
           </a:p>
         </p:txBody>
       </p:sp>
@@ -14340,6 +19839,7 @@
           <a:lstStyle/>
           <a:p>
             <a:pPr algn="ctr"/>
+            <a:endParaRPr/>
           </a:p>
         </p:txBody>
       </p:sp>
@@ -14795,4 +20295,299 @@
   </a:objectDefaults>
   <a:extraClrSchemeLst/>
 </a:theme>
+</file>
+
+<file path=ppt/theme/theme2.xml><?xml version="1.0" encoding="utf-8"?>
+<a:theme xmlns:a="http://schemas.openxmlformats.org/drawingml/2006/main" name="Tema do Office">
+  <a:themeElements>
+    <a:clrScheme name="Office">
+      <a:dk1>
+        <a:sysClr val="windowText" lastClr="000000"/>
+      </a:dk1>
+      <a:lt1>
+        <a:sysClr val="window" lastClr="FFFFFF"/>
+      </a:lt1>
+      <a:dk2>
+        <a:srgbClr val="44546A"/>
+      </a:dk2>
+      <a:lt2>
+        <a:srgbClr val="E7E6E6"/>
+      </a:lt2>
+      <a:accent1>
+        <a:srgbClr val="4472C4"/>
+      </a:accent1>
+      <a:accent2>
+        <a:srgbClr val="ED7D31"/>
+      </a:accent2>
+      <a:accent3>
+        <a:srgbClr val="A5A5A5"/>
+      </a:accent3>
+      <a:accent4>
+        <a:srgbClr val="FFC000"/>
+      </a:accent4>
+      <a:accent5>
+        <a:srgbClr val="5B9BD5"/>
+      </a:accent5>
+      <a:accent6>
+        <a:srgbClr val="70AD47"/>
+      </a:accent6>
+      <a:hlink>
+        <a:srgbClr val="0563C1"/>
+      </a:hlink>
+      <a:folHlink>
+        <a:srgbClr val="954F72"/>
+      </a:folHlink>
+    </a:clrScheme>
+    <a:fontScheme name="Office">
+      <a:majorFont>
+        <a:latin typeface="Calibri Light" panose="020F0302020204030204"/>
+        <a:ea typeface=""/>
+        <a:cs typeface=""/>
+        <a:font script="Jpan" typeface="游ゴシック Light"/>
+        <a:font script="Hang" typeface="맑은 고딕"/>
+        <a:font script="Hans" typeface="等线 Light"/>
+        <a:font script="Hant" typeface="新細明體"/>
+        <a:font script="Arab" typeface="Times New Roman"/>
+        <a:font script="Hebr" typeface="Times New Roman"/>
+        <a:font script="Thai" typeface="Angsana New"/>
+        <a:font script="Ethi" typeface="Nyala"/>
+        <a:font script="Beng" typeface="Vrinda"/>
+        <a:font script="Gujr" typeface="Shruti"/>
+        <a:font script="Khmr" typeface="MoolBoran"/>
+        <a:font script="Knda" typeface="Tunga"/>
+        <a:font script="Guru" typeface="Raavi"/>
+        <a:font script="Cans" typeface="Euphemia"/>
+        <a:font script="Cher" typeface="Plantagenet Cherokee"/>
+        <a:font script="Yiii" typeface="Microsoft Yi Baiti"/>
+        <a:font script="Tibt" typeface="Microsoft Himalaya"/>
+        <a:font script="Thaa" typeface="MV Boli"/>
+        <a:font script="Deva" typeface="Mangal"/>
+        <a:font script="Telu" typeface="Gautami"/>
+        <a:font script="Taml" typeface="Latha"/>
+        <a:font script="Syrc" typeface="Estrangelo Edessa"/>
+        <a:font script="Orya" typeface="Kalinga"/>
+        <a:font script="Mlym" typeface="Kartika"/>
+        <a:font script="Laoo" typeface="DokChampa"/>
+        <a:font script="Sinh" typeface="Iskoola Pota"/>
+        <a:font script="Mong" typeface="Mongolian Baiti"/>
+        <a:font script="Viet" typeface="Times New Roman"/>
+        <a:font script="Uigh" typeface="Microsoft Uighur"/>
+        <a:font script="Geor" typeface="Sylfaen"/>
+        <a:font script="Armn" typeface="Arial"/>
+        <a:font script="Bugi" typeface="Leelawadee UI"/>
+        <a:font script="Bopo" typeface="Microsoft JhengHei"/>
+        <a:font script="Java" typeface="Javanese Text"/>
+        <a:font script="Lisu" typeface="Segoe UI"/>
+        <a:font script="Mymr" typeface="Myanmar Text"/>
+        <a:font script="Nkoo" typeface="Ebrima"/>
+        <a:font script="Olck" typeface="Nirmala UI"/>
+        <a:font script="Osma" typeface="Ebrima"/>
+        <a:font script="Phag" typeface="Phagspa"/>
+        <a:font script="Syrn" typeface="Estrangelo Edessa"/>
+        <a:font script="Syrj" typeface="Estrangelo Edessa"/>
+        <a:font script="Syre" typeface="Estrangelo Edessa"/>
+        <a:font script="Sora" typeface="Nirmala UI"/>
+        <a:font script="Tale" typeface="Microsoft Tai Le"/>
+        <a:font script="Talu" typeface="Microsoft New Tai Lue"/>
+        <a:font script="Tfng" typeface="Ebrima"/>
+      </a:majorFont>
+      <a:minorFont>
+        <a:latin typeface="Calibri" panose="020F0502020204030204"/>
+        <a:ea typeface=""/>
+        <a:cs typeface=""/>
+        <a:font script="Jpan" typeface="游ゴシック"/>
+        <a:font script="Hang" typeface="맑은 고딕"/>
+        <a:font script="Hans" typeface="等线"/>
+        <a:font script="Hant" typeface="新細明體"/>
+        <a:font script="Arab" typeface="Arial"/>
+        <a:font script="Hebr" typeface="Arial"/>
+        <a:font script="Thai" typeface="Cordia New"/>
+        <a:font script="Ethi" typeface="Nyala"/>
+        <a:font script="Beng" typeface="Vrinda"/>
+        <a:font script="Gujr" typeface="Shruti"/>
+        <a:font script="Khmr" typeface="DaunPenh"/>
+        <a:font script="Knda" typeface="Tunga"/>
+        <a:font script="Guru" typeface="Raavi"/>
+        <a:font script="Cans" typeface="Euphemia"/>
+        <a:font script="Cher" typeface="Plantagenet Cherokee"/>
+        <a:font script="Yiii" typeface="Microsoft Yi Baiti"/>
+        <a:font script="Tibt" typeface="Microsoft Himalaya"/>
+        <a:font script="Thaa" typeface="MV Boli"/>
+        <a:font script="Deva" typeface="Mangal"/>
+        <a:font script="Telu" typeface="Gautami"/>
+        <a:font script="Taml" typeface="Latha"/>
+        <a:font script="Syrc" typeface="Estrangelo Edessa"/>
+        <a:font script="Orya" typeface="Kalinga"/>
+        <a:font script="Mlym" typeface="Kartika"/>
+        <a:font script="Laoo" typeface="DokChampa"/>
+        <a:font script="Sinh" typeface="Iskoola Pota"/>
+        <a:font script="Mong" typeface="Mongolian Baiti"/>
+        <a:font script="Viet" typeface="Arial"/>
+        <a:font script="Uigh" typeface="Microsoft Uighur"/>
+        <a:font script="Geor" typeface="Sylfaen"/>
+        <a:font script="Armn" typeface="Arial"/>
+        <a:font script="Bugi" typeface="Leelawadee UI"/>
+        <a:font script="Bopo" typeface="Microsoft JhengHei"/>
+        <a:font script="Java" typeface="Javanese Text"/>
+        <a:font script="Lisu" typeface="Segoe UI"/>
+        <a:font script="Mymr" typeface="Myanmar Text"/>
+        <a:font script="Nkoo" typeface="Ebrima"/>
+        <a:font script="Olck" typeface="Nirmala UI"/>
+        <a:font script="Osma" typeface="Ebrima"/>
+        <a:font script="Phag" typeface="Phagspa"/>
+        <a:font script="Syrn" typeface="Estrangelo Edessa"/>
+        <a:font script="Syrj" typeface="Estrangelo Edessa"/>
+        <a:font script="Syre" typeface="Estrangelo Edessa"/>
+        <a:font script="Sora" typeface="Nirmala UI"/>
+        <a:font script="Tale" typeface="Microsoft Tai Le"/>
+        <a:font script="Talu" typeface="Microsoft New Tai Lue"/>
+        <a:font script="Tfng" typeface="Ebrima"/>
+      </a:minorFont>
+    </a:fontScheme>
+    <a:fmtScheme name="Office">
+      <a:fillStyleLst>
+        <a:solidFill>
+          <a:schemeClr val="phClr"/>
+        </a:solidFill>
+        <a:gradFill rotWithShape="1">
+          <a:gsLst>
+            <a:gs pos="0">
+              <a:schemeClr val="phClr">
+                <a:lumMod val="110000"/>
+                <a:satMod val="105000"/>
+                <a:tint val="67000"/>
+              </a:schemeClr>
+            </a:gs>
+            <a:gs pos="50000">
+              <a:schemeClr val="phClr">
+                <a:lumMod val="105000"/>
+                <a:satMod val="103000"/>
+                <a:tint val="73000"/>
+              </a:schemeClr>
+            </a:gs>
+            <a:gs pos="100000">
+              <a:schemeClr val="phClr">
+                <a:lumMod val="105000"/>
+                <a:satMod val="109000"/>
+                <a:tint val="81000"/>
+              </a:schemeClr>
+            </a:gs>
+          </a:gsLst>
+          <a:lin ang="5400000" scaled="0"/>
+        </a:gradFill>
+        <a:gradFill rotWithShape="1">
+          <a:gsLst>
+            <a:gs pos="0">
+              <a:schemeClr val="phClr">
+                <a:satMod val="103000"/>
+                <a:lumMod val="102000"/>
+                <a:tint val="94000"/>
+              </a:schemeClr>
+            </a:gs>
+            <a:gs pos="50000">
+              <a:schemeClr val="phClr">
+                <a:satMod val="110000"/>
+                <a:lumMod val="100000"/>
+                <a:shade val="100000"/>
+              </a:schemeClr>
+            </a:gs>
+            <a:gs pos="100000">
+              <a:schemeClr val="phClr">
+                <a:lumMod val="99000"/>
+                <a:satMod val="120000"/>
+                <a:shade val="78000"/>
+              </a:schemeClr>
+            </a:gs>
+          </a:gsLst>
+          <a:lin ang="5400000" scaled="0"/>
+        </a:gradFill>
+      </a:fillStyleLst>
+      <a:lnStyleLst>
+        <a:ln w="6350" cap="flat" cmpd="sng" algn="ctr">
+          <a:solidFill>
+            <a:schemeClr val="phClr"/>
+          </a:solidFill>
+          <a:prstDash val="solid"/>
+          <a:miter lim="800000"/>
+        </a:ln>
+        <a:ln w="12700" cap="flat" cmpd="sng" algn="ctr">
+          <a:solidFill>
+            <a:schemeClr val="phClr"/>
+          </a:solidFill>
+          <a:prstDash val="solid"/>
+          <a:miter lim="800000"/>
+        </a:ln>
+        <a:ln w="19050" cap="flat" cmpd="sng" algn="ctr">
+          <a:solidFill>
+            <a:schemeClr val="phClr"/>
+          </a:solidFill>
+          <a:prstDash val="solid"/>
+          <a:miter lim="800000"/>
+        </a:ln>
+      </a:lnStyleLst>
+      <a:effectStyleLst>
+        <a:effectStyle>
+          <a:effectLst/>
+        </a:effectStyle>
+        <a:effectStyle>
+          <a:effectLst/>
+        </a:effectStyle>
+        <a:effectStyle>
+          <a:effectLst>
+            <a:outerShdw blurRad="57150" dist="19050" dir="5400000" algn="ctr" rotWithShape="0">
+              <a:srgbClr val="000000">
+                <a:alpha val="63000"/>
+              </a:srgbClr>
+            </a:outerShdw>
+          </a:effectLst>
+        </a:effectStyle>
+      </a:effectStyleLst>
+      <a:bgFillStyleLst>
+        <a:solidFill>
+          <a:schemeClr val="phClr"/>
+        </a:solidFill>
+        <a:solidFill>
+          <a:schemeClr val="phClr">
+            <a:tint val="95000"/>
+            <a:satMod val="170000"/>
+          </a:schemeClr>
+        </a:solidFill>
+        <a:gradFill rotWithShape="1">
+          <a:gsLst>
+            <a:gs pos="0">
+              <a:schemeClr val="phClr">
+                <a:tint val="93000"/>
+                <a:satMod val="150000"/>
+                <a:shade val="98000"/>
+                <a:lumMod val="102000"/>
+              </a:schemeClr>
+            </a:gs>
+            <a:gs pos="50000">
+              <a:schemeClr val="phClr">
+                <a:tint val="98000"/>
+                <a:satMod val="130000"/>
+                <a:shade val="90000"/>
+                <a:lumMod val="103000"/>
+              </a:schemeClr>
+            </a:gs>
+            <a:gs pos="100000">
+              <a:schemeClr val="phClr">
+                <a:shade val="63000"/>
+                <a:satMod val="120000"/>
+              </a:schemeClr>
+            </a:gs>
+          </a:gsLst>
+          <a:lin ang="5400000" scaled="0"/>
+        </a:gradFill>
+      </a:bgFillStyleLst>
+    </a:fmtScheme>
+  </a:themeElements>
+  <a:objectDefaults/>
+  <a:extraClrSchemeLst/>
+  <a:extLst>
+    <a:ext uri="{05A4C25C-085E-4340-85A3-A5531E510DB2}">
+      <thm15:themeFamily xmlns:thm15="http://schemas.microsoft.com/office/thememl/2012/main" name="Office Theme" id="{62F939B6-93AF-4DB8-9C6B-D6C7DFDC589F}" vid="{4A3C46E8-61CC-4603-A589-7422A47A8E4A}"/>
+    </a:ext>
+  </a:extLst>
+</a:theme>
 </file>